--- a/writeup/Zonation_Reanalysis.pptx
+++ b/writeup/Zonation_Reanalysis.pptx
@@ -20,9 +20,11 @@
     <p:sldId id="268" r:id="rId14"/>
     <p:sldId id="269" r:id="rId15"/>
     <p:sldId id="270" r:id="rId16"/>
+    <p:sldId id="271" r:id="rId17"/>
+    <p:sldId id="272" r:id="rId18"/>
   </p:sldIdLst>
   <p:notesMasterIdLst>
-    <p:notesMasterId r:id="rId17"/>
+    <p:notesMasterId r:id="rId19"/>
   </p:notesMasterIdLst>
   <p:sldSz cx="12192000" cy="6858000"/>
   <p:notesSz cx="6858000" cy="12192000"/>
@@ -1706,6 +1708,182 @@
 </p:notes>
 </file>
 
+<file path=ppt/notesSlides/notesSlide16.xml><?xml version="1.0" encoding="utf-8"?>
+<p:notes xmlns:a="http://schemas.openxmlformats.org/drawingml/2006/main" xmlns:r="http://schemas.openxmlformats.org/officeDocument/2006/relationships" xmlns:p="http://schemas.openxmlformats.org/presentationml/2006/main">
+  <p:cSld>
+    <p:spTree>
+      <p:nvGrpSpPr>
+        <p:cNvPr id="1" name=""/>
+        <p:cNvGrpSpPr/>
+        <p:nvPr/>
+      </p:nvGrpSpPr>
+      <p:grpSpPr>
+        <a:xfrm>
+          <a:off x="0" y="0"/>
+          <a:ext cx="0" cy="0"/>
+          <a:chOff x="0" y="0"/>
+          <a:chExt cx="0" cy="0"/>
+        </a:xfrm>
+      </p:grpSpPr>
+      <p:sp>
+        <p:nvSpPr>
+          <p:cNvPr id="2" name="Slide Image Placeholder 1"/>
+          <p:cNvSpPr>
+            <a:spLocks noGrp="1" noRot="1" noChangeAspect="1"/>
+          </p:cNvSpPr>
+          <p:nvPr>
+            <p:ph type="sldImg"/>
+          </p:nvPr>
+        </p:nvSpPr>
+        <p:spPr/>
+      </p:sp>
+      <p:sp>
+        <p:nvSpPr>
+          <p:cNvPr id="3" name="Notes Placeholder 2"/>
+          <p:cNvSpPr>
+            <a:spLocks noGrp="1"/>
+          </p:cNvSpPr>
+          <p:nvPr>
+            <p:ph type="body" idx="1"/>
+          </p:nvPr>
+        </p:nvSpPr>
+        <p:spPr/>
+        <p:txBody>
+          <a:bodyPr/>
+          <a:lstStyle/>
+          <a:p>
+            <a:r>
+              <a:rPr lang="en-US" dirty="0"/>
+              <a:t/>
+            </a:r>
+            <a:endParaRPr lang="en-US" dirty="0"/>
+          </a:p>
+        </p:txBody>
+      </p:sp>
+      <p:sp>
+        <p:nvSpPr>
+          <p:cNvPr id="4" name="Slide Number Placeholder 3"/>
+          <p:cNvSpPr>
+            <a:spLocks noGrp="1"/>
+          </p:cNvSpPr>
+          <p:nvPr>
+            <p:ph type="sldNum" sz="quarter" idx="10"/>
+          </p:nvPr>
+        </p:nvSpPr>
+        <p:spPr/>
+        <p:txBody>
+          <a:bodyPr/>
+          <a:lstStyle/>
+          <a:p>
+            <a:fld id="{F7021451-1387-4CA6-816F-3879F97B5CBC}" type="slidenum">
+              <a:rPr lang="en-US"/>
+              <a:t>16</a:t>
+            </a:fld>
+            <a:endParaRPr lang="en-US"/>
+          </a:p>
+        </p:txBody>
+      </p:sp>
+    </p:spTree>
+    <p:extLst>
+      <p:ext uri="{BB962C8B-B14F-4D97-AF65-F5344CB8AC3E}">
+        <p14:creationId xmlns:p14="http://schemas.microsoft.com/office/powerpoint/2010/main" val="1024086991"/>
+      </p:ext>
+    </p:extLst>
+  </p:cSld>
+  <p:clrMapOvr>
+    <a:masterClrMapping/>
+  </p:clrMapOvr>
+</p:notes>
+</file>
+
+<file path=ppt/notesSlides/notesSlide17.xml><?xml version="1.0" encoding="utf-8"?>
+<p:notes xmlns:a="http://schemas.openxmlformats.org/drawingml/2006/main" xmlns:r="http://schemas.openxmlformats.org/officeDocument/2006/relationships" xmlns:p="http://schemas.openxmlformats.org/presentationml/2006/main">
+  <p:cSld>
+    <p:spTree>
+      <p:nvGrpSpPr>
+        <p:cNvPr id="1" name=""/>
+        <p:cNvGrpSpPr/>
+        <p:nvPr/>
+      </p:nvGrpSpPr>
+      <p:grpSpPr>
+        <a:xfrm>
+          <a:off x="0" y="0"/>
+          <a:ext cx="0" cy="0"/>
+          <a:chOff x="0" y="0"/>
+          <a:chExt cx="0" cy="0"/>
+        </a:xfrm>
+      </p:grpSpPr>
+      <p:sp>
+        <p:nvSpPr>
+          <p:cNvPr id="2" name="Slide Image Placeholder 1"/>
+          <p:cNvSpPr>
+            <a:spLocks noGrp="1" noRot="1" noChangeAspect="1"/>
+          </p:cNvSpPr>
+          <p:nvPr>
+            <p:ph type="sldImg"/>
+          </p:nvPr>
+        </p:nvSpPr>
+        <p:spPr/>
+      </p:sp>
+      <p:sp>
+        <p:nvSpPr>
+          <p:cNvPr id="3" name="Notes Placeholder 2"/>
+          <p:cNvSpPr>
+            <a:spLocks noGrp="1"/>
+          </p:cNvSpPr>
+          <p:nvPr>
+            <p:ph type="body" idx="1"/>
+          </p:nvPr>
+        </p:nvSpPr>
+        <p:spPr/>
+        <p:txBody>
+          <a:bodyPr/>
+          <a:lstStyle/>
+          <a:p>
+            <a:r>
+              <a:rPr lang="en-US" dirty="0"/>
+              <a:t/>
+            </a:r>
+            <a:endParaRPr lang="en-US" dirty="0"/>
+          </a:p>
+        </p:txBody>
+      </p:sp>
+      <p:sp>
+        <p:nvSpPr>
+          <p:cNvPr id="4" name="Slide Number Placeholder 3"/>
+          <p:cNvSpPr>
+            <a:spLocks noGrp="1"/>
+          </p:cNvSpPr>
+          <p:nvPr>
+            <p:ph type="sldNum" sz="quarter" idx="10"/>
+          </p:nvPr>
+        </p:nvSpPr>
+        <p:spPr/>
+        <p:txBody>
+          <a:bodyPr/>
+          <a:lstStyle/>
+          <a:p>
+            <a:fld id="{F7021451-1387-4CA6-816F-3879F97B5CBC}" type="slidenum">
+              <a:rPr lang="en-US"/>
+              <a:t>17</a:t>
+            </a:fld>
+            <a:endParaRPr lang="en-US"/>
+          </a:p>
+        </p:txBody>
+      </p:sp>
+    </p:spTree>
+    <p:extLst>
+      <p:ext uri="{BB962C8B-B14F-4D97-AF65-F5344CB8AC3E}">
+        <p14:creationId xmlns:p14="http://schemas.microsoft.com/office/powerpoint/2010/main" val="1024086991"/>
+      </p:ext>
+    </p:extLst>
+  </p:cSld>
+  <p:clrMapOvr>
+    <a:masterClrMapping/>
+  </p:clrMapOvr>
+</p:notes>
+</file>
+
 <file path=ppt/notesSlides/notesSlide2.xml><?xml version="1.0" encoding="utf-8"?>
 <p:notes xmlns:a="http://schemas.openxmlformats.org/drawingml/2006/main" xmlns:r="http://schemas.openxmlformats.org/officeDocument/2006/relationships" xmlns:p="http://schemas.openxmlformats.org/presentationml/2006/main">
   <p:cSld>
@@ -2974,7 +3152,7 @@
     <p:bg>
       <p:bgPr>
         <a:solidFill>
-          <a:srgbClr val="16242B"/>
+          <a:srgbClr val="F7F5F1"/>
         </a:solidFill>
       </p:bgPr>
     </p:bg>
@@ -3000,8 +3178,8 @@
         </p:nvSpPr>
         <p:spPr>
           <a:xfrm>
-            <a:off x="0" y="0"/>
-            <a:ext cx="256032" cy="6858000"/>
+            <a:off x="640080" y="502920"/>
+            <a:ext cx="164592" cy="310896"/>
           </a:xfrm>
           <a:prstGeom prst="rect">
             <a:avLst/>
@@ -3020,8 +3198,8 @@
         </p:nvSpPr>
         <p:spPr>
           <a:xfrm>
-            <a:off x="822960" y="640080"/>
-            <a:ext cx="10058400" cy="365760"/>
+            <a:off x="896112" y="502920"/>
+            <a:ext cx="8229600" cy="310896"/>
           </a:xfrm>
           <a:prstGeom prst="rect">
             <a:avLst/>
@@ -3037,52 +3215,30 @@
               <a:buNone/>
             </a:pPr>
             <a:r>
-              <a:rPr lang="en-US" sz="1400" b="1" spc="200" kern="0" dirty="0">
-                <a:solidFill>
-                  <a:srgbClr val="9FC0C4"/>
+              <a:rPr lang="en-US" sz="1200" b="1" spc="300" kern="0" dirty="0">
+                <a:solidFill>
+                  <a:srgbClr val="1B6E78"/>
                 </a:solidFill>
                 <a:latin typeface="Calibri" pitchFamily="34" charset="0"/>
                 <a:ea typeface="Calibri" pitchFamily="34" charset="-122"/>
                 <a:cs typeface="Calibri" pitchFamily="34" charset="-120"/>
               </a:rPr>
-              <a:t>A BOUNDED ANSWER — HONEST ABOUT POWER</a:t>
-            </a:r>
-            <a:endParaRPr lang="en-US" sz="1400" dirty="0"/>
-          </a:p>
-        </p:txBody>
-      </p:sp>
-      <p:sp>
-        <p:nvSpPr>
-          <p:cNvPr id="4" name="Shape 2"/>
-          <p:cNvSpPr/>
-          <p:nvPr/>
-        </p:nvSpPr>
-        <p:spPr>
-          <a:xfrm>
-            <a:off x="822960" y="1417320"/>
-            <a:ext cx="5212080" cy="4480560"/>
-          </a:xfrm>
-          <a:prstGeom prst="roundRect">
-            <a:avLst>
-              <a:gd name="adj" fmla="val 1633"/>
-            </a:avLst>
-          </a:prstGeom>
-          <a:solidFill>
-            <a:srgbClr val="1E3A40"/>
-          </a:solidFill>
-          <a:ln/>
-        </p:spPr>
-      </p:sp>
-      <p:sp>
-        <p:nvSpPr>
-          <p:cNvPr id="5" name="Text 3"/>
-          <p:cNvSpPr/>
-          <p:nvPr/>
-        </p:nvSpPr>
-        <p:spPr>
-          <a:xfrm>
-            <a:off x="1097280" y="1691640"/>
-            <a:ext cx="4572000" cy="365760"/>
+              <a:t>RESULT</a:t>
+            </a:r>
+            <a:endParaRPr lang="en-US" sz="1200" dirty="0"/>
+          </a:p>
+        </p:txBody>
+      </p:sp>
+      <p:sp>
+        <p:nvSpPr>
+          <p:cNvPr id="4" name="Text 2"/>
+          <p:cNvSpPr/>
+          <p:nvPr/>
+        </p:nvSpPr>
+        <p:spPr>
+          <a:xfrm>
+            <a:off x="640080" y="868680"/>
+            <a:ext cx="10881360" cy="914400"/>
           </a:xfrm>
           <a:prstGeom prst="rect">
             <a:avLst/>
@@ -3095,33 +3251,120 @@
           <a:lstStyle/>
           <a:p>
             <a:pPr indent="0" marL="0">
-              <a:buNone/>
-            </a:pPr>
-            <a:r>
-              <a:rPr lang="en-US" sz="1400" b="1" spc="200" kern="0" dirty="0">
-                <a:solidFill>
-                  <a:srgbClr val="1B6E78"/>
+              <a:lnSpc>
+                <a:spcPts val="3400"/>
+              </a:lnSpc>
+              <a:buNone/>
+            </a:pPr>
+            <a:r>
+              <a:rPr lang="en-US" sz="3000" b="1" dirty="0">
+                <a:solidFill>
+                  <a:srgbClr val="1B2B31"/>
+                </a:solidFill>
+                <a:latin typeface="Georgia" pitchFamily="34" charset="0"/>
+                <a:ea typeface="Georgia" pitchFamily="34" charset="-122"/>
+                <a:cs typeface="Georgia" pitchFamily="34" charset="-120"/>
+              </a:rPr>
+              <a:t>None detected — within biopsy-stage power (F1→cirrhotic F4)</a:t>
+            </a:r>
+            <a:endParaRPr lang="en-US" sz="3000" dirty="0"/>
+          </a:p>
+        </p:txBody>
+      </p:sp>
+      <p:graphicFrame>
+        <p:nvGraphicFramePr>
+          <p:cNvPr id="5" name="Chart 0" descr=""/>
+          <p:cNvGraphicFramePr/>
+          <p:nvPr/>
+        </p:nvGraphicFramePr>
+        <p:xfrm>
+          <a:off x="640080" y="2011680"/>
+          <a:ext cx="6126480" cy="3840480"/>
+        </p:xfrm>
+        <a:graphic xmlns:a="http://schemas.openxmlformats.org/drawingml/2006/main">
+          <a:graphicData uri="http://schemas.openxmlformats.org/drawingml/2006/chart">
+            <c:chart xmlns:c="http://schemas.openxmlformats.org/drawingml/2006/chart" r:id="rId1"/>
+          </a:graphicData>
+        </a:graphic>
+      </p:graphicFrame>
+      <p:sp>
+        <p:nvSpPr>
+          <p:cNvPr id="6" name="Text 3"/>
+          <p:cNvSpPr/>
+          <p:nvPr/>
+        </p:nvSpPr>
+        <p:spPr>
+          <a:xfrm>
+            <a:off x="640080" y="5852160"/>
+            <a:ext cx="6126480" cy="365760"/>
+          </a:xfrm>
+          <a:prstGeom prst="rect">
+            <a:avLst/>
+          </a:prstGeom>
+          <a:noFill/>
+          <a:ln/>
+        </p:spPr>
+        <p:txBody>
+          <a:bodyPr wrap="square" lIns="0" tIns="0" rIns="0" bIns="0" rtlCol="0" anchor="ctr"/>
+          <a:lstStyle/>
+          <a:p>
+            <a:pPr algn="ctr" indent="0" marL="0">
+              <a:buNone/>
+            </a:pPr>
+            <a:r>
+              <a:rPr lang="en-US" sz="1200" i="1" dirty="0">
+                <a:solidFill>
+                  <a:srgbClr val="5C6E73"/>
                 </a:solidFill>
                 <a:latin typeface="Calibri" pitchFamily="34" charset="0"/>
                 <a:ea typeface="Calibri" pitchFamily="34" charset="-122"/>
                 <a:cs typeface="Calibri" pitchFamily="34" charset="-120"/>
               </a:rPr>
-              <a:t>WHAT WE CAN SAY</a:t>
-            </a:r>
-            <a:endParaRPr lang="en-US" sz="1400" dirty="0"/>
-          </a:p>
-        </p:txBody>
-      </p:sp>
-      <p:sp>
-        <p:nvSpPr>
-          <p:cNvPr id="6" name="Text 4"/>
-          <p:cNvSpPr/>
-          <p:nvPr/>
-        </p:nvSpPr>
-        <p:spPr>
-          <a:xfrm>
-            <a:off x="1097280" y="2148840"/>
-            <a:ext cx="4754880" cy="3566160"/>
+              <a:t>Pericentral-anchor fraction of hepatocyte nuclei vs fibrosis stage (flat, non-monotone)</a:t>
+            </a:r>
+            <a:endParaRPr lang="en-US" sz="1200" dirty="0"/>
+          </a:p>
+        </p:txBody>
+      </p:sp>
+      <p:sp>
+        <p:nvSpPr>
+          <p:cNvPr id="7" name="Shape 4"/>
+          <p:cNvSpPr/>
+          <p:nvPr/>
+        </p:nvSpPr>
+        <p:spPr>
+          <a:xfrm>
+            <a:off x="7132320" y="2011680"/>
+            <a:ext cx="4389120" cy="3840480"/>
+          </a:xfrm>
+          <a:prstGeom prst="roundRect">
+            <a:avLst>
+              <a:gd name="adj" fmla="val 1905"/>
+            </a:avLst>
+          </a:prstGeom>
+          <a:solidFill>
+            <a:srgbClr val="FFFFFF"/>
+          </a:solidFill>
+          <a:ln/>
+          <a:effectLst>
+            <a:outerShdw sx="100000" sy="100000" kx="0" ky="0" algn="bl" rotWithShape="0" blurRad="88900" dist="38100" dir="8100000">
+              <a:srgbClr val="000000">
+                <a:alpha val="13000"/>
+              </a:srgbClr>
+            </a:outerShdw>
+          </a:effectLst>
+        </p:spPr>
+      </p:sp>
+      <p:sp>
+        <p:nvSpPr>
+          <p:cNvPr id="8" name="Text 5"/>
+          <p:cNvSpPr/>
+          <p:nvPr/>
+        </p:nvSpPr>
+        <p:spPr>
+          <a:xfrm>
+            <a:off x="7360920" y="2240280"/>
+            <a:ext cx="3931920" cy="457200"/>
           </a:xfrm>
           <a:prstGeom prst="rect">
             <a:avLst/>
@@ -3130,300 +3373,196 @@
           <a:ln/>
         </p:spPr>
         <p:txBody>
-          <a:bodyPr wrap="square" lIns="0" tIns="0" rIns="0" bIns="0" rtlCol="0" anchor="t"/>
-          <a:lstStyle/>
-          <a:p>
-            <a:pPr indent="0" marL="0">
-              <a:lnSpc>
-                <a:spcPts val="2300"/>
-              </a:lnSpc>
-              <a:buNone/>
-            </a:pPr>
-            <a:r>
-              <a:rPr lang="en-US" sz="1600" dirty="0">
-                <a:solidFill>
-                  <a:srgbClr val="FFFFFF"/>
+          <a:bodyPr wrap="square" lIns="0" tIns="0" rIns="0" bIns="0" rtlCol="0" anchor="ctr"/>
+          <a:lstStyle/>
+          <a:p>
+            <a:pPr indent="0" marL="0">
+              <a:buNone/>
+            </a:pPr>
+            <a:r>
+              <a:rPr lang="en-US" sz="1500" b="1" dirty="0">
+                <a:solidFill>
+                  <a:srgbClr val="1B2B31"/>
                 </a:solidFill>
                 <a:latin typeface="Calibri" pitchFamily="34" charset="0"/>
                 <a:ea typeface="Calibri" pitchFamily="34" charset="-122"/>
                 <a:cs typeface="Calibri" pitchFamily="34" charset="-120"/>
               </a:rPr>
-              <a:t>No detectable hepatocyte de-zonation across acquisition-matched biopsy MASLD (F0–F4 + NAS), by any mechanism.</a:t>
-            </a:r>
-            <a:endParaRPr lang="en-US" sz="1600" dirty="0"/>
-          </a:p>
-          <a:p>
-            <a:pPr indent="0" marL="0">
+              <a:t>Robust to everything that could fake a null:</a:t>
+            </a:r>
+            <a:endParaRPr lang="en-US" sz="1500" dirty="0"/>
+          </a:p>
+        </p:txBody>
+      </p:sp>
+      <p:sp>
+        <p:nvSpPr>
+          <p:cNvPr id="9" name="Text 6"/>
+          <p:cNvSpPr/>
+          <p:nvPr/>
+        </p:nvSpPr>
+        <p:spPr>
+          <a:xfrm>
+            <a:off x="7360920" y="2788920"/>
+            <a:ext cx="3931920" cy="2971800"/>
+          </a:xfrm>
+          <a:prstGeom prst="rect">
+            <a:avLst/>
+          </a:prstGeom>
+          <a:noFill/>
+          <a:ln/>
+        </p:spPr>
+        <p:txBody>
+          <a:bodyPr wrap="square" lIns="0" tIns="0" rIns="0" bIns="0" rtlCol="0" anchor="ctr"/>
+          <a:lstStyle/>
+          <a:p>
+            <a:pPr marL="342900" indent="-342900">
               <a:lnSpc>
-                <a:spcPts val="2300"/>
+                <a:spcPts val="1900"/>
               </a:lnSpc>
-              <a:buNone/>
-            </a:pPr>
-            <a:r>
-              <a:rPr lang="en-US" sz="1600" dirty="0">
-                <a:solidFill>
-                  <a:srgbClr val="000000"/>
+              <a:spcAft>
+                <a:spcPts val="500"/>
+              </a:spcAft>
+              <a:buSzPct val="100000"/>
+              <a:buChar char="•"/>
+            </a:pPr>
+            <a:r>
+              <a:rPr lang="en-US" sz="1300" dirty="0">
+                <a:solidFill>
+                  <a:srgbClr val="45565B"/>
                 </a:solidFill>
                 <a:latin typeface="Calibri" pitchFamily="34" charset="0"/>
                 <a:ea typeface="Calibri" pitchFamily="34" charset="-122"/>
                 <a:cs typeface="Calibri" pitchFamily="34" charset="-120"/>
               </a:rPr>
-              <a:t>
-</a:t>
-            </a:r>
-            <a:endParaRPr lang="en-US" sz="1600" dirty="0"/>
-          </a:p>
-          <a:p>
-            <a:pPr indent="0" marL="0">
+              <a:t>depth budget 1,000 / 1,500 / 3,000 UMIs</a:t>
+            </a:r>
+            <a:endParaRPr lang="en-US" sz="1300" dirty="0"/>
+          </a:p>
+          <a:p>
+            <a:pPr marL="342900" indent="-342900">
               <a:lnSpc>
-                <a:spcPts val="2300"/>
+                <a:spcPts val="1900"/>
               </a:lnSpc>
-              <a:buNone/>
-            </a:pPr>
-            <a:r>
-              <a:rPr lang="en-US" sz="1600" dirty="0">
-                <a:solidFill>
-                  <a:srgbClr val="FFFFFF"/>
+              <a:spcAft>
+                <a:spcPts val="500"/>
+              </a:spcAft>
+              <a:buSzPct val="100000"/>
+              <a:buChar char="•"/>
+            </a:pPr>
+            <a:r>
+              <a:rPr lang="en-US" sz="1300" dirty="0">
+                <a:solidFill>
+                  <a:srgbClr val="45565B"/>
                 </a:solidFill>
                 <a:latin typeface="Calibri" pitchFamily="34" charset="0"/>
                 <a:ea typeface="Calibri" pitchFamily="34" charset="-122"/>
                 <a:cs typeface="Calibri" pitchFamily="34" charset="-120"/>
               </a:rPr>
-              <a:t>A broad PC↔PP gradient is present at every stage, including cirrhotic F4.</a:t>
-            </a:r>
-            <a:endParaRPr lang="en-US" sz="1600" dirty="0"/>
-          </a:p>
-          <a:p>
-            <a:pPr indent="0" marL="0">
+              <a:t>anchor = GLUL-only / CYP3A4-only / both</a:t>
+            </a:r>
+            <a:endParaRPr lang="en-US" sz="1300" dirty="0"/>
+          </a:p>
+          <a:p>
+            <a:pPr marL="342900" indent="-342900">
               <a:lnSpc>
-                <a:spcPts val="2300"/>
+                <a:spcPts val="1900"/>
               </a:lnSpc>
-              <a:buNone/>
-            </a:pPr>
-            <a:r>
-              <a:rPr lang="en-US" sz="1600" dirty="0">
-                <a:solidFill>
-                  <a:srgbClr val="000000"/>
+              <a:spcAft>
+                <a:spcPts val="500"/>
+              </a:spcAft>
+              <a:buSzPct val="100000"/>
+              <a:buChar char="•"/>
+            </a:pPr>
+            <a:r>
+              <a:rPr lang="en-US" sz="1300" dirty="0">
+                <a:solidFill>
+                  <a:srgbClr val="45565B"/>
                 </a:solidFill>
                 <a:latin typeface="Calibri" pitchFamily="34" charset="0"/>
                 <a:ea typeface="Calibri" pitchFamily="34" charset="-122"/>
                 <a:cs typeface="Calibri" pitchFamily="34" charset="-120"/>
               </a:rPr>
-              <a:t>
-</a:t>
-            </a:r>
-            <a:endParaRPr lang="en-US" sz="1600" dirty="0"/>
-          </a:p>
-          <a:p>
-            <a:pPr indent="0" marL="0">
+              <a:t>8 thinning draws (noise SD 0.006–0.010)</a:t>
+            </a:r>
+            <a:endParaRPr lang="en-US" sz="1300" dirty="0"/>
+          </a:p>
+          <a:p>
+            <a:pPr marL="342900" indent="-342900">
               <a:lnSpc>
-                <a:spcPts val="2300"/>
+                <a:spcPts val="1900"/>
               </a:lnSpc>
-              <a:buNone/>
-            </a:pPr>
-            <a:r>
-              <a:rPr lang="en-US" sz="1600" b="1" dirty="0">
-                <a:solidFill>
-                  <a:srgbClr val="FFFFFF"/>
+              <a:spcAft>
+                <a:spcPts val="500"/>
+              </a:spcAft>
+              <a:buSzPct val="100000"/>
+              <a:buChar char="•"/>
+            </a:pPr>
+            <a:r>
+              <a:rPr lang="en-US" sz="1300" dirty="0">
+                <a:solidFill>
+                  <a:srgbClr val="45565B"/>
                 </a:solidFill>
                 <a:latin typeface="Calibri" pitchFamily="34" charset="0"/>
                 <a:ea typeface="Calibri" pitchFamily="34" charset="-122"/>
                 <a:cs typeface="Calibri" pitchFamily="34" charset="-120"/>
               </a:rPr>
-              <a:t>Near-total collapse is excluded.</a:t>
-            </a:r>
-            <a:endParaRPr lang="en-US" sz="1600" dirty="0"/>
-          </a:p>
-        </p:txBody>
-      </p:sp>
-      <p:sp>
-        <p:nvSpPr>
-          <p:cNvPr id="7" name="Shape 5"/>
-          <p:cNvSpPr/>
-          <p:nvPr/>
-        </p:nvSpPr>
-        <p:spPr>
-          <a:xfrm>
-            <a:off x="6309360" y="1417320"/>
-            <a:ext cx="5029200" cy="4480560"/>
-          </a:xfrm>
-          <a:prstGeom prst="roundRect">
-            <a:avLst>
-              <a:gd name="adj" fmla="val 1633"/>
-            </a:avLst>
-          </a:prstGeom>
-          <a:solidFill>
-            <a:srgbClr val="3A2A20"/>
-          </a:solidFill>
-          <a:ln/>
-        </p:spPr>
-      </p:sp>
-      <p:sp>
-        <p:nvSpPr>
-          <p:cNvPr id="8" name="Text 6"/>
-          <p:cNvSpPr/>
-          <p:nvPr/>
-        </p:nvSpPr>
-        <p:spPr>
-          <a:xfrm>
-            <a:off x="6583680" y="1691640"/>
-            <a:ext cx="4572000" cy="365760"/>
-          </a:xfrm>
-          <a:prstGeom prst="rect">
-            <a:avLst/>
-          </a:prstGeom>
-          <a:noFill/>
-          <a:ln/>
-        </p:spPr>
-        <p:txBody>
-          <a:bodyPr wrap="square" lIns="0" tIns="0" rIns="0" bIns="0" rtlCol="0" anchor="ctr"/>
-          <a:lstStyle/>
-          <a:p>
-            <a:pPr indent="0" marL="0">
-              <a:buNone/>
-            </a:pPr>
-            <a:r>
-              <a:rPr lang="en-US" sz="1400" b="1" spc="200" kern="0" dirty="0">
-                <a:solidFill>
-                  <a:srgbClr val="C0561B"/>
+              <a:t>every UMI threshold</a:t>
+            </a:r>
+            <a:endParaRPr lang="en-US" sz="1300" dirty="0"/>
+          </a:p>
+          <a:p>
+            <a:pPr marL="342900" indent="-342900">
+              <a:lnSpc>
+                <a:spcPts val="1900"/>
+              </a:lnSpc>
+              <a:spcAft>
+                <a:spcPts val="500"/>
+              </a:spcAft>
+              <a:buSzPct val="100000"/>
+              <a:buChar char="•"/>
+            </a:pPr>
+            <a:r>
+              <a:rPr lang="en-US" sz="1300" dirty="0">
+                <a:solidFill>
+                  <a:srgbClr val="45565B"/>
                 </a:solidFill>
                 <a:latin typeface="Calibri" pitchFamily="34" charset="0"/>
                 <a:ea typeface="Calibri" pitchFamily="34" charset="-122"/>
                 <a:cs typeface="Calibri" pitchFamily="34" charset="-120"/>
               </a:rPr>
-              <a:t>WHAT WE DO NOT CLAIM</a:t>
-            </a:r>
-            <a:endParaRPr lang="en-US" sz="1400" dirty="0"/>
-          </a:p>
-        </p:txBody>
-      </p:sp>
-      <p:sp>
-        <p:nvSpPr>
-          <p:cNvPr id="9" name="Text 7"/>
-          <p:cNvSpPr/>
-          <p:nvPr/>
-        </p:nvSpPr>
-        <p:spPr>
-          <a:xfrm>
-            <a:off x="6583680" y="2148840"/>
-            <a:ext cx="4572000" cy="3566160"/>
-          </a:xfrm>
-          <a:prstGeom prst="rect">
-            <a:avLst/>
-          </a:prstGeom>
-          <a:noFill/>
-          <a:ln/>
-        </p:spPr>
-        <p:txBody>
-          <a:bodyPr wrap="square" lIns="0" tIns="0" rIns="0" bIns="0" rtlCol="0" anchor="t"/>
-          <a:lstStyle/>
-          <a:p>
-            <a:pPr indent="0" marL="0">
+              <a:t>real co-expression (≥2 UMI): ~0 in biopsy vs 7× in explants</a:t>
+            </a:r>
+            <a:endParaRPr lang="en-US" sz="1300" dirty="0"/>
+          </a:p>
+          <a:p>
+            <a:pPr marL="342900" indent="-342900">
               <a:lnSpc>
-                <a:spcPts val="2200"/>
+                <a:spcPts val="1900"/>
               </a:lnSpc>
-              <a:buNone/>
-            </a:pPr>
-            <a:r>
-              <a:rPr lang="en-US" sz="1550" dirty="0">
-                <a:solidFill>
-                  <a:srgbClr val="FFFFFF"/>
+              <a:spcAft>
+                <a:spcPts val="500"/>
+              </a:spcAft>
+              <a:buSzPct val="100000"/>
+              <a:buChar char="•"/>
+            </a:pPr>
+            <a:r>
+              <a:rPr lang="en-US" sz="1300" dirty="0">
+                <a:solidFill>
+                  <a:srgbClr val="45565B"/>
                 </a:solidFill>
                 <a:latin typeface="Calibri" pitchFamily="34" charset="0"/>
                 <a:ea typeface="Calibri" pitchFamily="34" charset="-122"/>
                 <a:cs typeface="Calibri" pitchFamily="34" charset="-120"/>
               </a:rPr>
-              <a:t>Not “zonation preserved” — the design is underpowered (smallest detectable change ≈ 85% of the mean; F0, F4 each ~one donor).</a:t>
-            </a:r>
-            <a:endParaRPr lang="en-US" sz="1550" dirty="0"/>
-          </a:p>
-          <a:p>
-            <a:pPr indent="0" marL="0">
-              <a:lnSpc>
-                <a:spcPts val="2200"/>
-              </a:lnSpc>
-              <a:buNone/>
-            </a:pPr>
-            <a:r>
-              <a:rPr lang="en-US" sz="1550" dirty="0">
-                <a:solidFill>
-                  <a:srgbClr val="000000"/>
-                </a:solidFill>
-                <a:latin typeface="Calibri" pitchFamily="34" charset="0"/>
-                <a:ea typeface="Calibri" pitchFamily="34" charset="-122"/>
-                <a:cs typeface="Calibri" pitchFamily="34" charset="-120"/>
-              </a:rPr>
-              <a:t>
-</a:t>
-            </a:r>
-            <a:endParaRPr lang="en-US" sz="1550" dirty="0"/>
-          </a:p>
-          <a:p>
-            <a:pPr indent="0" marL="0">
-              <a:lnSpc>
-                <a:spcPts val="2200"/>
-              </a:lnSpc>
-              <a:buNone/>
-            </a:pPr>
-            <a:r>
-              <a:rPr lang="en-US" sz="1550" dirty="0">
-                <a:solidFill>
-                  <a:srgbClr val="FFFFFF"/>
-                </a:solidFill>
-                <a:latin typeface="Calibri" pitchFamily="34" charset="0"/>
-                <a:ea typeface="Calibri" pitchFamily="34" charset="-122"/>
-                <a:cs typeface="Calibri" pitchFamily="34" charset="-120"/>
-              </a:rPr>
-              <a:t>Single-nucleus counts cannot see lobular spatial position — “PC-like program,” not location.</a:t>
-            </a:r>
-            <a:endParaRPr lang="en-US" sz="1550" dirty="0"/>
-          </a:p>
-          <a:p>
-            <a:pPr indent="0" marL="0">
-              <a:lnSpc>
-                <a:spcPts val="2200"/>
-              </a:lnSpc>
-              <a:buNone/>
-            </a:pPr>
-            <a:r>
-              <a:rPr lang="en-US" sz="1550" dirty="0">
-                <a:solidFill>
-                  <a:srgbClr val="000000"/>
-                </a:solidFill>
-                <a:latin typeface="Calibri" pitchFamily="34" charset="0"/>
-                <a:ea typeface="Calibri" pitchFamily="34" charset="-122"/>
-                <a:cs typeface="Calibri" pitchFamily="34" charset="-120"/>
-              </a:rPr>
-              <a:t>
-</a:t>
-            </a:r>
-            <a:endParaRPr lang="en-US" sz="1550" dirty="0"/>
-          </a:p>
-          <a:p>
-            <a:pPr indent="0" marL="0">
-              <a:lnSpc>
-                <a:spcPts val="2200"/>
-              </a:lnSpc>
-              <a:buNone/>
-            </a:pPr>
-            <a:r>
-              <a:rPr lang="en-US" sz="1550" dirty="0">
-                <a:solidFill>
-                  <a:srgbClr val="FFFFFF"/>
-                </a:solidFill>
-                <a:latin typeface="Calibri" pitchFamily="34" charset="0"/>
-                <a:ea typeface="Calibri" pitchFamily="34" charset="-122"/>
-                <a:cs typeface="Calibri" pitchFamily="34" charset="-120"/>
-              </a:rPr>
-              <a:t>Single cohort; no protein / spatial validation.</a:t>
-            </a:r>
-            <a:endParaRPr lang="en-US" sz="1550" dirty="0"/>
-          </a:p>
-        </p:txBody>
-      </p:sp>
-      <p:sp>
-        <p:nvSpPr>
-          <p:cNvPr id="10" name="Text 8"/>
+              <a:t>ambient, contamination, ploidy: tested in counts — none drives it</a:t>
+            </a:r>
+            <a:endParaRPr lang="en-US" sz="1300" dirty="0"/>
+          </a:p>
+        </p:txBody>
+      </p:sp>
+      <p:sp>
+        <p:nvSpPr>
+          <p:cNvPr id="10" name="Text 7"/>
           <p:cNvSpPr/>
           <p:nvPr/>
         </p:nvSpPr>
@@ -3545,7 +3684,7 @@
                 <a:ea typeface="Calibri" pitchFamily="34" charset="-122"/>
                 <a:cs typeface="Calibri" pitchFamily="34" charset="-120"/>
               </a:rPr>
-              <a:t>THE CORRECTION</a:t>
+              <a:t>THE PICTURE</a:t>
             </a:r>
             <a:endParaRPr lang="en-US" sz="1200" dirty="0"/>
           </a:p>
@@ -3587,30 +3726,53 @@
                 <a:ea typeface="Georgia" pitchFamily="34" charset="-122"/>
                 <a:cs typeface="Georgia" pitchFamily="34" charset="-120"/>
               </a:rPr>
-              <a:t>We correct one evidence leg — not the whole claim</a:t>
+              <a:t>The gradient stays broad through cirrhosis — collapses only in explants</a:t>
             </a:r>
             <a:endParaRPr lang="en-US" sz="3000" dirty="0"/>
           </a:p>
         </p:txBody>
       </p:sp>
-      <p:sp>
-        <p:nvSpPr>
-          <p:cNvPr id="5" name="Shape 3"/>
-          <p:cNvSpPr/>
-          <p:nvPr/>
-        </p:nvSpPr>
-        <p:spPr>
-          <a:xfrm>
-            <a:off x="640080" y="2011680"/>
-            <a:ext cx="10881360" cy="1207008"/>
+      <p:pic>
+        <p:nvPicPr>
+          <p:cNvPr id="5" name="Image 0" descr="../results/figures/h2/gapfill_polarization.png">    </p:cNvPr>
+          <p:cNvPicPr>
+            <a:picLocks noChangeAspect="1"/>
+          </p:cNvPicPr>
+          <p:nvPr/>
+        </p:nvPicPr>
+        <p:blipFill>
+          <a:blip r:embed="rId1"/>
+          <a:srcRect l="0" r="0" t="0" b="0"/>
+          <a:stretch/>
+        </p:blipFill>
+        <p:spPr>
+          <a:xfrm>
+            <a:off x="640080" y="2148840"/>
+            <a:ext cx="8595360" cy="3886200"/>
+          </a:xfrm>
+          <a:prstGeom prst="rect">
+            <a:avLst/>
+          </a:prstGeom>
+        </p:spPr>
+      </p:pic>
+      <p:sp>
+        <p:nvSpPr>
+          <p:cNvPr id="6" name="Shape 3"/>
+          <p:cNvSpPr/>
+          <p:nvPr/>
+        </p:nvSpPr>
+        <p:spPr>
+          <a:xfrm>
+            <a:off x="9509760" y="2514600"/>
+            <a:ext cx="2103120" cy="3063240"/>
           </a:xfrm>
           <a:prstGeom prst="roundRect">
             <a:avLst>
-              <a:gd name="adj" fmla="val 4545"/>
+              <a:gd name="adj" fmla="val 3478"/>
             </a:avLst>
           </a:prstGeom>
           <a:solidFill>
-            <a:srgbClr val="FFFFFF"/>
+            <a:srgbClr val="123F47"/>
           </a:solidFill>
           <a:ln/>
           <a:effectLst>
@@ -3624,34 +3786,14 @@
       </p:sp>
       <p:sp>
         <p:nvSpPr>
-          <p:cNvPr id="6" name="Shape 4"/>
-          <p:cNvSpPr/>
-          <p:nvPr/>
-        </p:nvSpPr>
-        <p:spPr>
-          <a:xfrm>
-            <a:off x="640080" y="2011680"/>
-            <a:ext cx="128016" cy="1207008"/>
-          </a:xfrm>
-          <a:prstGeom prst="rect">
-            <a:avLst/>
-          </a:prstGeom>
-          <a:solidFill>
-            <a:srgbClr val="1B6E78"/>
-          </a:solidFill>
-          <a:ln/>
-        </p:spPr>
-      </p:sp>
-      <p:sp>
-        <p:nvSpPr>
-          <p:cNvPr id="7" name="Text 5"/>
-          <p:cNvSpPr/>
-          <p:nvPr/>
-        </p:nvSpPr>
-        <p:spPr>
-          <a:xfrm>
-            <a:off x="960120" y="2148840"/>
-            <a:ext cx="3931920" cy="914400"/>
+          <p:cNvPr id="7" name="Text 4"/>
+          <p:cNvSpPr/>
+          <p:nvPr/>
+        </p:nvSpPr>
+        <p:spPr>
+          <a:xfrm>
+            <a:off x="9710928" y="2514600"/>
+            <a:ext cx="1737360" cy="3063240"/>
           </a:xfrm>
           <a:prstGeom prst="rect">
             <a:avLst/>
@@ -3664,511 +3806,71 @@
           <a:lstStyle/>
           <a:p>
             <a:pPr indent="0" marL="0">
-              <a:buNone/>
-            </a:pPr>
-            <a:r>
-              <a:rPr lang="en-US" sz="1700" b="1" dirty="0">
-                <a:solidFill>
-                  <a:srgbClr val="1B2B31"/>
-                </a:solidFill>
-                <a:latin typeface="Georgia" pitchFamily="34" charset="0"/>
-                <a:ea typeface="Georgia" pitchFamily="34" charset="-122"/>
-                <a:cs typeface="Georgia" pitchFamily="34" charset="-120"/>
-              </a:rPr>
-              <a:t>snRNA marker-correlation</a:t>
-            </a:r>
-            <a:endParaRPr lang="en-US" sz="1700" dirty="0"/>
-          </a:p>
-        </p:txBody>
-      </p:sp>
-      <p:sp>
-        <p:nvSpPr>
-          <p:cNvPr id="8" name="Shape 6"/>
-          <p:cNvSpPr/>
-          <p:nvPr/>
-        </p:nvSpPr>
-        <p:spPr>
-          <a:xfrm>
-            <a:off x="4892040" y="2395728"/>
-            <a:ext cx="1691640" cy="438912"/>
-          </a:xfrm>
-          <a:prstGeom prst="roundRect">
-            <a:avLst>
-              <a:gd name="adj" fmla="val 50000"/>
-            </a:avLst>
-          </a:prstGeom>
-          <a:solidFill>
-            <a:srgbClr val="1B6E78"/>
-          </a:solidFill>
-          <a:ln/>
-        </p:spPr>
-      </p:sp>
-      <p:sp>
-        <p:nvSpPr>
-          <p:cNvPr id="9" name="Text 7"/>
-          <p:cNvSpPr/>
-          <p:nvPr/>
-        </p:nvSpPr>
-        <p:spPr>
-          <a:xfrm>
-            <a:off x="4892040" y="2395728"/>
-            <a:ext cx="1691640" cy="438912"/>
-          </a:xfrm>
-          <a:prstGeom prst="rect">
-            <a:avLst/>
-          </a:prstGeom>
-          <a:noFill/>
-          <a:ln/>
-        </p:spPr>
-        <p:txBody>
-          <a:bodyPr wrap="square" lIns="0" tIns="0" rIns="0" bIns="0" rtlCol="0" anchor="ctr"/>
-          <a:lstStyle/>
-          <a:p>
-            <a:pPr algn="ctr" indent="0" marL="0">
-              <a:buNone/>
-            </a:pPr>
-            <a:r>
-              <a:rPr lang="en-US" sz="1150" b="1" spc="100" kern="0" dirty="0">
-                <a:solidFill>
-                  <a:srgbClr val="FFFFFF"/>
+              <a:lnSpc>
+                <a:spcPts val="1800"/>
+              </a:lnSpc>
+              <a:buNone/>
+            </a:pPr>
+            <a:r>
+              <a:rPr lang="en-US" sz="1300" dirty="0">
+                <a:solidFill>
+                  <a:srgbClr val="D7E6E8"/>
                 </a:solidFill>
                 <a:latin typeface="Calibri" pitchFamily="34" charset="0"/>
                 <a:ea typeface="Calibri" pitchFamily="34" charset="-122"/>
                 <a:cs typeface="Calibri" pitchFamily="34" charset="-120"/>
               </a:rPr>
-              <a:t>CORRECTED</a:t>
-            </a:r>
-            <a:endParaRPr lang="en-US" sz="1150" dirty="0"/>
-          </a:p>
-        </p:txBody>
-      </p:sp>
-      <p:sp>
-        <p:nvSpPr>
-          <p:cNvPr id="10" name="Text 8"/>
-          <p:cNvSpPr/>
-          <p:nvPr/>
-        </p:nvSpPr>
-        <p:spPr>
-          <a:xfrm>
-            <a:off x="6766560" y="2130552"/>
-            <a:ext cx="4572000" cy="969264"/>
-          </a:xfrm>
-          <a:prstGeom prst="rect">
-            <a:avLst/>
-          </a:prstGeom>
-          <a:noFill/>
-          <a:ln/>
-        </p:spPr>
-        <p:txBody>
-          <a:bodyPr wrap="square" lIns="0" tIns="0" rIns="0" bIns="0" rtlCol="0" anchor="ctr"/>
-          <a:lstStyle/>
+              <a:t>Each panel = per-nucleus zonal balance, PC ↔ PP.
+</a:t>
+            </a:r>
+            <a:endParaRPr lang="en-US" sz="1300" dirty="0"/>
+          </a:p>
           <a:p>
             <a:pPr indent="0" marL="0">
               <a:lnSpc>
-                <a:spcPts val="1600"/>
+                <a:spcPts val="1800"/>
               </a:lnSpc>
               <a:buNone/>
             </a:pPr>
             <a:r>
-              <a:rPr lang="en-US" sz="1250" dirty="0">
-                <a:solidFill>
-                  <a:srgbClr val="45565B"/>
+              <a:rPr lang="en-US" sz="1300" b="1" dirty="0">
+                <a:solidFill>
+                  <a:srgbClr val="FFFFFF"/>
                 </a:solidFill>
                 <a:latin typeface="Calibri" pitchFamily="34" charset="0"/>
                 <a:ea typeface="Calibri" pitchFamily="34" charset="-122"/>
                 <a:cs typeface="Calibri" pitchFamily="34" charset="-120"/>
               </a:rPr>
-              <a:t>A relative statistic, on procurement-confounded explant tissue. No progressive drift toward co-expression in biopsy (dual ≥2 UMI: 0.003 → 0.0, F1→F4).</a:t>
-            </a:r>
-            <a:endParaRPr lang="en-US" sz="1250" dirty="0"/>
-          </a:p>
-        </p:txBody>
-      </p:sp>
-      <p:sp>
-        <p:nvSpPr>
-          <p:cNvPr id="11" name="Shape 9"/>
-          <p:cNvSpPr/>
-          <p:nvPr/>
-        </p:nvSpPr>
-        <p:spPr>
-          <a:xfrm>
-            <a:off x="640080" y="3383280"/>
-            <a:ext cx="10881360" cy="1207008"/>
-          </a:xfrm>
-          <a:prstGeom prst="roundRect">
-            <a:avLst>
-              <a:gd name="adj" fmla="val 4545"/>
-            </a:avLst>
-          </a:prstGeom>
-          <a:solidFill>
-            <a:srgbClr val="FFFFFF"/>
-          </a:solidFill>
-          <a:ln/>
-          <a:effectLst>
-            <a:outerShdw sx="100000" sy="100000" kx="0" ky="0" algn="bl" rotWithShape="0" blurRad="88900" dist="38100" dir="8100000">
-              <a:srgbClr val="000000">
-                <a:alpha val="13000"/>
-              </a:srgbClr>
-            </a:outerShdw>
-          </a:effectLst>
-        </p:spPr>
-      </p:sp>
-      <p:sp>
-        <p:nvSpPr>
-          <p:cNvPr id="12" name="Shape 10"/>
-          <p:cNvSpPr/>
-          <p:nvPr/>
-        </p:nvSpPr>
-        <p:spPr>
-          <a:xfrm>
-            <a:off x="640080" y="3383280"/>
-            <a:ext cx="128016" cy="1207008"/>
-          </a:xfrm>
-          <a:prstGeom prst="rect">
-            <a:avLst/>
-          </a:prstGeom>
-          <a:solidFill>
-            <a:srgbClr val="5C6E73"/>
-          </a:solidFill>
-          <a:ln/>
-        </p:spPr>
-      </p:sp>
-      <p:sp>
-        <p:nvSpPr>
-          <p:cNvPr id="13" name="Text 11"/>
-          <p:cNvSpPr/>
-          <p:nvPr/>
-        </p:nvSpPr>
-        <p:spPr>
-          <a:xfrm>
-            <a:off x="960120" y="3520440"/>
-            <a:ext cx="3931920" cy="914400"/>
-          </a:xfrm>
-          <a:prstGeom prst="rect">
-            <a:avLst/>
-          </a:prstGeom>
-          <a:noFill/>
-          <a:ln/>
-        </p:spPr>
-        <p:txBody>
-          <a:bodyPr wrap="square" lIns="0" tIns="0" rIns="0" bIns="0" rtlCol="0" anchor="ctr"/>
-          <a:lstStyle/>
-          <a:p>
-            <a:pPr indent="0" marL="0">
-              <a:buNone/>
-            </a:pPr>
-            <a:r>
-              <a:rPr lang="en-US" sz="1700" b="1" dirty="0">
-                <a:solidFill>
-                  <a:srgbClr val="1B2B31"/>
-                </a:solidFill>
-                <a:latin typeface="Georgia" pitchFamily="34" charset="0"/>
-                <a:ea typeface="Georgia" pitchFamily="34" charset="-122"/>
-                <a:cs typeface="Georgia" pitchFamily="34" charset="-120"/>
-              </a:rPr>
-              <a:t>Immunofluorescence (GLUL+ASS1)</a:t>
-            </a:r>
-            <a:endParaRPr lang="en-US" sz="1700" dirty="0"/>
-          </a:p>
-        </p:txBody>
-      </p:sp>
-      <p:sp>
-        <p:nvSpPr>
-          <p:cNvPr id="14" name="Shape 12"/>
-          <p:cNvSpPr/>
-          <p:nvPr/>
-        </p:nvSpPr>
-        <p:spPr>
-          <a:xfrm>
-            <a:off x="4892040" y="3767328"/>
-            <a:ext cx="1691640" cy="438912"/>
-          </a:xfrm>
-          <a:prstGeom prst="roundRect">
-            <a:avLst>
-              <a:gd name="adj" fmla="val 50000"/>
-            </a:avLst>
-          </a:prstGeom>
-          <a:solidFill>
-            <a:srgbClr val="ECF1F1"/>
-          </a:solidFill>
-          <a:ln/>
-        </p:spPr>
-      </p:sp>
-      <p:sp>
-        <p:nvSpPr>
-          <p:cNvPr id="15" name="Text 13"/>
-          <p:cNvSpPr/>
-          <p:nvPr/>
-        </p:nvSpPr>
-        <p:spPr>
-          <a:xfrm>
-            <a:off x="4892040" y="3767328"/>
-            <a:ext cx="1691640" cy="438912"/>
-          </a:xfrm>
-          <a:prstGeom prst="rect">
-            <a:avLst/>
-          </a:prstGeom>
-          <a:noFill/>
-          <a:ln/>
-        </p:spPr>
-        <p:txBody>
-          <a:bodyPr wrap="square" lIns="0" tIns="0" rIns="0" bIns="0" rtlCol="0" anchor="ctr"/>
-          <a:lstStyle/>
-          <a:p>
-            <a:pPr algn="ctr" indent="0" marL="0">
-              <a:buNone/>
-            </a:pPr>
-            <a:r>
-              <a:rPr lang="en-US" sz="1150" b="1" spc="100" kern="0" dirty="0">
-                <a:solidFill>
-                  <a:srgbClr val="5C6E73"/>
+              <a:t>F0–F4: broad, spread — zonation intact.
+</a:t>
+            </a:r>
+            <a:endParaRPr lang="en-US" sz="1300" dirty="0"/>
+          </a:p>
+          <a:p>
+            <a:pPr indent="0" marL="0">
+              <a:lnSpc>
+                <a:spcPts val="1800"/>
+              </a:lnSpc>
+              <a:buNone/>
+            </a:pPr>
+            <a:r>
+              <a:rPr lang="en-US" sz="1300" b="1" dirty="0">
+                <a:solidFill>
+                  <a:srgbClr val="C0561B"/>
                 </a:solidFill>
                 <a:latin typeface="Calibri" pitchFamily="34" charset="0"/>
                 <a:ea typeface="Calibri" pitchFamily="34" charset="-122"/>
                 <a:cs typeface="Calibri" pitchFamily="34" charset="-120"/>
               </a:rPr>
-              <a:t>NOT ADDRESSED</a:t>
-            </a:r>
-            <a:endParaRPr lang="en-US" sz="1150" dirty="0"/>
-          </a:p>
-        </p:txBody>
-      </p:sp>
-      <p:sp>
-        <p:nvSpPr>
-          <p:cNvPr id="16" name="Text 14"/>
-          <p:cNvSpPr/>
-          <p:nvPr/>
-        </p:nvSpPr>
-        <p:spPr>
-          <a:xfrm>
-            <a:off x="6766560" y="3502152"/>
-            <a:ext cx="4572000" cy="969264"/>
-          </a:xfrm>
-          <a:prstGeom prst="rect">
-            <a:avLst/>
-          </a:prstGeom>
-          <a:noFill/>
-          <a:ln/>
-        </p:spPr>
-        <p:txBody>
-          <a:bodyPr wrap="square" lIns="0" tIns="0" rIns="0" bIns="0" rtlCol="0" anchor="ctr"/>
-          <a:lstStyle/>
-          <a:p>
-            <a:pPr indent="0" marL="0">
-              <a:lnSpc>
-                <a:spcPts val="1600"/>
-              </a:lnSpc>
-              <a:buNone/>
-            </a:pPr>
-            <a:r>
-              <a:rPr lang="en-US" sz="1250" dirty="0">
-                <a:solidFill>
-                  <a:srgbClr val="45565B"/>
-                </a:solidFill>
-                <a:latin typeface="Calibri" pitchFamily="34" charset="0"/>
-                <a:ea typeface="Calibri" pitchFamily="34" charset="-122"/>
-                <a:cs typeface="Calibri" pitchFamily="34" charset="-120"/>
-              </a:rPr>
-              <a:t>Protein co-localization — different molecule and timescale than the acute RNA stress we measure.</a:t>
-            </a:r>
-            <a:endParaRPr lang="en-US" sz="1250" dirty="0"/>
-          </a:p>
-        </p:txBody>
-      </p:sp>
-      <p:sp>
-        <p:nvSpPr>
-          <p:cNvPr id="17" name="Shape 15"/>
-          <p:cNvSpPr/>
-          <p:nvPr/>
-        </p:nvSpPr>
-        <p:spPr>
-          <a:xfrm>
-            <a:off x="640080" y="4754880"/>
-            <a:ext cx="10881360" cy="1207008"/>
-          </a:xfrm>
-          <a:prstGeom prst="roundRect">
-            <a:avLst>
-              <a:gd name="adj" fmla="val 4545"/>
-            </a:avLst>
-          </a:prstGeom>
-          <a:solidFill>
-            <a:srgbClr val="FFFFFF"/>
-          </a:solidFill>
-          <a:ln/>
-          <a:effectLst>
-            <a:outerShdw sx="100000" sy="100000" kx="0" ky="0" algn="bl" rotWithShape="0" blurRad="88900" dist="38100" dir="8100000">
-              <a:srgbClr val="000000">
-                <a:alpha val="13000"/>
-              </a:srgbClr>
-            </a:outerShdw>
-          </a:effectLst>
-        </p:spPr>
-      </p:sp>
-      <p:sp>
-        <p:nvSpPr>
-          <p:cNvPr id="18" name="Shape 16"/>
-          <p:cNvSpPr/>
-          <p:nvPr/>
-        </p:nvSpPr>
-        <p:spPr>
-          <a:xfrm>
-            <a:off x="640080" y="4754880"/>
-            <a:ext cx="128016" cy="1207008"/>
-          </a:xfrm>
-          <a:prstGeom prst="rect">
-            <a:avLst/>
-          </a:prstGeom>
-          <a:solidFill>
-            <a:srgbClr val="5C6E73"/>
-          </a:solidFill>
-          <a:ln/>
-        </p:spPr>
-      </p:sp>
-      <p:sp>
-        <p:nvSpPr>
-          <p:cNvPr id="19" name="Text 17"/>
-          <p:cNvSpPr/>
-          <p:nvPr/>
-        </p:nvSpPr>
-        <p:spPr>
-          <a:xfrm>
-            <a:off x="960120" y="4892040"/>
-            <a:ext cx="3931920" cy="914400"/>
-          </a:xfrm>
-          <a:prstGeom prst="rect">
-            <a:avLst/>
-          </a:prstGeom>
-          <a:noFill/>
-          <a:ln/>
-        </p:spPr>
-        <p:txBody>
-          <a:bodyPr wrap="square" lIns="0" tIns="0" rIns="0" bIns="0" rtlCol="0" anchor="ctr"/>
-          <a:lstStyle/>
-          <a:p>
-            <a:pPr indent="0" marL="0">
-              <a:buNone/>
-            </a:pPr>
-            <a:r>
-              <a:rPr lang="en-US" sz="1700" b="1" dirty="0">
-                <a:solidFill>
-                  <a:srgbClr val="1B2B31"/>
-                </a:solidFill>
-                <a:latin typeface="Georgia" pitchFamily="34" charset="0"/>
-                <a:ea typeface="Georgia" pitchFamily="34" charset="-122"/>
-                <a:cs typeface="Georgia" pitchFamily="34" charset="-120"/>
-              </a:rPr>
-              <a:t>FLASH 3D whole-organ imaging</a:t>
-            </a:r>
-            <a:endParaRPr lang="en-US" sz="1700" dirty="0"/>
-          </a:p>
-        </p:txBody>
-      </p:sp>
-      <p:sp>
-        <p:nvSpPr>
-          <p:cNvPr id="20" name="Shape 18"/>
-          <p:cNvSpPr/>
-          <p:nvPr/>
-        </p:nvSpPr>
-        <p:spPr>
-          <a:xfrm>
-            <a:off x="4892040" y="5138928"/>
-            <a:ext cx="1691640" cy="438912"/>
-          </a:xfrm>
-          <a:prstGeom prst="roundRect">
-            <a:avLst>
-              <a:gd name="adj" fmla="val 50000"/>
-            </a:avLst>
-          </a:prstGeom>
-          <a:solidFill>
-            <a:srgbClr val="ECF1F1"/>
-          </a:solidFill>
-          <a:ln/>
-        </p:spPr>
-      </p:sp>
-      <p:sp>
-        <p:nvSpPr>
-          <p:cNvPr id="21" name="Text 19"/>
-          <p:cNvSpPr/>
-          <p:nvPr/>
-        </p:nvSpPr>
-        <p:spPr>
-          <a:xfrm>
-            <a:off x="4892040" y="5138928"/>
-            <a:ext cx="1691640" cy="438912"/>
-          </a:xfrm>
-          <a:prstGeom prst="rect">
-            <a:avLst/>
-          </a:prstGeom>
-          <a:noFill/>
-          <a:ln/>
-        </p:spPr>
-        <p:txBody>
-          <a:bodyPr wrap="square" lIns="0" tIns="0" rIns="0" bIns="0" rtlCol="0" anchor="ctr"/>
-          <a:lstStyle/>
-          <a:p>
-            <a:pPr algn="ctr" indent="0" marL="0">
-              <a:buNone/>
-            </a:pPr>
-            <a:r>
-              <a:rPr lang="en-US" sz="1150" b="1" spc="100" kern="0" dirty="0">
-                <a:solidFill>
-                  <a:srgbClr val="5C6E73"/>
-                </a:solidFill>
-                <a:latin typeface="Calibri" pitchFamily="34" charset="0"/>
-                <a:ea typeface="Calibri" pitchFamily="34" charset="-122"/>
-                <a:cs typeface="Calibri" pitchFamily="34" charset="-120"/>
-              </a:rPr>
-              <a:t>NOT ADDRESSED</a:t>
-            </a:r>
-            <a:endParaRPr lang="en-US" sz="1150" dirty="0"/>
-          </a:p>
-        </p:txBody>
-      </p:sp>
-      <p:sp>
-        <p:nvSpPr>
-          <p:cNvPr id="22" name="Text 20"/>
-          <p:cNvSpPr/>
-          <p:nvPr/>
-        </p:nvSpPr>
-        <p:spPr>
-          <a:xfrm>
-            <a:off x="6766560" y="4873752"/>
-            <a:ext cx="4572000" cy="969264"/>
-          </a:xfrm>
-          <a:prstGeom prst="rect">
-            <a:avLst/>
-          </a:prstGeom>
-          <a:noFill/>
-          <a:ln/>
-        </p:spPr>
-        <p:txBody>
-          <a:bodyPr wrap="square" lIns="0" tIns="0" rIns="0" bIns="0" rtlCol="0" anchor="ctr"/>
-          <a:lstStyle/>
-          <a:p>
-            <a:pPr indent="0" marL="0">
-              <a:lnSpc>
-                <a:spcPts val="1600"/>
-              </a:lnSpc>
-              <a:buNone/>
-            </a:pPr>
-            <a:r>
-              <a:rPr lang="en-US" sz="1250" dirty="0">
-                <a:solidFill>
-                  <a:srgbClr val="45565B"/>
-                </a:solidFill>
-                <a:latin typeface="Calibri" pitchFamily="34" charset="0"/>
-                <a:ea typeface="Calibri" pitchFamily="34" charset="-122"/>
-                <a:cs typeface="Calibri" pitchFamily="34" charset="-120"/>
-              </a:rPr>
-              <a:t>Architecture of end-stage explants; cirrhosis genuinely remodels the lobule. We cannot call it artifact.</a:t>
-            </a:r>
-            <a:endParaRPr lang="en-US" sz="1250" dirty="0"/>
-          </a:p>
-        </p:txBody>
-      </p:sp>
-      <p:sp>
-        <p:nvSpPr>
-          <p:cNvPr id="23" name="Text 21"/>
+              <a:t>Explant: abnormal only here, and heterogeneous across donors (one even retains PC).</a:t>
+            </a:r>
+            <a:endParaRPr lang="en-US" sz="1300" dirty="0"/>
+          </a:p>
+        </p:txBody>
+      </p:sp>
+      <p:sp>
+        <p:nvSpPr>
+          <p:cNvPr id="8" name="Text 5"/>
           <p:cNvSpPr/>
           <p:nvPr/>
         </p:nvSpPr>
@@ -4219,7 +3921,7 @@
     <p:bg>
       <p:bgPr>
         <a:solidFill>
-          <a:srgbClr val="F7F5F1"/>
+          <a:srgbClr val="16242B"/>
         </a:solidFill>
       </p:bgPr>
     </p:bg>
@@ -4245,8 +3947,8 @@
         </p:nvSpPr>
         <p:spPr>
           <a:xfrm>
-            <a:off x="640080" y="502920"/>
-            <a:ext cx="164592" cy="310896"/>
+            <a:off x="0" y="0"/>
+            <a:ext cx="256032" cy="6858000"/>
           </a:xfrm>
           <a:prstGeom prst="rect">
             <a:avLst/>
@@ -4265,8 +3967,8 @@
         </p:nvSpPr>
         <p:spPr>
           <a:xfrm>
-            <a:off x="896112" y="502920"/>
-            <a:ext cx="8229600" cy="310896"/>
+            <a:off x="822960" y="640080"/>
+            <a:ext cx="10058400" cy="365760"/>
           </a:xfrm>
           <a:prstGeom prst="rect">
             <a:avLst/>
@@ -4282,30 +3984,52 @@
               <a:buNone/>
             </a:pPr>
             <a:r>
-              <a:rPr lang="en-US" sz="1200" b="1" spc="300" kern="0" dirty="0">
-                <a:solidFill>
-                  <a:srgbClr val="1B6E78"/>
+              <a:rPr lang="en-US" sz="1400" b="1" spc="200" kern="0" dirty="0">
+                <a:solidFill>
+                  <a:srgbClr val="9FC0C4"/>
                 </a:solidFill>
                 <a:latin typeface="Calibri" pitchFamily="34" charset="0"/>
                 <a:ea typeface="Calibri" pitchFamily="34" charset="-122"/>
                 <a:cs typeface="Calibri" pitchFamily="34" charset="-120"/>
               </a:rPr>
-              <a:t>THE GENOME-WIDE CHECK</a:t>
-            </a:r>
-            <a:endParaRPr lang="en-US" sz="1200" dirty="0"/>
-          </a:p>
-        </p:txBody>
-      </p:sp>
-      <p:sp>
-        <p:nvSpPr>
-          <p:cNvPr id="4" name="Text 2"/>
-          <p:cNvSpPr/>
-          <p:nvPr/>
-        </p:nvSpPr>
-        <p:spPr>
-          <a:xfrm>
-            <a:off x="640080" y="868680"/>
-            <a:ext cx="10881360" cy="914400"/>
+              <a:t>A BOUNDED ANSWER — HONEST ABOUT POWER</a:t>
+            </a:r>
+            <a:endParaRPr lang="en-US" sz="1400" dirty="0"/>
+          </a:p>
+        </p:txBody>
+      </p:sp>
+      <p:sp>
+        <p:nvSpPr>
+          <p:cNvPr id="4" name="Shape 2"/>
+          <p:cNvSpPr/>
+          <p:nvPr/>
+        </p:nvSpPr>
+        <p:spPr>
+          <a:xfrm>
+            <a:off x="822960" y="1417320"/>
+            <a:ext cx="5212080" cy="4480560"/>
+          </a:xfrm>
+          <a:prstGeom prst="roundRect">
+            <a:avLst>
+              <a:gd name="adj" fmla="val 1633"/>
+            </a:avLst>
+          </a:prstGeom>
+          <a:solidFill>
+            <a:srgbClr val="1E3A40"/>
+          </a:solidFill>
+          <a:ln/>
+        </p:spPr>
+      </p:sp>
+      <p:sp>
+        <p:nvSpPr>
+          <p:cNvPr id="5" name="Text 3"/>
+          <p:cNvSpPr/>
+          <p:nvPr/>
+        </p:nvSpPr>
+        <p:spPr>
+          <a:xfrm>
+            <a:off x="1097280" y="1691640"/>
+            <a:ext cx="4572000" cy="365760"/>
           </a:xfrm>
           <a:prstGeom prst="rect">
             <a:avLst/>
@@ -4318,36 +4042,179 @@
           <a:lstStyle/>
           <a:p>
             <a:pPr indent="0" marL="0">
+              <a:buNone/>
+            </a:pPr>
+            <a:r>
+              <a:rPr lang="en-US" sz="1400" b="1" spc="200" kern="0" dirty="0">
+                <a:solidFill>
+                  <a:srgbClr val="1B6E78"/>
+                </a:solidFill>
+                <a:latin typeface="Calibri" pitchFamily="34" charset="0"/>
+                <a:ea typeface="Calibri" pitchFamily="34" charset="-122"/>
+                <a:cs typeface="Calibri" pitchFamily="34" charset="-120"/>
+              </a:rPr>
+              <a:t>WHAT WE CAN SAY</a:t>
+            </a:r>
+            <a:endParaRPr lang="en-US" sz="1400" dirty="0"/>
+          </a:p>
+        </p:txBody>
+      </p:sp>
+      <p:sp>
+        <p:nvSpPr>
+          <p:cNvPr id="6" name="Text 4"/>
+          <p:cNvSpPr/>
+          <p:nvPr/>
+        </p:nvSpPr>
+        <p:spPr>
+          <a:xfrm>
+            <a:off x="1097280" y="2148840"/>
+            <a:ext cx="4754880" cy="3566160"/>
+          </a:xfrm>
+          <a:prstGeom prst="rect">
+            <a:avLst/>
+          </a:prstGeom>
+          <a:noFill/>
+          <a:ln/>
+        </p:spPr>
+        <p:txBody>
+          <a:bodyPr wrap="square" lIns="0" tIns="0" rIns="0" bIns="0" rtlCol="0" anchor="t"/>
+          <a:lstStyle/>
+          <a:p>
+            <a:pPr indent="0" marL="0">
               <a:lnSpc>
-                <a:spcPts val="3400"/>
+                <a:spcPts val="2300"/>
               </a:lnSpc>
               <a:buNone/>
             </a:pPr>
             <a:r>
-              <a:rPr lang="en-US" sz="3000" b="1" dirty="0">
-                <a:solidFill>
-                  <a:srgbClr val="1B2B31"/>
-                </a:solidFill>
-                <a:latin typeface="Georgia" pitchFamily="34" charset="0"/>
-                <a:ea typeface="Georgia" pitchFamily="34" charset="-122"/>
-                <a:cs typeface="Georgia" pitchFamily="34" charset="-120"/>
-              </a:rPr>
-              <a:t>Genome-wide, the biopsy hepatocyte transcriptome is broadly stable</a:t>
-            </a:r>
-            <a:endParaRPr lang="en-US" sz="3000" dirty="0"/>
-          </a:p>
-        </p:txBody>
-      </p:sp>
-      <p:sp>
-        <p:nvSpPr>
-          <p:cNvPr id="5" name="Text 3"/>
-          <p:cNvSpPr/>
-          <p:nvPr/>
-        </p:nvSpPr>
-        <p:spPr>
-          <a:xfrm>
-            <a:off x="640080" y="1874520"/>
-            <a:ext cx="10698480" cy="640080"/>
+              <a:rPr lang="en-US" sz="1600" dirty="0">
+                <a:solidFill>
+                  <a:srgbClr val="FFFFFF"/>
+                </a:solidFill>
+                <a:latin typeface="Calibri" pitchFamily="34" charset="0"/>
+                <a:ea typeface="Calibri" pitchFamily="34" charset="-122"/>
+                <a:cs typeface="Calibri" pitchFamily="34" charset="-120"/>
+              </a:rPr>
+              <a:t>No detectable hepatocyte de-zonation across acquisition-matched biopsy MASLD (F0–F4 + NAS), by any mechanism.</a:t>
+            </a:r>
+            <a:endParaRPr lang="en-US" sz="1600" dirty="0"/>
+          </a:p>
+          <a:p>
+            <a:pPr indent="0" marL="0">
+              <a:lnSpc>
+                <a:spcPts val="2300"/>
+              </a:lnSpc>
+              <a:buNone/>
+            </a:pPr>
+            <a:r>
+              <a:rPr lang="en-US" sz="1600" dirty="0">
+                <a:solidFill>
+                  <a:srgbClr val="000000"/>
+                </a:solidFill>
+                <a:latin typeface="Calibri" pitchFamily="34" charset="0"/>
+                <a:ea typeface="Calibri" pitchFamily="34" charset="-122"/>
+                <a:cs typeface="Calibri" pitchFamily="34" charset="-120"/>
+              </a:rPr>
+              <a:t>
+</a:t>
+            </a:r>
+            <a:endParaRPr lang="en-US" sz="1600" dirty="0"/>
+          </a:p>
+          <a:p>
+            <a:pPr indent="0" marL="0">
+              <a:lnSpc>
+                <a:spcPts val="2300"/>
+              </a:lnSpc>
+              <a:buNone/>
+            </a:pPr>
+            <a:r>
+              <a:rPr lang="en-US" sz="1600" dirty="0">
+                <a:solidFill>
+                  <a:srgbClr val="FFFFFF"/>
+                </a:solidFill>
+                <a:latin typeface="Calibri" pitchFamily="34" charset="0"/>
+                <a:ea typeface="Calibri" pitchFamily="34" charset="-122"/>
+                <a:cs typeface="Calibri" pitchFamily="34" charset="-120"/>
+              </a:rPr>
+              <a:t>A broad PC↔PP gradient is present at every stage, including cirrhotic F4.</a:t>
+            </a:r>
+            <a:endParaRPr lang="en-US" sz="1600" dirty="0"/>
+          </a:p>
+          <a:p>
+            <a:pPr indent="0" marL="0">
+              <a:lnSpc>
+                <a:spcPts val="2300"/>
+              </a:lnSpc>
+              <a:buNone/>
+            </a:pPr>
+            <a:r>
+              <a:rPr lang="en-US" sz="1600" dirty="0">
+                <a:solidFill>
+                  <a:srgbClr val="000000"/>
+                </a:solidFill>
+                <a:latin typeface="Calibri" pitchFamily="34" charset="0"/>
+                <a:ea typeface="Calibri" pitchFamily="34" charset="-122"/>
+                <a:cs typeface="Calibri" pitchFamily="34" charset="-120"/>
+              </a:rPr>
+              <a:t>
+</a:t>
+            </a:r>
+            <a:endParaRPr lang="en-US" sz="1600" dirty="0"/>
+          </a:p>
+          <a:p>
+            <a:pPr indent="0" marL="0">
+              <a:lnSpc>
+                <a:spcPts val="2300"/>
+              </a:lnSpc>
+              <a:buNone/>
+            </a:pPr>
+            <a:r>
+              <a:rPr lang="en-US" sz="1600" b="1" dirty="0">
+                <a:solidFill>
+                  <a:srgbClr val="FFFFFF"/>
+                </a:solidFill>
+                <a:latin typeface="Calibri" pitchFamily="34" charset="0"/>
+                <a:ea typeface="Calibri" pitchFamily="34" charset="-122"/>
+                <a:cs typeface="Calibri" pitchFamily="34" charset="-120"/>
+              </a:rPr>
+              <a:t>Near-total collapse is excluded.</a:t>
+            </a:r>
+            <a:endParaRPr lang="en-US" sz="1600" dirty="0"/>
+          </a:p>
+        </p:txBody>
+      </p:sp>
+      <p:sp>
+        <p:nvSpPr>
+          <p:cNvPr id="7" name="Shape 5"/>
+          <p:cNvSpPr/>
+          <p:nvPr/>
+        </p:nvSpPr>
+        <p:spPr>
+          <a:xfrm>
+            <a:off x="6309360" y="1417320"/>
+            <a:ext cx="5029200" cy="4480560"/>
+          </a:xfrm>
+          <a:prstGeom prst="roundRect">
+            <a:avLst>
+              <a:gd name="adj" fmla="val 1633"/>
+            </a:avLst>
+          </a:prstGeom>
+          <a:solidFill>
+            <a:srgbClr val="3A2A20"/>
+          </a:solidFill>
+          <a:ln/>
+        </p:spPr>
+      </p:sp>
+      <p:sp>
+        <p:nvSpPr>
+          <p:cNvPr id="8" name="Text 6"/>
+          <p:cNvSpPr/>
+          <p:nvPr/>
+        </p:nvSpPr>
+        <p:spPr>
+          <a:xfrm>
+            <a:off x="6583680" y="1691640"/>
+            <a:ext cx="4572000" cy="365760"/>
           </a:xfrm>
           <a:prstGeom prst="rect">
             <a:avLst/>
@@ -4357,6 +4224,45 @@
         </p:spPr>
         <p:txBody>
           <a:bodyPr wrap="square" lIns="0" tIns="0" rIns="0" bIns="0" rtlCol="0" anchor="ctr"/>
+          <a:lstStyle/>
+          <a:p>
+            <a:pPr indent="0" marL="0">
+              <a:buNone/>
+            </a:pPr>
+            <a:r>
+              <a:rPr lang="en-US" sz="1400" b="1" spc="200" kern="0" dirty="0">
+                <a:solidFill>
+                  <a:srgbClr val="C0561B"/>
+                </a:solidFill>
+                <a:latin typeface="Calibri" pitchFamily="34" charset="0"/>
+                <a:ea typeface="Calibri" pitchFamily="34" charset="-122"/>
+                <a:cs typeface="Calibri" pitchFamily="34" charset="-120"/>
+              </a:rPr>
+              <a:t>WHAT WE DO NOT CLAIM</a:t>
+            </a:r>
+            <a:endParaRPr lang="en-US" sz="1400" dirty="0"/>
+          </a:p>
+        </p:txBody>
+      </p:sp>
+      <p:sp>
+        <p:nvSpPr>
+          <p:cNvPr id="9" name="Text 7"/>
+          <p:cNvSpPr/>
+          <p:nvPr/>
+        </p:nvSpPr>
+        <p:spPr>
+          <a:xfrm>
+            <a:off x="6583680" y="2148840"/>
+            <a:ext cx="4572000" cy="3566160"/>
+          </a:xfrm>
+          <a:prstGeom prst="rect">
+            <a:avLst/>
+          </a:prstGeom>
+          <a:noFill/>
+          <a:ln/>
+        </p:spPr>
+        <p:txBody>
+          <a:bodyPr wrap="square" lIns="0" tIns="0" rIns="0" bIns="0" rtlCol="0" anchor="t"/>
           <a:lstStyle/>
           <a:p>
             <a:pPr indent="0" marL="0">
@@ -4366,16 +4272,19 @@
               <a:buNone/>
             </a:pPr>
             <a:r>
-              <a:rPr lang="en-US" sz="1600" b="1" dirty="0">
-                <a:solidFill>
-                  <a:srgbClr val="1B2B31"/>
+              <a:rPr lang="en-US" sz="1550" dirty="0">
+                <a:solidFill>
+                  <a:srgbClr val="FFFFFF"/>
                 </a:solidFill>
                 <a:latin typeface="Calibri" pitchFamily="34" charset="0"/>
                 <a:ea typeface="Calibri" pitchFamily="34" charset="-122"/>
                 <a:cs typeface="Calibri" pitchFamily="34" charset="-120"/>
               </a:rPr>
-              <a:t>Transcriptome-wide donor-level DE</a:t>
-            </a:r>
+              <a:t>Not “zonation preserved” — the design is underpowered (smallest detectable change ≈ 85% of the mean; F0, F4 each ~one donor).</a:t>
+            </a:r>
+            <a:endParaRPr lang="en-US" sz="1550" dirty="0"/>
+          </a:p>
+          <a:p>
             <a:pPr indent="0" marL="0">
               <a:lnSpc>
                 <a:spcPts val="2200"/>
@@ -4383,339 +4292,85 @@
               <a:buNone/>
             </a:pPr>
             <a:r>
-              <a:rPr lang="en-US" sz="1600" dirty="0">
-                <a:solidFill>
-                  <a:srgbClr val="1B2B31"/>
+              <a:rPr lang="en-US" sz="1550" dirty="0">
+                <a:solidFill>
+                  <a:srgbClr val="000000"/>
                 </a:solidFill>
                 <a:latin typeface="Calibri" pitchFamily="34" charset="0"/>
                 <a:ea typeface="Calibri" pitchFamily="34" charset="-122"/>
                 <a:cs typeface="Calibri" pitchFamily="34" charset="-120"/>
               </a:rPr>
-              <a:t> — pseudobulk, 38 biopsy donors, 17,572 genes, Spearman vs fibrosis, BH-FDR — tested with no curated panel:</a:t>
-            </a:r>
-            <a:endParaRPr lang="en-US" sz="1600" dirty="0"/>
-          </a:p>
-        </p:txBody>
-      </p:sp>
-      <p:sp>
-        <p:nvSpPr>
-          <p:cNvPr id="6" name="Shape 4"/>
-          <p:cNvSpPr/>
-          <p:nvPr/>
-        </p:nvSpPr>
-        <p:spPr>
-          <a:xfrm>
-            <a:off x="640080" y="2651760"/>
-            <a:ext cx="5257800" cy="1828800"/>
-          </a:xfrm>
-          <a:prstGeom prst="roundRect">
-            <a:avLst>
-              <a:gd name="adj" fmla="val 4000"/>
-            </a:avLst>
-          </a:prstGeom>
-          <a:solidFill>
-            <a:srgbClr val="FFFFFF"/>
-          </a:solidFill>
-          <a:ln/>
-          <a:effectLst>
-            <a:outerShdw sx="100000" sy="100000" kx="0" ky="0" algn="bl" rotWithShape="0" blurRad="88900" dist="38100" dir="8100000">
-              <a:srgbClr val="000000">
-                <a:alpha val="13000"/>
-              </a:srgbClr>
-            </a:outerShdw>
-          </a:effectLst>
-        </p:spPr>
-      </p:sp>
-      <p:sp>
-        <p:nvSpPr>
-          <p:cNvPr id="7" name="Text 5"/>
-          <p:cNvSpPr/>
-          <p:nvPr/>
-        </p:nvSpPr>
-        <p:spPr>
-          <a:xfrm>
-            <a:off x="868680" y="2834640"/>
-            <a:ext cx="4846320" cy="1508760"/>
-          </a:xfrm>
-          <a:prstGeom prst="rect">
-            <a:avLst/>
-          </a:prstGeom>
-          <a:noFill/>
-          <a:ln/>
-        </p:spPr>
-        <p:txBody>
-          <a:bodyPr wrap="square" lIns="0" tIns="0" rIns="0" bIns="0" rtlCol="0" anchor="ctr"/>
-          <a:lstStyle/>
+              <a:t>
+</a:t>
+            </a:r>
+            <a:endParaRPr lang="en-US" sz="1550" dirty="0"/>
+          </a:p>
           <a:p>
             <a:pPr indent="0" marL="0">
               <a:lnSpc>
-                <a:spcPts val="2000"/>
+                <a:spcPts val="2200"/>
               </a:lnSpc>
               <a:buNone/>
             </a:pPr>
             <a:r>
-              <a:rPr lang="en-US" sz="1400" b="1" dirty="0">
-                <a:solidFill>
-                  <a:srgbClr val="1B6E78"/>
+              <a:rPr lang="en-US" sz="1550" dirty="0">
+                <a:solidFill>
+                  <a:srgbClr val="FFFFFF"/>
                 </a:solidFill>
                 <a:latin typeface="Calibri" pitchFamily="34" charset="0"/>
                 <a:ea typeface="Calibri" pitchFamily="34" charset="-122"/>
                 <a:cs typeface="Calibri" pitchFamily="34" charset="-120"/>
               </a:rPr>
-              <a:t>Zonation &amp; detox genes: all flat
-</a:t>
-            </a:r>
-            <a:endParaRPr lang="en-US" sz="1400" dirty="0"/>
+              <a:t>Single-nucleus counts cannot see lobular spatial position — “PC-like program,” not location.</a:t>
+            </a:r>
+            <a:endParaRPr lang="en-US" sz="1550" dirty="0"/>
           </a:p>
           <a:p>
             <a:pPr indent="0" marL="0">
               <a:lnSpc>
-                <a:spcPts val="2000"/>
+                <a:spcPts val="2200"/>
               </a:lnSpc>
               <a:buNone/>
             </a:pPr>
             <a:r>
-              <a:rPr lang="en-US" sz="1400" dirty="0">
-                <a:solidFill>
-                  <a:srgbClr val="45565B"/>
+              <a:rPr lang="en-US" sz="1550" dirty="0">
+                <a:solidFill>
+                  <a:srgbClr val="000000"/>
                 </a:solidFill>
                 <a:latin typeface="Calibri" pitchFamily="34" charset="0"/>
                 <a:ea typeface="Calibri" pitchFamily="34" charset="-122"/>
                 <a:cs typeface="Calibri" pitchFamily="34" charset="-120"/>
               </a:rPr>
-              <a:t>CYP2E1 FDR .98 · CYP1A2 .91 · ADH4 .97 · SLCO1B3 .80 · GLUL .85 · all periportal &gt; .79.  The null holds far beyond the panel.</a:t>
-            </a:r>
-            <a:endParaRPr lang="en-US" sz="1400" dirty="0"/>
-          </a:p>
-        </p:txBody>
-      </p:sp>
-      <p:sp>
-        <p:nvSpPr>
-          <p:cNvPr id="8" name="Shape 6"/>
-          <p:cNvSpPr/>
-          <p:nvPr/>
-        </p:nvSpPr>
-        <p:spPr>
-          <a:xfrm>
-            <a:off x="6080760" y="2651760"/>
-            <a:ext cx="5440680" cy="1828800"/>
-          </a:xfrm>
-          <a:prstGeom prst="roundRect">
-            <a:avLst>
-              <a:gd name="adj" fmla="val 4000"/>
-            </a:avLst>
-          </a:prstGeom>
-          <a:solidFill>
-            <a:srgbClr val="FFFFFF"/>
-          </a:solidFill>
-          <a:ln/>
-          <a:effectLst>
-            <a:outerShdw sx="100000" sy="100000" kx="0" ky="0" algn="bl" rotWithShape="0" blurRad="88900" dist="38100" dir="8100000">
-              <a:srgbClr val="000000">
-                <a:alpha val="13000"/>
-              </a:srgbClr>
-            </a:outerShdw>
-          </a:effectLst>
-        </p:spPr>
-      </p:sp>
-      <p:sp>
-        <p:nvSpPr>
-          <p:cNvPr id="9" name="Text 7"/>
-          <p:cNvSpPr/>
-          <p:nvPr/>
-        </p:nvSpPr>
-        <p:spPr>
-          <a:xfrm>
-            <a:off x="6309360" y="2834640"/>
-            <a:ext cx="5029200" cy="1508760"/>
-          </a:xfrm>
-          <a:prstGeom prst="rect">
-            <a:avLst/>
-          </a:prstGeom>
-          <a:noFill/>
-          <a:ln/>
-        </p:spPr>
-        <p:txBody>
-          <a:bodyPr wrap="square" lIns="0" tIns="0" rIns="0" bIns="0" rtlCol="0" anchor="ctr"/>
-          <a:lstStyle/>
+              <a:t>
+</a:t>
+            </a:r>
+            <a:endParaRPr lang="en-US" sz="1550" dirty="0"/>
+          </a:p>
           <a:p>
             <a:pPr indent="0" marL="0">
               <a:lnSpc>
-                <a:spcPts val="2000"/>
+                <a:spcPts val="2200"/>
               </a:lnSpc>
               <a:buNone/>
             </a:pPr>
             <a:r>
-              <a:rPr lang="en-US" sz="1400" b="1" dirty="0">
-                <a:solidFill>
-                  <a:srgbClr val="1B2B31"/>
+              <a:rPr lang="en-US" sz="1550" dirty="0">
+                <a:solidFill>
+                  <a:srgbClr val="FFFFFF"/>
                 </a:solidFill>
                 <a:latin typeface="Calibri" pitchFamily="34" charset="0"/>
                 <a:ea typeface="Calibri" pitchFamily="34" charset="-122"/>
                 <a:cs typeface="Calibri" pitchFamily="34" charset="-120"/>
               </a:rPr>
-              <a:t>23 genes do trend — but not zonation
-</a:t>
-            </a:r>
-            <a:endParaRPr lang="en-US" sz="1400" dirty="0"/>
-          </a:p>
-          <a:p>
-            <a:pPr indent="0" marL="0">
-              <a:lnSpc>
-                <a:spcPts val="2000"/>
-              </a:lnSpc>
-              <a:buNone/>
-            </a:pPr>
-            <a:r>
-              <a:rPr lang="en-US" sz="1400" dirty="0">
-                <a:solidFill>
-                  <a:srgbClr val="45565B"/>
-                </a:solidFill>
-                <a:latin typeface="Calibri" pitchFamily="34" charset="0"/>
-                <a:ea typeface="Calibri" pitchFamily="34" charset="-122"/>
-                <a:cs typeface="Calibri" pitchFamily="34" charset="-120"/>
-              </a:rPr>
-              <a:t>15/23 are stromal/immune ambient (stellate, cholangiocyte, endothelial). The one clear hepatocyte-intrinsic signal: </a:t>
-            </a:r>
-            <a:pPr indent="0" marL="0">
-              <a:lnSpc>
-                <a:spcPts val="2000"/>
-              </a:lnSpc>
-              <a:buNone/>
-            </a:pPr>
-            <a:r>
-              <a:rPr lang="en-US" sz="1400" b="1" dirty="0">
-                <a:solidFill>
-                  <a:srgbClr val="1B2B31"/>
-                </a:solidFill>
-                <a:latin typeface="Calibri" pitchFamily="34" charset="0"/>
-                <a:ea typeface="Calibri" pitchFamily="34" charset="-122"/>
-                <a:cs typeface="Calibri" pitchFamily="34" charset="-120"/>
-              </a:rPr>
-              <a:t>A2M acute-phase, CPM 219→718.</a:t>
-            </a:r>
-            <a:endParaRPr lang="en-US" sz="1400" dirty="0"/>
-          </a:p>
-        </p:txBody>
-      </p:sp>
-      <p:sp>
-        <p:nvSpPr>
-          <p:cNvPr id="10" name="Shape 8"/>
-          <p:cNvSpPr/>
-          <p:nvPr/>
-        </p:nvSpPr>
-        <p:spPr>
-          <a:xfrm>
-            <a:off x="640080" y="4709160"/>
-            <a:ext cx="10881360" cy="1371600"/>
-          </a:xfrm>
-          <a:prstGeom prst="roundRect">
-            <a:avLst>
-              <a:gd name="adj" fmla="val 4667"/>
-            </a:avLst>
-          </a:prstGeom>
-          <a:solidFill>
-            <a:srgbClr val="ECF1F1"/>
-          </a:solidFill>
-          <a:ln/>
-        </p:spPr>
-      </p:sp>
-      <p:sp>
-        <p:nvSpPr>
-          <p:cNvPr id="11" name="Text 9"/>
-          <p:cNvSpPr/>
-          <p:nvPr/>
-        </p:nvSpPr>
-        <p:spPr>
-          <a:xfrm>
-            <a:off x="914400" y="4892040"/>
-            <a:ext cx="10332720" cy="1005840"/>
-          </a:xfrm>
-          <a:prstGeom prst="rect">
-            <a:avLst/>
-          </a:prstGeom>
-          <a:noFill/>
-          <a:ln/>
-        </p:spPr>
-        <p:txBody>
-          <a:bodyPr wrap="square" lIns="0" tIns="0" rIns="0" bIns="0" rtlCol="0" anchor="ctr"/>
-          <a:lstStyle/>
-          <a:p>
-            <a:pPr indent="0" marL="0">
-              <a:lnSpc>
-                <a:spcPts val="2000"/>
-              </a:lnSpc>
-              <a:buNone/>
-            </a:pPr>
-            <a:r>
-              <a:rPr lang="en-US" sz="1400" b="1" dirty="0">
-                <a:solidFill>
-                  <a:srgbClr val="C0561B"/>
-                </a:solidFill>
-                <a:latin typeface="Calibri" pitchFamily="34" charset="0"/>
-                <a:ea typeface="Calibri" pitchFamily="34" charset="-122"/>
-                <a:cs typeface="Calibri" pitchFamily="34" charset="-120"/>
-              </a:rPr>
-              <a:t>Correction: </a:t>
-            </a:r>
-            <a:pPr indent="0" marL="0">
-              <a:lnSpc>
-                <a:spcPts val="2000"/>
-              </a:lnSpc>
-              <a:buNone/>
-            </a:pPr>
-            <a:r>
-              <a:rPr lang="en-US" sz="1400" dirty="0">
-                <a:solidFill>
-                  <a:srgbClr val="1B2B31"/>
-                </a:solidFill>
-                <a:latin typeface="Calibri" pitchFamily="34" charset="0"/>
-                <a:ea typeface="Calibri" pitchFamily="34" charset="-122"/>
-                <a:cs typeface="Calibri" pitchFamily="34" charset="-120"/>
-              </a:rPr>
-              <a:t>the earlier within-pericentral xenobiotic dip (12.7→8.9 molecules/nucleus) </a:t>
-            </a:r>
-            <a:pPr indent="0" marL="0">
-              <a:lnSpc>
-                <a:spcPts val="2000"/>
-              </a:lnSpc>
-              <a:buNone/>
-            </a:pPr>
-            <a:r>
-              <a:rPr lang="en-US" sz="1400" b="1" dirty="0">
-                <a:solidFill>
-                  <a:srgbClr val="1B2B31"/>
-                </a:solidFill>
-                <a:latin typeface="Calibri" pitchFamily="34" charset="0"/>
-                <a:ea typeface="Calibri" pitchFamily="34" charset="-122"/>
-                <a:cs typeface="Calibri" pitchFamily="34" charset="-120"/>
-              </a:rPr>
-              <a:t>does not survive this genome-wide test</a:t>
-            </a:r>
-            <a:pPr indent="0" marL="0">
-              <a:lnSpc>
-                <a:spcPts val="2000"/>
-              </a:lnSpc>
-              <a:buNone/>
-            </a:pPr>
-            <a:r>
-              <a:rPr lang="en-US" sz="1400" dirty="0">
-                <a:solidFill>
-                  <a:srgbClr val="1B2B31"/>
-                </a:solidFill>
-                <a:latin typeface="Calibri" pitchFamily="34" charset="0"/>
-                <a:ea typeface="Calibri" pitchFamily="34" charset="-122"/>
-                <a:cs typeface="Calibri" pitchFamily="34" charset="-120"/>
-              </a:rPr>
-              <a:t>, so it is no longer reported as a finding. Net: a stable hepatocyte transcriptome with a modest acute-phase response — not de-zonation.</a:t>
-            </a:r>
-            <a:endParaRPr lang="en-US" sz="1400" dirty="0"/>
-          </a:p>
-        </p:txBody>
-      </p:sp>
-      <p:sp>
-        <p:nvSpPr>
-          <p:cNvPr id="12" name="Text 10"/>
+              <a:t>Single cohort; no protein / spatial validation.</a:t>
+            </a:r>
+            <a:endParaRPr lang="en-US" sz="1550" dirty="0"/>
+          </a:p>
+        </p:txBody>
+      </p:sp>
+      <p:sp>
+        <p:nvSpPr>
+          <p:cNvPr id="10" name="Text 8"/>
           <p:cNvSpPr/>
           <p:nvPr/>
         </p:nvSpPr>
@@ -4837,7 +4492,7 @@
                 <a:ea typeface="Calibri" pitchFamily="34" charset="-122"/>
                 <a:cs typeface="Calibri" pitchFamily="34" charset="-120"/>
               </a:rPr>
-              <a:t>LIMITATIONS</a:t>
+              <a:t>THE CORRECTION</a:t>
             </a:r>
             <a:endParaRPr lang="en-US" sz="1200" dirty="0"/>
           </a:p>
@@ -4879,7 +4534,7 @@
                 <a:ea typeface="Georgia" pitchFamily="34" charset="-122"/>
                 <a:cs typeface="Georgia" pitchFamily="34" charset="-120"/>
               </a:rPr>
-              <a:t>What this dataset cannot settle</a:t>
+              <a:t>We correct one evidence leg — not the whole claim</a:t>
             </a:r>
             <a:endParaRPr lang="en-US" sz="3000" dirty="0"/>
           </a:p>
@@ -4893,12 +4548,12 @@
         </p:nvSpPr>
         <p:spPr>
           <a:xfrm>
-            <a:off x="640080" y="2057400"/>
-            <a:ext cx="5486400" cy="1143000"/>
+            <a:off x="640080" y="2011680"/>
+            <a:ext cx="10881360" cy="1207008"/>
           </a:xfrm>
           <a:prstGeom prst="roundRect">
             <a:avLst>
-              <a:gd name="adj" fmla="val 4800"/>
+              <a:gd name="adj" fmla="val 4545"/>
             </a:avLst>
           </a:prstGeom>
           <a:solidFill>
@@ -4916,14 +4571,34 @@
       </p:sp>
       <p:sp>
         <p:nvSpPr>
-          <p:cNvPr id="6" name="Text 4"/>
-          <p:cNvSpPr/>
-          <p:nvPr/>
-        </p:nvSpPr>
-        <p:spPr>
-          <a:xfrm>
-            <a:off x="914400" y="2203704"/>
-            <a:ext cx="4937760" cy="365760"/>
+          <p:cNvPr id="6" name="Shape 4"/>
+          <p:cNvSpPr/>
+          <p:nvPr/>
+        </p:nvSpPr>
+        <p:spPr>
+          <a:xfrm>
+            <a:off x="640080" y="2011680"/>
+            <a:ext cx="128016" cy="1207008"/>
+          </a:xfrm>
+          <a:prstGeom prst="rect">
+            <a:avLst/>
+          </a:prstGeom>
+          <a:solidFill>
+            <a:srgbClr val="1B6E78"/>
+          </a:solidFill>
+          <a:ln/>
+        </p:spPr>
+      </p:sp>
+      <p:sp>
+        <p:nvSpPr>
+          <p:cNvPr id="7" name="Text 5"/>
+          <p:cNvSpPr/>
+          <p:nvPr/>
+        </p:nvSpPr>
+        <p:spPr>
+          <a:xfrm>
+            <a:off x="960120" y="2148840"/>
+            <a:ext cx="3931920" cy="914400"/>
           </a:xfrm>
           <a:prstGeom prst="rect">
             <a:avLst/>
@@ -4939,30 +4614,91 @@
               <a:buNone/>
             </a:pPr>
             <a:r>
-              <a:rPr lang="en-US" sz="1450" b="1" dirty="0">
-                <a:solidFill>
-                  <a:srgbClr val="1B6E78"/>
+              <a:rPr lang="en-US" sz="1700" b="1" dirty="0">
+                <a:solidFill>
+                  <a:srgbClr val="1B2B31"/>
+                </a:solidFill>
+                <a:latin typeface="Georgia" pitchFamily="34" charset="0"/>
+                <a:ea typeface="Georgia" pitchFamily="34" charset="-122"/>
+                <a:cs typeface="Georgia" pitchFamily="34" charset="-120"/>
+              </a:rPr>
+              <a:t>snRNA marker-correlation</a:t>
+            </a:r>
+            <a:endParaRPr lang="en-US" sz="1700" dirty="0"/>
+          </a:p>
+        </p:txBody>
+      </p:sp>
+      <p:sp>
+        <p:nvSpPr>
+          <p:cNvPr id="8" name="Shape 6"/>
+          <p:cNvSpPr/>
+          <p:nvPr/>
+        </p:nvSpPr>
+        <p:spPr>
+          <a:xfrm>
+            <a:off x="4892040" y="2395728"/>
+            <a:ext cx="1691640" cy="438912"/>
+          </a:xfrm>
+          <a:prstGeom prst="roundRect">
+            <a:avLst>
+              <a:gd name="adj" fmla="val 50000"/>
+            </a:avLst>
+          </a:prstGeom>
+          <a:solidFill>
+            <a:srgbClr val="1B6E78"/>
+          </a:solidFill>
+          <a:ln/>
+        </p:spPr>
+      </p:sp>
+      <p:sp>
+        <p:nvSpPr>
+          <p:cNvPr id="9" name="Text 7"/>
+          <p:cNvSpPr/>
+          <p:nvPr/>
+        </p:nvSpPr>
+        <p:spPr>
+          <a:xfrm>
+            <a:off x="4892040" y="2395728"/>
+            <a:ext cx="1691640" cy="438912"/>
+          </a:xfrm>
+          <a:prstGeom prst="rect">
+            <a:avLst/>
+          </a:prstGeom>
+          <a:noFill/>
+          <a:ln/>
+        </p:spPr>
+        <p:txBody>
+          <a:bodyPr wrap="square" lIns="0" tIns="0" rIns="0" bIns="0" rtlCol="0" anchor="ctr"/>
+          <a:lstStyle/>
+          <a:p>
+            <a:pPr algn="ctr" indent="0" marL="0">
+              <a:buNone/>
+            </a:pPr>
+            <a:r>
+              <a:rPr lang="en-US" sz="1150" b="1" spc="100" kern="0" dirty="0">
+                <a:solidFill>
+                  <a:srgbClr val="FFFFFF"/>
                 </a:solidFill>
                 <a:latin typeface="Calibri" pitchFamily="34" charset="0"/>
                 <a:ea typeface="Calibri" pitchFamily="34" charset="-122"/>
                 <a:cs typeface="Calibri" pitchFamily="34" charset="-120"/>
               </a:rPr>
-              <a:t>Power</a:t>
-            </a:r>
-            <a:endParaRPr lang="en-US" sz="1450" dirty="0"/>
-          </a:p>
-        </p:txBody>
-      </p:sp>
-      <p:sp>
-        <p:nvSpPr>
-          <p:cNvPr id="7" name="Text 5"/>
-          <p:cNvSpPr/>
-          <p:nvPr/>
-        </p:nvSpPr>
-        <p:spPr>
-          <a:xfrm>
-            <a:off x="914400" y="2587752"/>
-            <a:ext cx="4983480" cy="539496"/>
+              <a:t>CORRECTED</a:t>
+            </a:r>
+            <a:endParaRPr lang="en-US" sz="1150" dirty="0"/>
+          </a:p>
+        </p:txBody>
+      </p:sp>
+      <p:sp>
+        <p:nvSpPr>
+          <p:cNvPr id="10" name="Text 8"/>
+          <p:cNvSpPr/>
+          <p:nvPr/>
+        </p:nvSpPr>
+        <p:spPr>
+          <a:xfrm>
+            <a:off x="6766560" y="2130552"/>
+            <a:ext cx="4572000" cy="969264"/>
           </a:xfrm>
           <a:prstGeom prst="rect">
             <a:avLst/>
@@ -4971,7 +4707,7 @@
           <a:ln/>
         </p:spPr>
         <p:txBody>
-          <a:bodyPr wrap="square" lIns="0" tIns="0" rIns="0" bIns="0" rtlCol="0" anchor="t"/>
+          <a:bodyPr wrap="square" lIns="0" tIns="0" rIns="0" bIns="0" rtlCol="0" anchor="ctr"/>
           <a:lstStyle/>
           <a:p>
             <a:pPr indent="0" marL="0">
@@ -4989,7 +4725,7 @@
                 <a:ea typeface="Calibri" pitchFamily="34" charset="-122"/>
                 <a:cs typeface="Calibri" pitchFamily="34" charset="-120"/>
               </a:rPr>
-              <a:t>A bounded null: near-total loss excluded, moderate graded change not.</a:t>
+              <a:t>A relative statistic, on procurement-confounded explant tissue. No progressive drift toward co-expression in biopsy (dual ≥2 UMI: 0.003 → 0.0, F1→F4).</a:t>
             </a:r>
             <a:endParaRPr lang="en-US" sz="1250" dirty="0"/>
           </a:p>
@@ -4997,18 +4733,18 @@
       </p:sp>
       <p:sp>
         <p:nvSpPr>
-          <p:cNvPr id="8" name="Shape 6"/>
-          <p:cNvSpPr/>
-          <p:nvPr/>
-        </p:nvSpPr>
-        <p:spPr>
-          <a:xfrm>
-            <a:off x="6446520" y="2057400"/>
-            <a:ext cx="5486400" cy="1143000"/>
+          <p:cNvPr id="11" name="Shape 9"/>
+          <p:cNvSpPr/>
+          <p:nvPr/>
+        </p:nvSpPr>
+        <p:spPr>
+          <a:xfrm>
+            <a:off x="640080" y="3383280"/>
+            <a:ext cx="10881360" cy="1207008"/>
           </a:xfrm>
           <a:prstGeom prst="roundRect">
             <a:avLst>
-              <a:gd name="adj" fmla="val 4800"/>
+              <a:gd name="adj" fmla="val 4545"/>
             </a:avLst>
           </a:prstGeom>
           <a:solidFill>
@@ -5026,14 +4762,34 @@
       </p:sp>
       <p:sp>
         <p:nvSpPr>
-          <p:cNvPr id="9" name="Text 7"/>
-          <p:cNvSpPr/>
-          <p:nvPr/>
-        </p:nvSpPr>
-        <p:spPr>
-          <a:xfrm>
-            <a:off x="6720840" y="2203704"/>
-            <a:ext cx="4937760" cy="365760"/>
+          <p:cNvPr id="12" name="Shape 10"/>
+          <p:cNvSpPr/>
+          <p:nvPr/>
+        </p:nvSpPr>
+        <p:spPr>
+          <a:xfrm>
+            <a:off x="640080" y="3383280"/>
+            <a:ext cx="128016" cy="1207008"/>
+          </a:xfrm>
+          <a:prstGeom prst="rect">
+            <a:avLst/>
+          </a:prstGeom>
+          <a:solidFill>
+            <a:srgbClr val="5C6E73"/>
+          </a:solidFill>
+          <a:ln/>
+        </p:spPr>
+      </p:sp>
+      <p:sp>
+        <p:nvSpPr>
+          <p:cNvPr id="13" name="Text 11"/>
+          <p:cNvSpPr/>
+          <p:nvPr/>
+        </p:nvSpPr>
+        <p:spPr>
+          <a:xfrm>
+            <a:off x="960120" y="3520440"/>
+            <a:ext cx="3931920" cy="914400"/>
           </a:xfrm>
           <a:prstGeom prst="rect">
             <a:avLst/>
@@ -5049,30 +4805,91 @@
               <a:buNone/>
             </a:pPr>
             <a:r>
-              <a:rPr lang="en-US" sz="1450" b="1" dirty="0">
-                <a:solidFill>
-                  <a:srgbClr val="1B6E78"/>
+              <a:rPr lang="en-US" sz="1700" b="1" dirty="0">
+                <a:solidFill>
+                  <a:srgbClr val="1B2B31"/>
+                </a:solidFill>
+                <a:latin typeface="Georgia" pitchFamily="34" charset="0"/>
+                <a:ea typeface="Georgia" pitchFamily="34" charset="-122"/>
+                <a:cs typeface="Georgia" pitchFamily="34" charset="-120"/>
+              </a:rPr>
+              <a:t>Immunofluorescence (GLUL+ASS1)</a:t>
+            </a:r>
+            <a:endParaRPr lang="en-US" sz="1700" dirty="0"/>
+          </a:p>
+        </p:txBody>
+      </p:sp>
+      <p:sp>
+        <p:nvSpPr>
+          <p:cNvPr id="14" name="Shape 12"/>
+          <p:cNvSpPr/>
+          <p:nvPr/>
+        </p:nvSpPr>
+        <p:spPr>
+          <a:xfrm>
+            <a:off x="4892040" y="3767328"/>
+            <a:ext cx="1691640" cy="438912"/>
+          </a:xfrm>
+          <a:prstGeom prst="roundRect">
+            <a:avLst>
+              <a:gd name="adj" fmla="val 50000"/>
+            </a:avLst>
+          </a:prstGeom>
+          <a:solidFill>
+            <a:srgbClr val="ECF1F1"/>
+          </a:solidFill>
+          <a:ln/>
+        </p:spPr>
+      </p:sp>
+      <p:sp>
+        <p:nvSpPr>
+          <p:cNvPr id="15" name="Text 13"/>
+          <p:cNvSpPr/>
+          <p:nvPr/>
+        </p:nvSpPr>
+        <p:spPr>
+          <a:xfrm>
+            <a:off x="4892040" y="3767328"/>
+            <a:ext cx="1691640" cy="438912"/>
+          </a:xfrm>
+          <a:prstGeom prst="rect">
+            <a:avLst/>
+          </a:prstGeom>
+          <a:noFill/>
+          <a:ln/>
+        </p:spPr>
+        <p:txBody>
+          <a:bodyPr wrap="square" lIns="0" tIns="0" rIns="0" bIns="0" rtlCol="0" anchor="ctr"/>
+          <a:lstStyle/>
+          <a:p>
+            <a:pPr algn="ctr" indent="0" marL="0">
+              <a:buNone/>
+            </a:pPr>
+            <a:r>
+              <a:rPr lang="en-US" sz="1150" b="1" spc="100" kern="0" dirty="0">
+                <a:solidFill>
+                  <a:srgbClr val="5C6E73"/>
                 </a:solidFill>
                 <a:latin typeface="Calibri" pitchFamily="34" charset="0"/>
                 <a:ea typeface="Calibri" pitchFamily="34" charset="-122"/>
                 <a:cs typeface="Calibri" pitchFamily="34" charset="-120"/>
               </a:rPr>
-              <a:t>End-stage disease</a:t>
-            </a:r>
-            <a:endParaRPr lang="en-US" sz="1450" dirty="0"/>
-          </a:p>
-        </p:txBody>
-      </p:sp>
-      <p:sp>
-        <p:nvSpPr>
-          <p:cNvPr id="10" name="Text 8"/>
-          <p:cNvSpPr/>
-          <p:nvPr/>
-        </p:nvSpPr>
-        <p:spPr>
-          <a:xfrm>
-            <a:off x="6720840" y="2587752"/>
-            <a:ext cx="4983480" cy="539496"/>
+              <a:t>NOT ADDRESSED</a:t>
+            </a:r>
+            <a:endParaRPr lang="en-US" sz="1150" dirty="0"/>
+          </a:p>
+        </p:txBody>
+      </p:sp>
+      <p:sp>
+        <p:nvSpPr>
+          <p:cNvPr id="16" name="Text 14"/>
+          <p:cNvSpPr/>
+          <p:nvPr/>
+        </p:nvSpPr>
+        <p:spPr>
+          <a:xfrm>
+            <a:off x="6766560" y="3502152"/>
+            <a:ext cx="4572000" cy="969264"/>
           </a:xfrm>
           <a:prstGeom prst="rect">
             <a:avLst/>
@@ -5081,7 +4898,7 @@
           <a:ln/>
         </p:spPr>
         <p:txBody>
-          <a:bodyPr wrap="square" lIns="0" tIns="0" rIns="0" bIns="0" rtlCol="0" anchor="t"/>
+          <a:bodyPr wrap="square" lIns="0" tIns="0" rIns="0" bIns="0" rtlCol="0" anchor="ctr"/>
           <a:lstStyle/>
           <a:p>
             <a:pPr indent="0" marL="0">
@@ -5099,7 +4916,7 @@
                 <a:ea typeface="Calibri" pitchFamily="34" charset="-122"/>
                 <a:cs typeface="Calibri" pitchFamily="34" charset="-120"/>
               </a:rPr>
-              <a:t>Unrecoverable here — no end-stage biopsies, no non-end-stage explants exist.</a:t>
+              <a:t>Protein co-localization — different molecule and timescale than the acute RNA stress we measure.</a:t>
             </a:r>
             <a:endParaRPr lang="en-US" sz="1250" dirty="0"/>
           </a:p>
@@ -5107,18 +4924,18 @@
       </p:sp>
       <p:sp>
         <p:nvSpPr>
-          <p:cNvPr id="11" name="Shape 9"/>
-          <p:cNvSpPr/>
-          <p:nvPr/>
-        </p:nvSpPr>
-        <p:spPr>
-          <a:xfrm>
-            <a:off x="640080" y="3401568"/>
-            <a:ext cx="5486400" cy="1143000"/>
+          <p:cNvPr id="17" name="Shape 15"/>
+          <p:cNvSpPr/>
+          <p:nvPr/>
+        </p:nvSpPr>
+        <p:spPr>
+          <a:xfrm>
+            <a:off x="640080" y="4754880"/>
+            <a:ext cx="10881360" cy="1207008"/>
           </a:xfrm>
           <a:prstGeom prst="roundRect">
             <a:avLst>
-              <a:gd name="adj" fmla="val 4800"/>
+              <a:gd name="adj" fmla="val 4545"/>
             </a:avLst>
           </a:prstGeom>
           <a:solidFill>
@@ -5136,14 +4953,34 @@
       </p:sp>
       <p:sp>
         <p:nvSpPr>
-          <p:cNvPr id="12" name="Text 10"/>
-          <p:cNvSpPr/>
-          <p:nvPr/>
-        </p:nvSpPr>
-        <p:spPr>
-          <a:xfrm>
-            <a:off x="914400" y="3547872"/>
-            <a:ext cx="4937760" cy="365760"/>
+          <p:cNvPr id="18" name="Shape 16"/>
+          <p:cNvSpPr/>
+          <p:nvPr/>
+        </p:nvSpPr>
+        <p:spPr>
+          <a:xfrm>
+            <a:off x="640080" y="4754880"/>
+            <a:ext cx="128016" cy="1207008"/>
+          </a:xfrm>
+          <a:prstGeom prst="rect">
+            <a:avLst/>
+          </a:prstGeom>
+          <a:solidFill>
+            <a:srgbClr val="5C6E73"/>
+          </a:solidFill>
+          <a:ln/>
+        </p:spPr>
+      </p:sp>
+      <p:sp>
+        <p:nvSpPr>
+          <p:cNvPr id="19" name="Text 17"/>
+          <p:cNvSpPr/>
+          <p:nvPr/>
+        </p:nvSpPr>
+        <p:spPr>
+          <a:xfrm>
+            <a:off x="960120" y="4892040"/>
+            <a:ext cx="3931920" cy="914400"/>
           </a:xfrm>
           <a:prstGeom prst="rect">
             <a:avLst/>
@@ -5159,30 +4996,91 @@
               <a:buNone/>
             </a:pPr>
             <a:r>
-              <a:rPr lang="en-US" sz="1450" b="1" dirty="0">
-                <a:solidFill>
-                  <a:srgbClr val="1B6E78"/>
+              <a:rPr lang="en-US" sz="1700" b="1" dirty="0">
+                <a:solidFill>
+                  <a:srgbClr val="1B2B31"/>
+                </a:solidFill>
+                <a:latin typeface="Georgia" pitchFamily="34" charset="0"/>
+                <a:ea typeface="Georgia" pitchFamily="34" charset="-122"/>
+                <a:cs typeface="Georgia" pitchFamily="34" charset="-120"/>
+              </a:rPr>
+              <a:t>FLASH 3D whole-organ imaging</a:t>
+            </a:r>
+            <a:endParaRPr lang="en-US" sz="1700" dirty="0"/>
+          </a:p>
+        </p:txBody>
+      </p:sp>
+      <p:sp>
+        <p:nvSpPr>
+          <p:cNvPr id="20" name="Shape 18"/>
+          <p:cNvSpPr/>
+          <p:nvPr/>
+        </p:nvSpPr>
+        <p:spPr>
+          <a:xfrm>
+            <a:off x="4892040" y="5138928"/>
+            <a:ext cx="1691640" cy="438912"/>
+          </a:xfrm>
+          <a:prstGeom prst="roundRect">
+            <a:avLst>
+              <a:gd name="adj" fmla="val 50000"/>
+            </a:avLst>
+          </a:prstGeom>
+          <a:solidFill>
+            <a:srgbClr val="ECF1F1"/>
+          </a:solidFill>
+          <a:ln/>
+        </p:spPr>
+      </p:sp>
+      <p:sp>
+        <p:nvSpPr>
+          <p:cNvPr id="21" name="Text 19"/>
+          <p:cNvSpPr/>
+          <p:nvPr/>
+        </p:nvSpPr>
+        <p:spPr>
+          <a:xfrm>
+            <a:off x="4892040" y="5138928"/>
+            <a:ext cx="1691640" cy="438912"/>
+          </a:xfrm>
+          <a:prstGeom prst="rect">
+            <a:avLst/>
+          </a:prstGeom>
+          <a:noFill/>
+          <a:ln/>
+        </p:spPr>
+        <p:txBody>
+          <a:bodyPr wrap="square" lIns="0" tIns="0" rIns="0" bIns="0" rtlCol="0" anchor="ctr"/>
+          <a:lstStyle/>
+          <a:p>
+            <a:pPr algn="ctr" indent="0" marL="0">
+              <a:buNone/>
+            </a:pPr>
+            <a:r>
+              <a:rPr lang="en-US" sz="1150" b="1" spc="100" kern="0" dirty="0">
+                <a:solidFill>
+                  <a:srgbClr val="5C6E73"/>
                 </a:solidFill>
                 <a:latin typeface="Calibri" pitchFamily="34" charset="0"/>
                 <a:ea typeface="Calibri" pitchFamily="34" charset="-122"/>
                 <a:cs typeface="Calibri" pitchFamily="34" charset="-120"/>
               </a:rPr>
-              <a:t>No spatial ground truth</a:t>
-            </a:r>
-            <a:endParaRPr lang="en-US" sz="1450" dirty="0"/>
-          </a:p>
-        </p:txBody>
-      </p:sp>
-      <p:sp>
-        <p:nvSpPr>
-          <p:cNvPr id="13" name="Text 11"/>
-          <p:cNvSpPr/>
-          <p:nvPr/>
-        </p:nvSpPr>
-        <p:spPr>
-          <a:xfrm>
-            <a:off x="914400" y="3931920"/>
-            <a:ext cx="4983480" cy="539496"/>
+              <a:t>NOT ADDRESSED</a:t>
+            </a:r>
+            <a:endParaRPr lang="en-US" sz="1150" dirty="0"/>
+          </a:p>
+        </p:txBody>
+      </p:sp>
+      <p:sp>
+        <p:nvSpPr>
+          <p:cNvPr id="22" name="Text 20"/>
+          <p:cNvSpPr/>
+          <p:nvPr/>
+        </p:nvSpPr>
+        <p:spPr>
+          <a:xfrm>
+            <a:off x="6766560" y="4873752"/>
+            <a:ext cx="4572000" cy="969264"/>
           </a:xfrm>
           <a:prstGeom prst="rect">
             <a:avLst/>
@@ -5191,7 +5089,7 @@
           <a:ln/>
         </p:spPr>
         <p:txBody>
-          <a:bodyPr wrap="square" lIns="0" tIns="0" rIns="0" bIns="0" rtlCol="0" anchor="t"/>
+          <a:bodyPr wrap="square" lIns="0" tIns="0" rIns="0" bIns="0" rtlCol="0" anchor="ctr"/>
           <a:lstStyle/>
           <a:p>
             <a:pPr indent="0" marL="0">
@@ -5209,337 +5107,7 @@
                 <a:ea typeface="Calibri" pitchFamily="34" charset="-122"/>
                 <a:cs typeface="Calibri" pitchFamily="34" charset="-120"/>
               </a:rPr>
-              <a:t>snRNA gives a PC-like program, not lobule position; focal / architectural de-zonation is invisible.</a:t>
-            </a:r>
-            <a:endParaRPr lang="en-US" sz="1250" dirty="0"/>
-          </a:p>
-        </p:txBody>
-      </p:sp>
-      <p:sp>
-        <p:nvSpPr>
-          <p:cNvPr id="14" name="Shape 12"/>
-          <p:cNvSpPr/>
-          <p:nvPr/>
-        </p:nvSpPr>
-        <p:spPr>
-          <a:xfrm>
-            <a:off x="6446520" y="3401568"/>
-            <a:ext cx="5486400" cy="1143000"/>
-          </a:xfrm>
-          <a:prstGeom prst="roundRect">
-            <a:avLst>
-              <a:gd name="adj" fmla="val 4800"/>
-            </a:avLst>
-          </a:prstGeom>
-          <a:solidFill>
-            <a:srgbClr val="FFFFFF"/>
-          </a:solidFill>
-          <a:ln/>
-          <a:effectLst>
-            <a:outerShdw sx="100000" sy="100000" kx="0" ky="0" algn="bl" rotWithShape="0" blurRad="88900" dist="38100" dir="8100000">
-              <a:srgbClr val="000000">
-                <a:alpha val="13000"/>
-              </a:srgbClr>
-            </a:outerShdw>
-          </a:effectLst>
-        </p:spPr>
-      </p:sp>
-      <p:sp>
-        <p:nvSpPr>
-          <p:cNvPr id="15" name="Text 13"/>
-          <p:cNvSpPr/>
-          <p:nvPr/>
-        </p:nvSpPr>
-        <p:spPr>
-          <a:xfrm>
-            <a:off x="6720840" y="3547872"/>
-            <a:ext cx="4937760" cy="365760"/>
-          </a:xfrm>
-          <a:prstGeom prst="rect">
-            <a:avLst/>
-          </a:prstGeom>
-          <a:noFill/>
-          <a:ln/>
-        </p:spPr>
-        <p:txBody>
-          <a:bodyPr wrap="square" lIns="0" tIns="0" rIns="0" bIns="0" rtlCol="0" anchor="ctr"/>
-          <a:lstStyle/>
-          <a:p>
-            <a:pPr indent="0" marL="0">
-              <a:buNone/>
-            </a:pPr>
-            <a:r>
-              <a:rPr lang="en-US" sz="1450" b="1" dirty="0">
-                <a:solidFill>
-                  <a:srgbClr val="1B6E78"/>
-                </a:solidFill>
-                <a:latin typeface="Calibri" pitchFamily="34" charset="0"/>
-                <a:ea typeface="Calibri" pitchFamily="34" charset="-122"/>
-                <a:cs typeface="Calibri" pitchFamily="34" charset="-120"/>
-              </a:rPr>
-              <a:t>Markers</a:t>
-            </a:r>
-            <a:endParaRPr lang="en-US" sz="1450" dirty="0"/>
-          </a:p>
-        </p:txBody>
-      </p:sp>
-      <p:sp>
-        <p:nvSpPr>
-          <p:cNvPr id="16" name="Text 14"/>
-          <p:cNvSpPr/>
-          <p:nvPr/>
-        </p:nvSpPr>
-        <p:spPr>
-          <a:xfrm>
-            <a:off x="6720840" y="3931920"/>
-            <a:ext cx="4983480" cy="539496"/>
-          </a:xfrm>
-          <a:prstGeom prst="rect">
-            <a:avLst/>
-          </a:prstGeom>
-          <a:noFill/>
-          <a:ln/>
-        </p:spPr>
-        <p:txBody>
-          <a:bodyPr wrap="square" lIns="0" tIns="0" rIns="0" bIns="0" rtlCol="0" anchor="t"/>
-          <a:lstStyle/>
-          <a:p>
-            <a:pPr indent="0" marL="0">
-              <a:lnSpc>
-                <a:spcPts val="1600"/>
-              </a:lnSpc>
-              <a:buNone/>
-            </a:pPr>
-            <a:r>
-              <a:rPr lang="en-US" sz="1250" dirty="0">
-                <a:solidFill>
-                  <a:srgbClr val="45565B"/>
-                </a:solidFill>
-                <a:latin typeface="Calibri" pitchFamily="34" charset="0"/>
-                <a:ea typeface="Calibri" pitchFamily="34" charset="-122"/>
-                <a:cs typeface="Calibri" pitchFamily="34" charset="-120"/>
-              </a:rPr>
-              <a:t>GLUL is dropout-prone; CYP3A4 covaries with detox — so no independent “identity preserved” claim.</a:t>
-            </a:r>
-            <a:endParaRPr lang="en-US" sz="1250" dirty="0"/>
-          </a:p>
-        </p:txBody>
-      </p:sp>
-      <p:sp>
-        <p:nvSpPr>
-          <p:cNvPr id="17" name="Shape 15"/>
-          <p:cNvSpPr/>
-          <p:nvPr/>
-        </p:nvSpPr>
-        <p:spPr>
-          <a:xfrm>
-            <a:off x="640080" y="4745736"/>
-            <a:ext cx="5486400" cy="1143000"/>
-          </a:xfrm>
-          <a:prstGeom prst="roundRect">
-            <a:avLst>
-              <a:gd name="adj" fmla="val 4800"/>
-            </a:avLst>
-          </a:prstGeom>
-          <a:solidFill>
-            <a:srgbClr val="FFFFFF"/>
-          </a:solidFill>
-          <a:ln/>
-          <a:effectLst>
-            <a:outerShdw sx="100000" sy="100000" kx="0" ky="0" algn="bl" rotWithShape="0" blurRad="88900" dist="38100" dir="8100000">
-              <a:srgbClr val="000000">
-                <a:alpha val="13000"/>
-              </a:srgbClr>
-            </a:outerShdw>
-          </a:effectLst>
-        </p:spPr>
-      </p:sp>
-      <p:sp>
-        <p:nvSpPr>
-          <p:cNvPr id="18" name="Text 16"/>
-          <p:cNvSpPr/>
-          <p:nvPr/>
-        </p:nvSpPr>
-        <p:spPr>
-          <a:xfrm>
-            <a:off x="914400" y="4892040"/>
-            <a:ext cx="4937760" cy="365760"/>
-          </a:xfrm>
-          <a:prstGeom prst="rect">
-            <a:avLst/>
-          </a:prstGeom>
-          <a:noFill/>
-          <a:ln/>
-        </p:spPr>
-        <p:txBody>
-          <a:bodyPr wrap="square" lIns="0" tIns="0" rIns="0" bIns="0" rtlCol="0" anchor="ctr"/>
-          <a:lstStyle/>
-          <a:p>
-            <a:pPr indent="0" marL="0">
-              <a:buNone/>
-            </a:pPr>
-            <a:r>
-              <a:rPr lang="en-US" sz="1450" b="1" dirty="0">
-                <a:solidFill>
-                  <a:srgbClr val="1B6E78"/>
-                </a:solidFill>
-                <a:latin typeface="Calibri" pitchFamily="34" charset="0"/>
-                <a:ea typeface="Calibri" pitchFamily="34" charset="-122"/>
-                <a:cs typeface="Calibri" pitchFamily="34" charset="-120"/>
-              </a:rPr>
-              <a:t>No clinical covariates</a:t>
-            </a:r>
-            <a:endParaRPr lang="en-US" sz="1450" dirty="0"/>
-          </a:p>
-        </p:txBody>
-      </p:sp>
-      <p:sp>
-        <p:nvSpPr>
-          <p:cNvPr id="19" name="Text 17"/>
-          <p:cNvSpPr/>
-          <p:nvPr/>
-        </p:nvSpPr>
-        <p:spPr>
-          <a:xfrm>
-            <a:off x="914400" y="5276088"/>
-            <a:ext cx="4983480" cy="539496"/>
-          </a:xfrm>
-          <a:prstGeom prst="rect">
-            <a:avLst/>
-          </a:prstGeom>
-          <a:noFill/>
-          <a:ln/>
-        </p:spPr>
-        <p:txBody>
-          <a:bodyPr wrap="square" lIns="0" tIns="0" rIns="0" bIns="0" rtlCol="0" anchor="t"/>
-          <a:lstStyle/>
-          <a:p>
-            <a:pPr indent="0" marL="0">
-              <a:lnSpc>
-                <a:spcPts val="1600"/>
-              </a:lnSpc>
-              <a:buNone/>
-            </a:pPr>
-            <a:r>
-              <a:rPr lang="en-US" sz="1250" dirty="0">
-                <a:solidFill>
-                  <a:srgbClr val="45565B"/>
-                </a:solidFill>
-                <a:latin typeface="Calibri" pitchFamily="34" charset="0"/>
-                <a:ea typeface="Calibri" pitchFamily="34" charset="-122"/>
-                <a:cs typeface="Calibri" pitchFamily="34" charset="-120"/>
-              </a:rPr>
-              <a:t>No etiology / alcohol / medication / fasting — fatal for any disease-specific gene claim.</a:t>
-            </a:r>
-            <a:endParaRPr lang="en-US" sz="1250" dirty="0"/>
-          </a:p>
-        </p:txBody>
-      </p:sp>
-      <p:sp>
-        <p:nvSpPr>
-          <p:cNvPr id="20" name="Shape 18"/>
-          <p:cNvSpPr/>
-          <p:nvPr/>
-        </p:nvSpPr>
-        <p:spPr>
-          <a:xfrm>
-            <a:off x="6446520" y="4745736"/>
-            <a:ext cx="5486400" cy="1143000"/>
-          </a:xfrm>
-          <a:prstGeom prst="roundRect">
-            <a:avLst>
-              <a:gd name="adj" fmla="val 4800"/>
-            </a:avLst>
-          </a:prstGeom>
-          <a:solidFill>
-            <a:srgbClr val="FFFFFF"/>
-          </a:solidFill>
-          <a:ln/>
-          <a:effectLst>
-            <a:outerShdw sx="100000" sy="100000" kx="0" ky="0" algn="bl" rotWithShape="0" blurRad="88900" dist="38100" dir="8100000">
-              <a:srgbClr val="000000">
-                <a:alpha val="13000"/>
-              </a:srgbClr>
-            </a:outerShdw>
-          </a:effectLst>
-        </p:spPr>
-      </p:sp>
-      <p:sp>
-        <p:nvSpPr>
-          <p:cNvPr id="21" name="Text 19"/>
-          <p:cNvSpPr/>
-          <p:nvPr/>
-        </p:nvSpPr>
-        <p:spPr>
-          <a:xfrm>
-            <a:off x="6720840" y="4892040"/>
-            <a:ext cx="4937760" cy="365760"/>
-          </a:xfrm>
-          <a:prstGeom prst="rect">
-            <a:avLst/>
-          </a:prstGeom>
-          <a:noFill/>
-          <a:ln/>
-        </p:spPr>
-        <p:txBody>
-          <a:bodyPr wrap="square" lIns="0" tIns="0" rIns="0" bIns="0" rtlCol="0" anchor="ctr"/>
-          <a:lstStyle/>
-          <a:p>
-            <a:pPr indent="0" marL="0">
-              <a:buNone/>
-            </a:pPr>
-            <a:r>
-              <a:rPr lang="en-US" sz="1450" b="1" dirty="0">
-                <a:solidFill>
-                  <a:srgbClr val="1B6E78"/>
-                </a:solidFill>
-                <a:latin typeface="Calibri" pitchFamily="34" charset="0"/>
-                <a:ea typeface="Calibri" pitchFamily="34" charset="-122"/>
-                <a:cs typeface="Calibri" pitchFamily="34" charset="-120"/>
-              </a:rPr>
-              <a:t>Single cohort</a:t>
-            </a:r>
-            <a:endParaRPr lang="en-US" sz="1450" dirty="0"/>
-          </a:p>
-        </p:txBody>
-      </p:sp>
-      <p:sp>
-        <p:nvSpPr>
-          <p:cNvPr id="22" name="Text 20"/>
-          <p:cNvSpPr/>
-          <p:nvPr/>
-        </p:nvSpPr>
-        <p:spPr>
-          <a:xfrm>
-            <a:off x="6720840" y="5276088"/>
-            <a:ext cx="4983480" cy="539496"/>
-          </a:xfrm>
-          <a:prstGeom prst="rect">
-            <a:avLst/>
-          </a:prstGeom>
-          <a:noFill/>
-          <a:ln/>
-        </p:spPr>
-        <p:txBody>
-          <a:bodyPr wrap="square" lIns="0" tIns="0" rIns="0" bIns="0" rtlCol="0" anchor="t"/>
-          <a:lstStyle/>
-          <a:p>
-            <a:pPr indent="0" marL="0">
-              <a:lnSpc>
-                <a:spcPts val="1600"/>
-              </a:lnSpc>
-              <a:buNone/>
-            </a:pPr>
-            <a:r>
-              <a:rPr lang="en-US" sz="1250" dirty="0">
-                <a:solidFill>
-                  <a:srgbClr val="45565B"/>
-                </a:solidFill>
-                <a:latin typeface="Calibri" pitchFamily="34" charset="0"/>
-                <a:ea typeface="Calibri" pitchFamily="34" charset="-122"/>
-                <a:cs typeface="Calibri" pitchFamily="34" charset="-120"/>
-              </a:rPr>
-              <a:t>No independent biopsy series or protein validation.</a:t>
+              <a:t>Architecture of end-stage explants; cirrhosis genuinely remodels the lobule. We cannot call it artifact.</a:t>
             </a:r>
             <a:endParaRPr lang="en-US" sz="1250" dirty="0"/>
           </a:p>
@@ -5598,7 +5166,7 @@
     <p:bg>
       <p:bgPr>
         <a:solidFill>
-          <a:srgbClr val="16242B"/>
+          <a:srgbClr val="F7F5F1"/>
         </a:solidFill>
       </p:bgPr>
     </p:bg>
@@ -5624,8 +5192,8 @@
         </p:nvSpPr>
         <p:spPr>
           <a:xfrm>
-            <a:off x="0" y="0"/>
-            <a:ext cx="256032" cy="6858000"/>
+            <a:off x="640080" y="502920"/>
+            <a:ext cx="164592" cy="310896"/>
           </a:xfrm>
           <a:prstGeom prst="rect">
             <a:avLst/>
@@ -5638,34 +5206,14 @@
       </p:sp>
       <p:sp>
         <p:nvSpPr>
-          <p:cNvPr id="3" name="Shape 1"/>
-          <p:cNvSpPr/>
-          <p:nvPr/>
-        </p:nvSpPr>
-        <p:spPr>
-          <a:xfrm>
-            <a:off x="256032" y="0"/>
-            <a:ext cx="109728" cy="6858000"/>
-          </a:xfrm>
-          <a:prstGeom prst="rect">
-            <a:avLst/>
-          </a:prstGeom>
-          <a:solidFill>
-            <a:srgbClr val="C0561B"/>
-          </a:solidFill>
-          <a:ln/>
-        </p:spPr>
-      </p:sp>
-      <p:sp>
-        <p:nvSpPr>
-          <p:cNvPr id="4" name="Text 2"/>
-          <p:cNvSpPr/>
-          <p:nvPr/>
-        </p:nvSpPr>
-        <p:spPr>
-          <a:xfrm>
-            <a:off x="914400" y="731520"/>
-            <a:ext cx="10058400" cy="365760"/>
+          <p:cNvPr id="3" name="Text 1"/>
+          <p:cNvSpPr/>
+          <p:nvPr/>
+        </p:nvSpPr>
+        <p:spPr>
+          <a:xfrm>
+            <a:off x="896112" y="502920"/>
+            <a:ext cx="8229600" cy="310896"/>
           </a:xfrm>
           <a:prstGeom prst="rect">
             <a:avLst/>
@@ -5681,30 +5229,30 @@
               <a:buNone/>
             </a:pPr>
             <a:r>
-              <a:rPr lang="en-US" sz="1400" b="1" spc="300" kern="0" dirty="0">
-                <a:solidFill>
-                  <a:srgbClr val="9FC0C4"/>
+              <a:rPr lang="en-US" sz="1200" b="1" spc="300" kern="0" dirty="0">
+                <a:solidFill>
+                  <a:srgbClr val="1B6E78"/>
                 </a:solidFill>
                 <a:latin typeface="Calibri" pitchFamily="34" charset="0"/>
                 <a:ea typeface="Calibri" pitchFamily="34" charset="-122"/>
                 <a:cs typeface="Calibri" pitchFamily="34" charset="-120"/>
               </a:rPr>
-              <a:t>CONCLUSION</a:t>
-            </a:r>
-            <a:endParaRPr lang="en-US" sz="1400" dirty="0"/>
-          </a:p>
-        </p:txBody>
-      </p:sp>
-      <p:sp>
-        <p:nvSpPr>
-          <p:cNvPr id="5" name="Text 3"/>
-          <p:cNvSpPr/>
-          <p:nvPr/>
-        </p:nvSpPr>
-        <p:spPr>
-          <a:xfrm>
-            <a:off x="914400" y="1280160"/>
-            <a:ext cx="10424160" cy="2194560"/>
+              <a:t>THE GENOME-WIDE CHECK</a:t>
+            </a:r>
+            <a:endParaRPr lang="en-US" sz="1200" dirty="0"/>
+          </a:p>
+        </p:txBody>
+      </p:sp>
+      <p:sp>
+        <p:nvSpPr>
+          <p:cNvPr id="4" name="Text 2"/>
+          <p:cNvSpPr/>
+          <p:nvPr/>
+        </p:nvSpPr>
+        <p:spPr>
+          <a:xfrm>
+            <a:off x="640080" y="868680"/>
+            <a:ext cx="10881360" cy="914400"/>
           </a:xfrm>
           <a:prstGeom prst="rect">
             <a:avLst/>
@@ -5718,200 +5266,403 @@
           <a:p>
             <a:pPr indent="0" marL="0">
               <a:lnSpc>
-                <a:spcPts val="3200"/>
+                <a:spcPts val="3400"/>
               </a:lnSpc>
               <a:buNone/>
             </a:pPr>
             <a:r>
-              <a:rPr lang="en-US" sz="2300" dirty="0">
-                <a:solidFill>
-                  <a:srgbClr val="FFFFFF"/>
+              <a:rPr lang="en-US" sz="3000" b="1" dirty="0">
+                <a:solidFill>
+                  <a:srgbClr val="1B2B31"/>
                 </a:solidFill>
                 <a:latin typeface="Georgia" pitchFamily="34" charset="0"/>
                 <a:ea typeface="Georgia" pitchFamily="34" charset="-122"/>
                 <a:cs typeface="Georgia" pitchFamily="34" charset="-120"/>
               </a:rPr>
-              <a:t>Across acquisition-matched biopsy MASLD, raw-count donor-level snRNA shows </a:t>
-            </a:r>
+              <a:t>Genome-wide, the biopsy hepatocyte transcriptome is broadly stable</a:t>
+            </a:r>
+            <a:endParaRPr lang="en-US" sz="3000" dirty="0"/>
+          </a:p>
+        </p:txBody>
+      </p:sp>
+      <p:sp>
+        <p:nvSpPr>
+          <p:cNvPr id="5" name="Text 3"/>
+          <p:cNvSpPr/>
+          <p:nvPr/>
+        </p:nvSpPr>
+        <p:spPr>
+          <a:xfrm>
+            <a:off x="640080" y="1874520"/>
+            <a:ext cx="10698480" cy="640080"/>
+          </a:xfrm>
+          <a:prstGeom prst="rect">
+            <a:avLst/>
+          </a:prstGeom>
+          <a:noFill/>
+          <a:ln/>
+        </p:spPr>
+        <p:txBody>
+          <a:bodyPr wrap="square" lIns="0" tIns="0" rIns="0" bIns="0" rtlCol="0" anchor="ctr"/>
+          <a:lstStyle/>
+          <a:p>
             <a:pPr indent="0" marL="0">
               <a:lnSpc>
-                <a:spcPts val="3200"/>
+                <a:spcPts val="2200"/>
               </a:lnSpc>
               <a:buNone/>
             </a:pPr>
             <a:r>
-              <a:rPr lang="en-US" sz="2300" b="1" dirty="0">
-                <a:solidFill>
-                  <a:srgbClr val="1B6E78"/>
-                </a:solidFill>
-                <a:latin typeface="Georgia" pitchFamily="34" charset="0"/>
-                <a:ea typeface="Georgia" pitchFamily="34" charset="-122"/>
-                <a:cs typeface="Georgia" pitchFamily="34" charset="-120"/>
-              </a:rPr>
-              <a:t>no detectable marker-count de-zonation</a:t>
-            </a:r>
-            <a:pPr indent="0" marL="0">
-              <a:lnSpc>
-                <a:spcPts val="3200"/>
-              </a:lnSpc>
-              <a:buNone/>
-            </a:pPr>
-            <a:r>
-              <a:rPr lang="en-US" sz="2300" dirty="0">
-                <a:solidFill>
-                  <a:srgbClr val="FFFFFF"/>
-                </a:solidFill>
-                <a:latin typeface="Georgia" pitchFamily="34" charset="0"/>
-                <a:ea typeface="Georgia" pitchFamily="34" charset="-122"/>
-                <a:cs typeface="Georgia" pitchFamily="34" charset="-120"/>
-              </a:rPr>
-              <a:t> — excluding near-total collapse, but underpowered for moderate/focal change. The end-stage signal is confined to heterogeneous explants and is </a:t>
-            </a:r>
-            <a:pPr indent="0" marL="0">
-              <a:lnSpc>
-                <a:spcPts val="3200"/>
-              </a:lnSpc>
-              <a:buNone/>
-            </a:pPr>
-            <a:r>
-              <a:rPr lang="en-US" sz="2300" b="1" dirty="0">
-                <a:solidFill>
-                  <a:srgbClr val="C0561B"/>
-                </a:solidFill>
-                <a:latin typeface="Georgia" pitchFamily="34" charset="0"/>
-                <a:ea typeface="Georgia" pitchFamily="34" charset="-122"/>
-                <a:cs typeface="Georgia" pitchFamily="34" charset="-120"/>
-              </a:rPr>
-              <a:t>inseparable from organ-wide procurement stress</a:t>
-            </a:r>
-            <a:pPr indent="0" marL="0">
-              <a:lnSpc>
-                <a:spcPts val="3200"/>
-              </a:lnSpc>
-              <a:buNone/>
-            </a:pPr>
-            <a:r>
-              <a:rPr lang="en-US" sz="2300" dirty="0">
-                <a:solidFill>
-                  <a:srgbClr val="FFFFFF"/>
-                </a:solidFill>
-                <a:latin typeface="Georgia" pitchFamily="34" charset="0"/>
-                <a:ea typeface="Georgia" pitchFamily="34" charset="-122"/>
-                <a:cs typeface="Georgia" pitchFamily="34" charset="-120"/>
-              </a:rPr>
-              <a:t> — not identifiable as progressive disease.</a:t>
-            </a:r>
-            <a:endParaRPr lang="en-US" sz="2300" dirty="0"/>
-          </a:p>
-        </p:txBody>
-      </p:sp>
-      <p:sp>
-        <p:nvSpPr>
-          <p:cNvPr id="6" name="Shape 4"/>
-          <p:cNvSpPr/>
-          <p:nvPr/>
-        </p:nvSpPr>
-        <p:spPr>
-          <a:xfrm>
-            <a:off x="914400" y="3611880"/>
-            <a:ext cx="10332720" cy="0"/>
-          </a:xfrm>
-          <a:prstGeom prst="line">
-            <a:avLst/>
-          </a:prstGeom>
-          <a:noFill/>
-          <a:ln w="19050">
-            <a:solidFill>
-              <a:srgbClr val="35515A"/>
-            </a:solidFill>
-            <a:prstDash val="solid"/>
-          </a:ln>
-        </p:spPr>
-      </p:sp>
-      <p:sp>
-        <p:nvSpPr>
-          <p:cNvPr id="7" name="Text 5"/>
-          <p:cNvSpPr/>
-          <p:nvPr/>
-        </p:nvSpPr>
-        <p:spPr>
-          <a:xfrm>
-            <a:off x="914400" y="3840480"/>
-            <a:ext cx="10058400" cy="365760"/>
-          </a:xfrm>
-          <a:prstGeom prst="rect">
-            <a:avLst/>
-          </a:prstGeom>
-          <a:noFill/>
-          <a:ln/>
-        </p:spPr>
-        <p:txBody>
-          <a:bodyPr wrap="square" lIns="0" tIns="0" rIns="0" bIns="0" rtlCol="0" anchor="ctr"/>
-          <a:lstStyle/>
-          <a:p>
-            <a:pPr indent="0" marL="0">
-              <a:buNone/>
-            </a:pPr>
-            <a:r>
-              <a:rPr lang="en-US" sz="1400" b="1" spc="200" kern="0" dirty="0">
-                <a:solidFill>
-                  <a:srgbClr val="C0561B"/>
+              <a:rPr lang="en-US" sz="1600" b="1" dirty="0">
+                <a:solidFill>
+                  <a:srgbClr val="1B2B31"/>
                 </a:solidFill>
                 <a:latin typeface="Calibri" pitchFamily="34" charset="0"/>
                 <a:ea typeface="Calibri" pitchFamily="34" charset="-122"/>
                 <a:cs typeface="Calibri" pitchFamily="34" charset="-120"/>
               </a:rPr>
-              <a:t>The transferable lesson</a:t>
-            </a:r>
-            <a:endParaRPr lang="en-US" sz="1400" dirty="0"/>
-          </a:p>
-        </p:txBody>
-      </p:sp>
-      <p:sp>
-        <p:nvSpPr>
-          <p:cNvPr id="8" name="Text 6"/>
-          <p:cNvSpPr/>
-          <p:nvPr/>
-        </p:nvSpPr>
-        <p:spPr>
-          <a:xfrm>
-            <a:off x="914400" y="4251960"/>
-            <a:ext cx="10332720" cy="1463040"/>
-          </a:xfrm>
-          <a:prstGeom prst="rect">
-            <a:avLst/>
-          </a:prstGeom>
-          <a:noFill/>
-          <a:ln/>
-        </p:spPr>
-        <p:txBody>
-          <a:bodyPr wrap="square" lIns="0" tIns="0" rIns="0" bIns="0" rtlCol="0" anchor="ctr"/>
-          <a:lstStyle/>
-          <a:p>
+              <a:t>Transcriptome-wide donor-level DE</a:t>
+            </a:r>
             <a:pPr indent="0" marL="0">
               <a:lnSpc>
-                <a:spcPts val="2400"/>
+                <a:spcPts val="2200"/>
               </a:lnSpc>
               <a:buNone/>
             </a:pPr>
             <a:r>
-              <a:rPr lang="en-US" sz="1650" i="1" dirty="0">
-                <a:solidFill>
-                  <a:srgbClr val="D7E6E8"/>
+              <a:rPr lang="en-US" sz="1600" dirty="0">
+                <a:solidFill>
+                  <a:srgbClr val="1B2B31"/>
                 </a:solidFill>
                 <a:latin typeface="Calibri" pitchFamily="34" charset="0"/>
                 <a:ea typeface="Calibri" pitchFamily="34" charset="-122"/>
                 <a:cs typeface="Calibri" pitchFamily="34" charset="-120"/>
               </a:rPr>
-              <a:t>Relative summary statistics — marker correlations, spreads, z-scores — on cohorts where disease stage tracks tissue acquisition can manufacture biology. Count-based, depth-matched, donor-level analysis with an explicit confound audit is the more conservative standard.</a:t>
-            </a:r>
-            <a:endParaRPr lang="en-US" sz="1650" dirty="0"/>
-          </a:p>
-        </p:txBody>
+              <a:t> — pseudobulk, 38 biopsy donors, 17,572 genes, Spearman vs fibrosis, BH-FDR — tested with no curated panel:</a:t>
+            </a:r>
+            <a:endParaRPr lang="en-US" sz="1600" dirty="0"/>
+          </a:p>
+        </p:txBody>
+      </p:sp>
+      <p:sp>
+        <p:nvSpPr>
+          <p:cNvPr id="6" name="Shape 4"/>
+          <p:cNvSpPr/>
+          <p:nvPr/>
+        </p:nvSpPr>
+        <p:spPr>
+          <a:xfrm>
+            <a:off x="640080" y="2651760"/>
+            <a:ext cx="5257800" cy="1828800"/>
+          </a:xfrm>
+          <a:prstGeom prst="roundRect">
+            <a:avLst>
+              <a:gd name="adj" fmla="val 4000"/>
+            </a:avLst>
+          </a:prstGeom>
+          <a:solidFill>
+            <a:srgbClr val="FFFFFF"/>
+          </a:solidFill>
+          <a:ln/>
+          <a:effectLst>
+            <a:outerShdw sx="100000" sy="100000" kx="0" ky="0" algn="bl" rotWithShape="0" blurRad="88900" dist="38100" dir="8100000">
+              <a:srgbClr val="000000">
+                <a:alpha val="13000"/>
+              </a:srgbClr>
+            </a:outerShdw>
+          </a:effectLst>
+        </p:spPr>
+      </p:sp>
+      <p:sp>
+        <p:nvSpPr>
+          <p:cNvPr id="7" name="Text 5"/>
+          <p:cNvSpPr/>
+          <p:nvPr/>
+        </p:nvSpPr>
+        <p:spPr>
+          <a:xfrm>
+            <a:off x="868680" y="2834640"/>
+            <a:ext cx="4846320" cy="1508760"/>
+          </a:xfrm>
+          <a:prstGeom prst="rect">
+            <a:avLst/>
+          </a:prstGeom>
+          <a:noFill/>
+          <a:ln/>
+        </p:spPr>
+        <p:txBody>
+          <a:bodyPr wrap="square" lIns="0" tIns="0" rIns="0" bIns="0" rtlCol="0" anchor="ctr"/>
+          <a:lstStyle/>
+          <a:p>
+            <a:pPr indent="0" marL="0">
+              <a:lnSpc>
+                <a:spcPts val="2000"/>
+              </a:lnSpc>
+              <a:buNone/>
+            </a:pPr>
+            <a:r>
+              <a:rPr lang="en-US" sz="1400" b="1" dirty="0">
+                <a:solidFill>
+                  <a:srgbClr val="1B6E78"/>
+                </a:solidFill>
+                <a:latin typeface="Calibri" pitchFamily="34" charset="0"/>
+                <a:ea typeface="Calibri" pitchFamily="34" charset="-122"/>
+                <a:cs typeface="Calibri" pitchFamily="34" charset="-120"/>
+              </a:rPr>
+              <a:t>Zonation &amp; detox genes: all flat
+</a:t>
+            </a:r>
+            <a:endParaRPr lang="en-US" sz="1400" dirty="0"/>
+          </a:p>
+          <a:p>
+            <a:pPr indent="0" marL="0">
+              <a:lnSpc>
+                <a:spcPts val="2000"/>
+              </a:lnSpc>
+              <a:buNone/>
+            </a:pPr>
+            <a:r>
+              <a:rPr lang="en-US" sz="1400" dirty="0">
+                <a:solidFill>
+                  <a:srgbClr val="45565B"/>
+                </a:solidFill>
+                <a:latin typeface="Calibri" pitchFamily="34" charset="0"/>
+                <a:ea typeface="Calibri" pitchFamily="34" charset="-122"/>
+                <a:cs typeface="Calibri" pitchFamily="34" charset="-120"/>
+              </a:rPr>
+              <a:t>CYP2E1 FDR .98 · CYP1A2 .91 · ADH4 .97 · SLCO1B3 .80 · GLUL .85 · all periportal &gt; .79.  The null holds far beyond the panel.</a:t>
+            </a:r>
+            <a:endParaRPr lang="en-US" sz="1400" dirty="0"/>
+          </a:p>
+        </p:txBody>
+      </p:sp>
+      <p:sp>
+        <p:nvSpPr>
+          <p:cNvPr id="8" name="Shape 6"/>
+          <p:cNvSpPr/>
+          <p:nvPr/>
+        </p:nvSpPr>
+        <p:spPr>
+          <a:xfrm>
+            <a:off x="6080760" y="2651760"/>
+            <a:ext cx="5440680" cy="1828800"/>
+          </a:xfrm>
+          <a:prstGeom prst="roundRect">
+            <a:avLst>
+              <a:gd name="adj" fmla="val 4000"/>
+            </a:avLst>
+          </a:prstGeom>
+          <a:solidFill>
+            <a:srgbClr val="FFFFFF"/>
+          </a:solidFill>
+          <a:ln/>
+          <a:effectLst>
+            <a:outerShdw sx="100000" sy="100000" kx="0" ky="0" algn="bl" rotWithShape="0" blurRad="88900" dist="38100" dir="8100000">
+              <a:srgbClr val="000000">
+                <a:alpha val="13000"/>
+              </a:srgbClr>
+            </a:outerShdw>
+          </a:effectLst>
+        </p:spPr>
       </p:sp>
       <p:sp>
         <p:nvSpPr>
           <p:cNvPr id="9" name="Text 7"/>
+          <p:cNvSpPr/>
+          <p:nvPr/>
+        </p:nvSpPr>
+        <p:spPr>
+          <a:xfrm>
+            <a:off x="6309360" y="2834640"/>
+            <a:ext cx="5029200" cy="1508760"/>
+          </a:xfrm>
+          <a:prstGeom prst="rect">
+            <a:avLst/>
+          </a:prstGeom>
+          <a:noFill/>
+          <a:ln/>
+        </p:spPr>
+        <p:txBody>
+          <a:bodyPr wrap="square" lIns="0" tIns="0" rIns="0" bIns="0" rtlCol="0" anchor="ctr"/>
+          <a:lstStyle/>
+          <a:p>
+            <a:pPr indent="0" marL="0">
+              <a:lnSpc>
+                <a:spcPts val="2000"/>
+              </a:lnSpc>
+              <a:buNone/>
+            </a:pPr>
+            <a:r>
+              <a:rPr lang="en-US" sz="1400" b="1" dirty="0">
+                <a:solidFill>
+                  <a:srgbClr val="1B2B31"/>
+                </a:solidFill>
+                <a:latin typeface="Calibri" pitchFamily="34" charset="0"/>
+                <a:ea typeface="Calibri" pitchFamily="34" charset="-122"/>
+                <a:cs typeface="Calibri" pitchFamily="34" charset="-120"/>
+              </a:rPr>
+              <a:t>23 genes do trend — but not zonation
+</a:t>
+            </a:r>
+            <a:endParaRPr lang="en-US" sz="1400" dirty="0"/>
+          </a:p>
+          <a:p>
+            <a:pPr indent="0" marL="0">
+              <a:lnSpc>
+                <a:spcPts val="2000"/>
+              </a:lnSpc>
+              <a:buNone/>
+            </a:pPr>
+            <a:r>
+              <a:rPr lang="en-US" sz="1400" dirty="0">
+                <a:solidFill>
+                  <a:srgbClr val="45565B"/>
+                </a:solidFill>
+                <a:latin typeface="Calibri" pitchFamily="34" charset="0"/>
+                <a:ea typeface="Calibri" pitchFamily="34" charset="-122"/>
+                <a:cs typeface="Calibri" pitchFamily="34" charset="-120"/>
+              </a:rPr>
+              <a:t>15/23 are stromal/immune ambient (stellate, cholangiocyte, endothelial). The one clear hepatocyte-intrinsic signal: </a:t>
+            </a:r>
+            <a:pPr indent="0" marL="0">
+              <a:lnSpc>
+                <a:spcPts val="2000"/>
+              </a:lnSpc>
+              <a:buNone/>
+            </a:pPr>
+            <a:r>
+              <a:rPr lang="en-US" sz="1400" b="1" dirty="0">
+                <a:solidFill>
+                  <a:srgbClr val="1B2B31"/>
+                </a:solidFill>
+                <a:latin typeface="Calibri" pitchFamily="34" charset="0"/>
+                <a:ea typeface="Calibri" pitchFamily="34" charset="-122"/>
+                <a:cs typeface="Calibri" pitchFamily="34" charset="-120"/>
+              </a:rPr>
+              <a:t>A2M acute-phase, CPM 219→718.</a:t>
+            </a:r>
+            <a:endParaRPr lang="en-US" sz="1400" dirty="0"/>
+          </a:p>
+        </p:txBody>
+      </p:sp>
+      <p:sp>
+        <p:nvSpPr>
+          <p:cNvPr id="10" name="Shape 8"/>
+          <p:cNvSpPr/>
+          <p:nvPr/>
+        </p:nvSpPr>
+        <p:spPr>
+          <a:xfrm>
+            <a:off x="640080" y="4709160"/>
+            <a:ext cx="10881360" cy="1371600"/>
+          </a:xfrm>
+          <a:prstGeom prst="roundRect">
+            <a:avLst>
+              <a:gd name="adj" fmla="val 4667"/>
+            </a:avLst>
+          </a:prstGeom>
+          <a:solidFill>
+            <a:srgbClr val="ECF1F1"/>
+          </a:solidFill>
+          <a:ln/>
+        </p:spPr>
+      </p:sp>
+      <p:sp>
+        <p:nvSpPr>
+          <p:cNvPr id="11" name="Text 9"/>
+          <p:cNvSpPr/>
+          <p:nvPr/>
+        </p:nvSpPr>
+        <p:spPr>
+          <a:xfrm>
+            <a:off x="914400" y="4892040"/>
+            <a:ext cx="10332720" cy="1005840"/>
+          </a:xfrm>
+          <a:prstGeom prst="rect">
+            <a:avLst/>
+          </a:prstGeom>
+          <a:noFill/>
+          <a:ln/>
+        </p:spPr>
+        <p:txBody>
+          <a:bodyPr wrap="square" lIns="0" tIns="0" rIns="0" bIns="0" rtlCol="0" anchor="ctr"/>
+          <a:lstStyle/>
+          <a:p>
+            <a:pPr indent="0" marL="0">
+              <a:lnSpc>
+                <a:spcPts val="2000"/>
+              </a:lnSpc>
+              <a:buNone/>
+            </a:pPr>
+            <a:r>
+              <a:rPr lang="en-US" sz="1400" b="1" dirty="0">
+                <a:solidFill>
+                  <a:srgbClr val="C0561B"/>
+                </a:solidFill>
+                <a:latin typeface="Calibri" pitchFamily="34" charset="0"/>
+                <a:ea typeface="Calibri" pitchFamily="34" charset="-122"/>
+                <a:cs typeface="Calibri" pitchFamily="34" charset="-120"/>
+              </a:rPr>
+              <a:t>Correction: </a:t>
+            </a:r>
+            <a:pPr indent="0" marL="0">
+              <a:lnSpc>
+                <a:spcPts val="2000"/>
+              </a:lnSpc>
+              <a:buNone/>
+            </a:pPr>
+            <a:r>
+              <a:rPr lang="en-US" sz="1400" dirty="0">
+                <a:solidFill>
+                  <a:srgbClr val="1B2B31"/>
+                </a:solidFill>
+                <a:latin typeface="Calibri" pitchFamily="34" charset="0"/>
+                <a:ea typeface="Calibri" pitchFamily="34" charset="-122"/>
+                <a:cs typeface="Calibri" pitchFamily="34" charset="-120"/>
+              </a:rPr>
+              <a:t>the earlier within-pericentral xenobiotic dip (12.7→8.9 molecules/nucleus) </a:t>
+            </a:r>
+            <a:pPr indent="0" marL="0">
+              <a:lnSpc>
+                <a:spcPts val="2000"/>
+              </a:lnSpc>
+              <a:buNone/>
+            </a:pPr>
+            <a:r>
+              <a:rPr lang="en-US" sz="1400" b="1" dirty="0">
+                <a:solidFill>
+                  <a:srgbClr val="1B2B31"/>
+                </a:solidFill>
+                <a:latin typeface="Calibri" pitchFamily="34" charset="0"/>
+                <a:ea typeface="Calibri" pitchFamily="34" charset="-122"/>
+                <a:cs typeface="Calibri" pitchFamily="34" charset="-120"/>
+              </a:rPr>
+              <a:t>does not survive this genome-wide test</a:t>
+            </a:r>
+            <a:pPr indent="0" marL="0">
+              <a:lnSpc>
+                <a:spcPts val="2000"/>
+              </a:lnSpc>
+              <a:buNone/>
+            </a:pPr>
+            <a:r>
+              <a:rPr lang="en-US" sz="1400" dirty="0">
+                <a:solidFill>
+                  <a:srgbClr val="1B2B31"/>
+                </a:solidFill>
+                <a:latin typeface="Calibri" pitchFamily="34" charset="0"/>
+                <a:ea typeface="Calibri" pitchFamily="34" charset="-122"/>
+                <a:cs typeface="Calibri" pitchFamily="34" charset="-120"/>
+              </a:rPr>
+              <a:t>, so it is no longer reported as a finding. Net: a stable hepatocyte transcriptome with a modest acute-phase response — not de-zonation.</a:t>
+            </a:r>
+            <a:endParaRPr lang="en-US" sz="1400" dirty="0"/>
+          </a:p>
+        </p:txBody>
+      </p:sp>
+      <p:sp>
+        <p:nvSpPr>
+          <p:cNvPr id="12" name="Text 10"/>
           <p:cNvSpPr/>
           <p:nvPr/>
         </p:nvSpPr>
@@ -6033,7 +5784,7 @@
                 <a:ea typeface="Calibri" pitchFamily="34" charset="-122"/>
                 <a:cs typeface="Calibri" pitchFamily="34" charset="-120"/>
               </a:rPr>
-              <a:t>APPENDIX · METHODS</a:t>
+              <a:t>LIMITATIONS</a:t>
             </a:r>
             <a:endParaRPr lang="en-US" sz="1200" dirty="0"/>
           </a:p>
@@ -6075,7 +5826,7 @@
                 <a:ea typeface="Georgia" pitchFamily="34" charset="-122"/>
                 <a:cs typeface="Georgia" pitchFamily="34" charset="-120"/>
               </a:rPr>
-              <a:t>Methods, in brief</a:t>
+              <a:t>What this dataset cannot settle</a:t>
             </a:r>
             <a:endParaRPr lang="en-US" sz="3000" dirty="0"/>
           </a:p>
@@ -6090,11 +5841,11 @@
         <p:spPr>
           <a:xfrm>
             <a:off x="640080" y="2057400"/>
-            <a:ext cx="5486400" cy="1783080"/>
+            <a:ext cx="5486400" cy="1143000"/>
           </a:xfrm>
           <a:prstGeom prst="roundRect">
             <a:avLst>
-              <a:gd name="adj" fmla="val 3590"/>
+              <a:gd name="adj" fmla="val 4800"/>
             </a:avLst>
           </a:prstGeom>
           <a:solidFill>
@@ -6112,34 +5863,14 @@
       </p:sp>
       <p:sp>
         <p:nvSpPr>
-          <p:cNvPr id="6" name="Shape 4"/>
-          <p:cNvSpPr/>
-          <p:nvPr/>
-        </p:nvSpPr>
-        <p:spPr>
-          <a:xfrm>
-            <a:off x="640080" y="2057400"/>
-            <a:ext cx="109728" cy="1783080"/>
-          </a:xfrm>
-          <a:prstGeom prst="rect">
-            <a:avLst/>
-          </a:prstGeom>
-          <a:solidFill>
-            <a:srgbClr val="1B6E78"/>
-          </a:solidFill>
-          <a:ln/>
-        </p:spPr>
-      </p:sp>
-      <p:sp>
-        <p:nvSpPr>
-          <p:cNvPr id="7" name="Text 5"/>
-          <p:cNvSpPr/>
-          <p:nvPr/>
-        </p:nvSpPr>
-        <p:spPr>
-          <a:xfrm>
-            <a:off x="960120" y="2258568"/>
-            <a:ext cx="4937760" cy="457200"/>
+          <p:cNvPr id="6" name="Text 4"/>
+          <p:cNvSpPr/>
+          <p:nvPr/>
+        </p:nvSpPr>
+        <p:spPr>
+          <a:xfrm>
+            <a:off x="914400" y="2203704"/>
+            <a:ext cx="4937760" cy="365760"/>
           </a:xfrm>
           <a:prstGeom prst="rect">
             <a:avLst/>
@@ -6155,76 +5886,76 @@
               <a:buNone/>
             </a:pPr>
             <a:r>
-              <a:rPr lang="en-US" sz="1700" b="1" dirty="0">
-                <a:solidFill>
-                  <a:srgbClr val="1B2B31"/>
-                </a:solidFill>
-                <a:latin typeface="Georgia" pitchFamily="34" charset="0"/>
-                <a:ea typeface="Georgia" pitchFamily="34" charset="-122"/>
-                <a:cs typeface="Georgia" pitchFamily="34" charset="-120"/>
-              </a:rPr>
-              <a:t>Raw molecule counts</a:t>
-            </a:r>
-            <a:endParaRPr lang="en-US" sz="1700" dirty="0"/>
-          </a:p>
-        </p:txBody>
-      </p:sp>
-      <p:sp>
-        <p:nvSpPr>
-          <p:cNvPr id="8" name="Text 6"/>
-          <p:cNvSpPr/>
-          <p:nvPr/>
-        </p:nvSpPr>
-        <p:spPr>
-          <a:xfrm>
-            <a:off x="960120" y="2770632"/>
-            <a:ext cx="4937760" cy="914400"/>
-          </a:xfrm>
-          <a:prstGeom prst="rect">
-            <a:avLst/>
-          </a:prstGeom>
-          <a:noFill/>
-          <a:ln/>
-        </p:spPr>
-        <p:txBody>
-          <a:bodyPr wrap="square" lIns="0" tIns="0" rIns="0" bIns="0" rtlCol="0" anchor="t"/>
-          <a:lstStyle/>
-          <a:p>
-            <a:pPr indent="0" marL="0">
-              <a:lnSpc>
-                <a:spcPts val="1800"/>
-              </a:lnSpc>
-              <a:buNone/>
-            </a:pPr>
-            <a:r>
-              <a:rPr lang="en-US" sz="1300" dirty="0">
-                <a:solidFill>
-                  <a:srgbClr val="45565B"/>
+              <a:rPr lang="en-US" sz="1450" b="1" dirty="0">
+                <a:solidFill>
+                  <a:srgbClr val="1B6E78"/>
                 </a:solidFill>
                 <a:latin typeface="Calibri" pitchFamily="34" charset="0"/>
                 <a:ea typeface="Calibri" pitchFamily="34" charset="-122"/>
                 <a:cs typeface="Calibri" pitchFamily="34" charset="-120"/>
               </a:rPr>
-              <a:t>Extracted the RNA-assay counts from the Seurat object — the shipped matrix is an SCT model output, not molecules. 45-gene panel + full library size per nucleus.</a:t>
-            </a:r>
-            <a:endParaRPr lang="en-US" sz="1300" dirty="0"/>
-          </a:p>
-        </p:txBody>
-      </p:sp>
-      <p:sp>
-        <p:nvSpPr>
-          <p:cNvPr id="9" name="Shape 7"/>
+              <a:t>Power</a:t>
+            </a:r>
+            <a:endParaRPr lang="en-US" sz="1450" dirty="0"/>
+          </a:p>
+        </p:txBody>
+      </p:sp>
+      <p:sp>
+        <p:nvSpPr>
+          <p:cNvPr id="7" name="Text 5"/>
+          <p:cNvSpPr/>
+          <p:nvPr/>
+        </p:nvSpPr>
+        <p:spPr>
+          <a:xfrm>
+            <a:off x="914400" y="2587752"/>
+            <a:ext cx="4983480" cy="539496"/>
+          </a:xfrm>
+          <a:prstGeom prst="rect">
+            <a:avLst/>
+          </a:prstGeom>
+          <a:noFill/>
+          <a:ln/>
+        </p:spPr>
+        <p:txBody>
+          <a:bodyPr wrap="square" lIns="0" tIns="0" rIns="0" bIns="0" rtlCol="0" anchor="t"/>
+          <a:lstStyle/>
+          <a:p>
+            <a:pPr indent="0" marL="0">
+              <a:lnSpc>
+                <a:spcPts val="1600"/>
+              </a:lnSpc>
+              <a:buNone/>
+            </a:pPr>
+            <a:r>
+              <a:rPr lang="en-US" sz="1250" dirty="0">
+                <a:solidFill>
+                  <a:srgbClr val="45565B"/>
+                </a:solidFill>
+                <a:latin typeface="Calibri" pitchFamily="34" charset="0"/>
+                <a:ea typeface="Calibri" pitchFamily="34" charset="-122"/>
+                <a:cs typeface="Calibri" pitchFamily="34" charset="-120"/>
+              </a:rPr>
+              <a:t>A bounded null: near-total loss excluded, moderate graded change not.</a:t>
+            </a:r>
+            <a:endParaRPr lang="en-US" sz="1250" dirty="0"/>
+          </a:p>
+        </p:txBody>
+      </p:sp>
+      <p:sp>
+        <p:nvSpPr>
+          <p:cNvPr id="8" name="Shape 6"/>
           <p:cNvSpPr/>
           <p:nvPr/>
         </p:nvSpPr>
         <p:spPr>
           <a:xfrm>
             <a:off x="6446520" y="2057400"/>
-            <a:ext cx="5486400" cy="1783080"/>
+            <a:ext cx="5486400" cy="1143000"/>
           </a:xfrm>
           <a:prstGeom prst="roundRect">
             <a:avLst>
-              <a:gd name="adj" fmla="val 3590"/>
+              <a:gd name="adj" fmla="val 4800"/>
             </a:avLst>
           </a:prstGeom>
           <a:solidFill>
@@ -6242,34 +5973,14 @@
       </p:sp>
       <p:sp>
         <p:nvSpPr>
-          <p:cNvPr id="10" name="Shape 8"/>
-          <p:cNvSpPr/>
-          <p:nvPr/>
-        </p:nvSpPr>
-        <p:spPr>
-          <a:xfrm>
-            <a:off x="6446520" y="2057400"/>
-            <a:ext cx="109728" cy="1783080"/>
-          </a:xfrm>
-          <a:prstGeom prst="rect">
-            <a:avLst/>
-          </a:prstGeom>
-          <a:solidFill>
-            <a:srgbClr val="C0561B"/>
-          </a:solidFill>
-          <a:ln/>
-        </p:spPr>
-      </p:sp>
-      <p:sp>
-        <p:nvSpPr>
-          <p:cNvPr id="11" name="Text 9"/>
-          <p:cNvSpPr/>
-          <p:nvPr/>
-        </p:nvSpPr>
-        <p:spPr>
-          <a:xfrm>
-            <a:off x="6766560" y="2258568"/>
-            <a:ext cx="4937760" cy="457200"/>
+          <p:cNvPr id="9" name="Text 7"/>
+          <p:cNvSpPr/>
+          <p:nvPr/>
+        </p:nvSpPr>
+        <p:spPr>
+          <a:xfrm>
+            <a:off x="6720840" y="2203704"/>
+            <a:ext cx="4937760" cy="365760"/>
           </a:xfrm>
           <a:prstGeom prst="rect">
             <a:avLst/>
@@ -6285,76 +5996,76 @@
               <a:buNone/>
             </a:pPr>
             <a:r>
-              <a:rPr lang="en-US" sz="1700" b="1" dirty="0">
-                <a:solidFill>
-                  <a:srgbClr val="1B2B31"/>
-                </a:solidFill>
-                <a:latin typeface="Georgia" pitchFamily="34" charset="0"/>
-                <a:ea typeface="Georgia" pitchFamily="34" charset="-122"/>
-                <a:cs typeface="Georgia" pitchFamily="34" charset="-120"/>
-              </a:rPr>
-              <a:t>Depth-matched</a:t>
-            </a:r>
-            <a:endParaRPr lang="en-US" sz="1700" dirty="0"/>
-          </a:p>
-        </p:txBody>
-      </p:sp>
-      <p:sp>
-        <p:nvSpPr>
-          <p:cNvPr id="12" name="Text 10"/>
-          <p:cNvSpPr/>
-          <p:nvPr/>
-        </p:nvSpPr>
-        <p:spPr>
-          <a:xfrm>
-            <a:off x="6766560" y="2770632"/>
-            <a:ext cx="4937760" cy="914400"/>
-          </a:xfrm>
-          <a:prstGeom prst="rect">
-            <a:avLst/>
-          </a:prstGeom>
-          <a:noFill/>
-          <a:ln/>
-        </p:spPr>
-        <p:txBody>
-          <a:bodyPr wrap="square" lIns="0" tIns="0" rIns="0" bIns="0" rtlCol="0" anchor="t"/>
-          <a:lstStyle/>
-          <a:p>
-            <a:pPr indent="0" marL="0">
-              <a:lnSpc>
-                <a:spcPts val="1800"/>
-              </a:lnSpc>
-              <a:buNone/>
-            </a:pPr>
-            <a:r>
-              <a:rPr lang="en-US" sz="1300" dirty="0">
-                <a:solidFill>
-                  <a:srgbClr val="45565B"/>
+              <a:rPr lang="en-US" sz="1450" b="1" dirty="0">
+                <a:solidFill>
+                  <a:srgbClr val="1B6E78"/>
                 </a:solidFill>
                 <a:latin typeface="Calibri" pitchFamily="34" charset="0"/>
                 <a:ea typeface="Calibri" pitchFamily="34" charset="-122"/>
                 <a:cs typeface="Calibri" pitchFamily="34" charset="-120"/>
               </a:rPr>
-              <a:t>Downsample every nucleus to a common budget (1,000 / 1,500 / 3,000 UMIs) by binomial thinning, averaged over 8 draws — the standard count-preserving depth control.</a:t>
-            </a:r>
-            <a:endParaRPr lang="en-US" sz="1300" dirty="0"/>
-          </a:p>
-        </p:txBody>
-      </p:sp>
-      <p:sp>
-        <p:nvSpPr>
-          <p:cNvPr id="13" name="Shape 11"/>
-          <p:cNvSpPr/>
-          <p:nvPr/>
-        </p:nvSpPr>
-        <p:spPr>
-          <a:xfrm>
-            <a:off x="640080" y="4114800"/>
-            <a:ext cx="5486400" cy="1783080"/>
+              <a:t>End-stage disease</a:t>
+            </a:r>
+            <a:endParaRPr lang="en-US" sz="1450" dirty="0"/>
+          </a:p>
+        </p:txBody>
+      </p:sp>
+      <p:sp>
+        <p:nvSpPr>
+          <p:cNvPr id="10" name="Text 8"/>
+          <p:cNvSpPr/>
+          <p:nvPr/>
+        </p:nvSpPr>
+        <p:spPr>
+          <a:xfrm>
+            <a:off x="6720840" y="2587752"/>
+            <a:ext cx="4983480" cy="539496"/>
+          </a:xfrm>
+          <a:prstGeom prst="rect">
+            <a:avLst/>
+          </a:prstGeom>
+          <a:noFill/>
+          <a:ln/>
+        </p:spPr>
+        <p:txBody>
+          <a:bodyPr wrap="square" lIns="0" tIns="0" rIns="0" bIns="0" rtlCol="0" anchor="t"/>
+          <a:lstStyle/>
+          <a:p>
+            <a:pPr indent="0" marL="0">
+              <a:lnSpc>
+                <a:spcPts val="1600"/>
+              </a:lnSpc>
+              <a:buNone/>
+            </a:pPr>
+            <a:r>
+              <a:rPr lang="en-US" sz="1250" dirty="0">
+                <a:solidFill>
+                  <a:srgbClr val="45565B"/>
+                </a:solidFill>
+                <a:latin typeface="Calibri" pitchFamily="34" charset="0"/>
+                <a:ea typeface="Calibri" pitchFamily="34" charset="-122"/>
+                <a:cs typeface="Calibri" pitchFamily="34" charset="-120"/>
+              </a:rPr>
+              <a:t>Unrecoverable here — no end-stage biopsies, no non-end-stage explants exist.</a:t>
+            </a:r>
+            <a:endParaRPr lang="en-US" sz="1250" dirty="0"/>
+          </a:p>
+        </p:txBody>
+      </p:sp>
+      <p:sp>
+        <p:nvSpPr>
+          <p:cNvPr id="11" name="Shape 9"/>
+          <p:cNvSpPr/>
+          <p:nvPr/>
+        </p:nvSpPr>
+        <p:spPr>
+          <a:xfrm>
+            <a:off x="640080" y="3401568"/>
+            <a:ext cx="5486400" cy="1143000"/>
           </a:xfrm>
           <a:prstGeom prst="roundRect">
             <a:avLst>
-              <a:gd name="adj" fmla="val 3590"/>
+              <a:gd name="adj" fmla="val 4800"/>
             </a:avLst>
           </a:prstGeom>
           <a:solidFill>
@@ -6372,34 +6083,14 @@
       </p:sp>
       <p:sp>
         <p:nvSpPr>
-          <p:cNvPr id="14" name="Shape 12"/>
-          <p:cNvSpPr/>
-          <p:nvPr/>
-        </p:nvSpPr>
-        <p:spPr>
-          <a:xfrm>
-            <a:off x="640080" y="4114800"/>
-            <a:ext cx="109728" cy="1783080"/>
-          </a:xfrm>
-          <a:prstGeom prst="rect">
-            <a:avLst/>
-          </a:prstGeom>
-          <a:solidFill>
-            <a:srgbClr val="1B6E78"/>
-          </a:solidFill>
-          <a:ln/>
-        </p:spPr>
-      </p:sp>
-      <p:sp>
-        <p:nvSpPr>
-          <p:cNvPr id="15" name="Text 13"/>
-          <p:cNvSpPr/>
-          <p:nvPr/>
-        </p:nvSpPr>
-        <p:spPr>
-          <a:xfrm>
-            <a:off x="960120" y="4315968"/>
-            <a:ext cx="4937760" cy="457200"/>
+          <p:cNvPr id="12" name="Text 10"/>
+          <p:cNvSpPr/>
+          <p:nvPr/>
+        </p:nvSpPr>
+        <p:spPr>
+          <a:xfrm>
+            <a:off x="914400" y="3547872"/>
+            <a:ext cx="4937760" cy="365760"/>
           </a:xfrm>
           <a:prstGeom prst="rect">
             <a:avLst/>
@@ -6415,76 +6106,76 @@
               <a:buNone/>
             </a:pPr>
             <a:r>
-              <a:rPr lang="en-US" sz="1700" b="1" dirty="0">
-                <a:solidFill>
-                  <a:srgbClr val="1B2B31"/>
-                </a:solidFill>
-                <a:latin typeface="Georgia" pitchFamily="34" charset="0"/>
-                <a:ea typeface="Georgia" pitchFamily="34" charset="-122"/>
-                <a:cs typeface="Georgia" pitchFamily="34" charset="-120"/>
-              </a:rPr>
-              <a:t>Anchor census</a:t>
-            </a:r>
-            <a:endParaRPr lang="en-US" sz="1700" dirty="0"/>
-          </a:p>
-        </p:txBody>
-      </p:sp>
-      <p:sp>
-        <p:nvSpPr>
-          <p:cNvPr id="16" name="Text 14"/>
-          <p:cNvSpPr/>
-          <p:nvPr/>
-        </p:nvSpPr>
-        <p:spPr>
-          <a:xfrm>
-            <a:off x="960120" y="4828032"/>
-            <a:ext cx="4937760" cy="914400"/>
-          </a:xfrm>
-          <a:prstGeom prst="rect">
-            <a:avLst/>
-          </a:prstGeom>
-          <a:noFill/>
-          <a:ln/>
-        </p:spPr>
-        <p:txBody>
-          <a:bodyPr wrap="square" lIns="0" tIns="0" rIns="0" bIns="0" rtlCol="0" anchor="t"/>
-          <a:lstStyle/>
-          <a:p>
-            <a:pPr indent="0" marL="0">
-              <a:lnSpc>
-                <a:spcPts val="1800"/>
-              </a:lnSpc>
-              <a:buNone/>
-            </a:pPr>
-            <a:r>
-              <a:rPr lang="en-US" sz="1300" dirty="0">
-                <a:solidFill>
-                  <a:srgbClr val="45565B"/>
+              <a:rPr lang="en-US" sz="1450" b="1" dirty="0">
+                <a:solidFill>
+                  <a:srgbClr val="1B6E78"/>
                 </a:solidFill>
                 <a:latin typeface="Calibri" pitchFamily="34" charset="0"/>
                 <a:ea typeface="Calibri" pitchFamily="34" charset="-122"/>
                 <a:cs typeface="Calibri" pitchFamily="34" charset="-120"/>
               </a:rPr>
-              <a:t>Classify each nucleus PC / PP / dual / null on the canonical landmarks (GLUL, CYP3A4 vs ASS1, CPS1, PCK1, HAL, ALDOB); sweep thresholds, anchor genes, and programs.</a:t>
-            </a:r>
-            <a:endParaRPr lang="en-US" sz="1300" dirty="0"/>
-          </a:p>
-        </p:txBody>
-      </p:sp>
-      <p:sp>
-        <p:nvSpPr>
-          <p:cNvPr id="17" name="Shape 15"/>
-          <p:cNvSpPr/>
-          <p:nvPr/>
-        </p:nvSpPr>
-        <p:spPr>
-          <a:xfrm>
-            <a:off x="6446520" y="4114800"/>
-            <a:ext cx="5486400" cy="1783080"/>
+              <a:t>No spatial ground truth</a:t>
+            </a:r>
+            <a:endParaRPr lang="en-US" sz="1450" dirty="0"/>
+          </a:p>
+        </p:txBody>
+      </p:sp>
+      <p:sp>
+        <p:nvSpPr>
+          <p:cNvPr id="13" name="Text 11"/>
+          <p:cNvSpPr/>
+          <p:nvPr/>
+        </p:nvSpPr>
+        <p:spPr>
+          <a:xfrm>
+            <a:off x="914400" y="3931920"/>
+            <a:ext cx="4983480" cy="539496"/>
+          </a:xfrm>
+          <a:prstGeom prst="rect">
+            <a:avLst/>
+          </a:prstGeom>
+          <a:noFill/>
+          <a:ln/>
+        </p:spPr>
+        <p:txBody>
+          <a:bodyPr wrap="square" lIns="0" tIns="0" rIns="0" bIns="0" rtlCol="0" anchor="t"/>
+          <a:lstStyle/>
+          <a:p>
+            <a:pPr indent="0" marL="0">
+              <a:lnSpc>
+                <a:spcPts val="1600"/>
+              </a:lnSpc>
+              <a:buNone/>
+            </a:pPr>
+            <a:r>
+              <a:rPr lang="en-US" sz="1250" dirty="0">
+                <a:solidFill>
+                  <a:srgbClr val="45565B"/>
+                </a:solidFill>
+                <a:latin typeface="Calibri" pitchFamily="34" charset="0"/>
+                <a:ea typeface="Calibri" pitchFamily="34" charset="-122"/>
+                <a:cs typeface="Calibri" pitchFamily="34" charset="-120"/>
+              </a:rPr>
+              <a:t>snRNA gives a PC-like program, not lobule position; focal / architectural de-zonation is invisible.</a:t>
+            </a:r>
+            <a:endParaRPr lang="en-US" sz="1250" dirty="0"/>
+          </a:p>
+        </p:txBody>
+      </p:sp>
+      <p:sp>
+        <p:nvSpPr>
+          <p:cNvPr id="14" name="Shape 12"/>
+          <p:cNvSpPr/>
+          <p:nvPr/>
+        </p:nvSpPr>
+        <p:spPr>
+          <a:xfrm>
+            <a:off x="6446520" y="3401568"/>
+            <a:ext cx="5486400" cy="1143000"/>
           </a:xfrm>
           <a:prstGeom prst="roundRect">
             <a:avLst>
-              <a:gd name="adj" fmla="val 3590"/>
+              <a:gd name="adj" fmla="val 4800"/>
             </a:avLst>
           </a:prstGeom>
           <a:solidFill>
@@ -6502,14 +6193,406 @@
       </p:sp>
       <p:sp>
         <p:nvSpPr>
-          <p:cNvPr id="18" name="Shape 16"/>
-          <p:cNvSpPr/>
-          <p:nvPr/>
-        </p:nvSpPr>
-        <p:spPr>
-          <a:xfrm>
-            <a:off x="6446520" y="4114800"/>
-            <a:ext cx="109728" cy="1783080"/>
+          <p:cNvPr id="15" name="Text 13"/>
+          <p:cNvSpPr/>
+          <p:nvPr/>
+        </p:nvSpPr>
+        <p:spPr>
+          <a:xfrm>
+            <a:off x="6720840" y="3547872"/>
+            <a:ext cx="4937760" cy="365760"/>
+          </a:xfrm>
+          <a:prstGeom prst="rect">
+            <a:avLst/>
+          </a:prstGeom>
+          <a:noFill/>
+          <a:ln/>
+        </p:spPr>
+        <p:txBody>
+          <a:bodyPr wrap="square" lIns="0" tIns="0" rIns="0" bIns="0" rtlCol="0" anchor="ctr"/>
+          <a:lstStyle/>
+          <a:p>
+            <a:pPr indent="0" marL="0">
+              <a:buNone/>
+            </a:pPr>
+            <a:r>
+              <a:rPr lang="en-US" sz="1450" b="1" dirty="0">
+                <a:solidFill>
+                  <a:srgbClr val="1B6E78"/>
+                </a:solidFill>
+                <a:latin typeface="Calibri" pitchFamily="34" charset="0"/>
+                <a:ea typeface="Calibri" pitchFamily="34" charset="-122"/>
+                <a:cs typeface="Calibri" pitchFamily="34" charset="-120"/>
+              </a:rPr>
+              <a:t>Markers</a:t>
+            </a:r>
+            <a:endParaRPr lang="en-US" sz="1450" dirty="0"/>
+          </a:p>
+        </p:txBody>
+      </p:sp>
+      <p:sp>
+        <p:nvSpPr>
+          <p:cNvPr id="16" name="Text 14"/>
+          <p:cNvSpPr/>
+          <p:nvPr/>
+        </p:nvSpPr>
+        <p:spPr>
+          <a:xfrm>
+            <a:off x="6720840" y="3931920"/>
+            <a:ext cx="4983480" cy="539496"/>
+          </a:xfrm>
+          <a:prstGeom prst="rect">
+            <a:avLst/>
+          </a:prstGeom>
+          <a:noFill/>
+          <a:ln/>
+        </p:spPr>
+        <p:txBody>
+          <a:bodyPr wrap="square" lIns="0" tIns="0" rIns="0" bIns="0" rtlCol="0" anchor="t"/>
+          <a:lstStyle/>
+          <a:p>
+            <a:pPr indent="0" marL="0">
+              <a:lnSpc>
+                <a:spcPts val="1600"/>
+              </a:lnSpc>
+              <a:buNone/>
+            </a:pPr>
+            <a:r>
+              <a:rPr lang="en-US" sz="1250" dirty="0">
+                <a:solidFill>
+                  <a:srgbClr val="45565B"/>
+                </a:solidFill>
+                <a:latin typeface="Calibri" pitchFamily="34" charset="0"/>
+                <a:ea typeface="Calibri" pitchFamily="34" charset="-122"/>
+                <a:cs typeface="Calibri" pitchFamily="34" charset="-120"/>
+              </a:rPr>
+              <a:t>GLUL is dropout-prone; CYP3A4 covaries with detox — so no independent “identity preserved” claim.</a:t>
+            </a:r>
+            <a:endParaRPr lang="en-US" sz="1250" dirty="0"/>
+          </a:p>
+        </p:txBody>
+      </p:sp>
+      <p:sp>
+        <p:nvSpPr>
+          <p:cNvPr id="17" name="Shape 15"/>
+          <p:cNvSpPr/>
+          <p:nvPr/>
+        </p:nvSpPr>
+        <p:spPr>
+          <a:xfrm>
+            <a:off x="640080" y="4745736"/>
+            <a:ext cx="5486400" cy="1143000"/>
+          </a:xfrm>
+          <a:prstGeom prst="roundRect">
+            <a:avLst>
+              <a:gd name="adj" fmla="val 4800"/>
+            </a:avLst>
+          </a:prstGeom>
+          <a:solidFill>
+            <a:srgbClr val="FFFFFF"/>
+          </a:solidFill>
+          <a:ln/>
+          <a:effectLst>
+            <a:outerShdw sx="100000" sy="100000" kx="0" ky="0" algn="bl" rotWithShape="0" blurRad="88900" dist="38100" dir="8100000">
+              <a:srgbClr val="000000">
+                <a:alpha val="13000"/>
+              </a:srgbClr>
+            </a:outerShdw>
+          </a:effectLst>
+        </p:spPr>
+      </p:sp>
+      <p:sp>
+        <p:nvSpPr>
+          <p:cNvPr id="18" name="Text 16"/>
+          <p:cNvSpPr/>
+          <p:nvPr/>
+        </p:nvSpPr>
+        <p:spPr>
+          <a:xfrm>
+            <a:off x="914400" y="4892040"/>
+            <a:ext cx="4937760" cy="365760"/>
+          </a:xfrm>
+          <a:prstGeom prst="rect">
+            <a:avLst/>
+          </a:prstGeom>
+          <a:noFill/>
+          <a:ln/>
+        </p:spPr>
+        <p:txBody>
+          <a:bodyPr wrap="square" lIns="0" tIns="0" rIns="0" bIns="0" rtlCol="0" anchor="ctr"/>
+          <a:lstStyle/>
+          <a:p>
+            <a:pPr indent="0" marL="0">
+              <a:buNone/>
+            </a:pPr>
+            <a:r>
+              <a:rPr lang="en-US" sz="1450" b="1" dirty="0">
+                <a:solidFill>
+                  <a:srgbClr val="1B6E78"/>
+                </a:solidFill>
+                <a:latin typeface="Calibri" pitchFamily="34" charset="0"/>
+                <a:ea typeface="Calibri" pitchFamily="34" charset="-122"/>
+                <a:cs typeface="Calibri" pitchFamily="34" charset="-120"/>
+              </a:rPr>
+              <a:t>No clinical covariates</a:t>
+            </a:r>
+            <a:endParaRPr lang="en-US" sz="1450" dirty="0"/>
+          </a:p>
+        </p:txBody>
+      </p:sp>
+      <p:sp>
+        <p:nvSpPr>
+          <p:cNvPr id="19" name="Text 17"/>
+          <p:cNvSpPr/>
+          <p:nvPr/>
+        </p:nvSpPr>
+        <p:spPr>
+          <a:xfrm>
+            <a:off x="914400" y="5276088"/>
+            <a:ext cx="4983480" cy="539496"/>
+          </a:xfrm>
+          <a:prstGeom prst="rect">
+            <a:avLst/>
+          </a:prstGeom>
+          <a:noFill/>
+          <a:ln/>
+        </p:spPr>
+        <p:txBody>
+          <a:bodyPr wrap="square" lIns="0" tIns="0" rIns="0" bIns="0" rtlCol="0" anchor="t"/>
+          <a:lstStyle/>
+          <a:p>
+            <a:pPr indent="0" marL="0">
+              <a:lnSpc>
+                <a:spcPts val="1600"/>
+              </a:lnSpc>
+              <a:buNone/>
+            </a:pPr>
+            <a:r>
+              <a:rPr lang="en-US" sz="1250" dirty="0">
+                <a:solidFill>
+                  <a:srgbClr val="45565B"/>
+                </a:solidFill>
+                <a:latin typeface="Calibri" pitchFamily="34" charset="0"/>
+                <a:ea typeface="Calibri" pitchFamily="34" charset="-122"/>
+                <a:cs typeface="Calibri" pitchFamily="34" charset="-120"/>
+              </a:rPr>
+              <a:t>No etiology / alcohol / medication / fasting — fatal for any disease-specific gene claim.</a:t>
+            </a:r>
+            <a:endParaRPr lang="en-US" sz="1250" dirty="0"/>
+          </a:p>
+        </p:txBody>
+      </p:sp>
+      <p:sp>
+        <p:nvSpPr>
+          <p:cNvPr id="20" name="Shape 18"/>
+          <p:cNvSpPr/>
+          <p:nvPr/>
+        </p:nvSpPr>
+        <p:spPr>
+          <a:xfrm>
+            <a:off x="6446520" y="4745736"/>
+            <a:ext cx="5486400" cy="1143000"/>
+          </a:xfrm>
+          <a:prstGeom prst="roundRect">
+            <a:avLst>
+              <a:gd name="adj" fmla="val 4800"/>
+            </a:avLst>
+          </a:prstGeom>
+          <a:solidFill>
+            <a:srgbClr val="FFFFFF"/>
+          </a:solidFill>
+          <a:ln/>
+          <a:effectLst>
+            <a:outerShdw sx="100000" sy="100000" kx="0" ky="0" algn="bl" rotWithShape="0" blurRad="88900" dist="38100" dir="8100000">
+              <a:srgbClr val="000000">
+                <a:alpha val="13000"/>
+              </a:srgbClr>
+            </a:outerShdw>
+          </a:effectLst>
+        </p:spPr>
+      </p:sp>
+      <p:sp>
+        <p:nvSpPr>
+          <p:cNvPr id="21" name="Text 19"/>
+          <p:cNvSpPr/>
+          <p:nvPr/>
+        </p:nvSpPr>
+        <p:spPr>
+          <a:xfrm>
+            <a:off x="6720840" y="4892040"/>
+            <a:ext cx="4937760" cy="365760"/>
+          </a:xfrm>
+          <a:prstGeom prst="rect">
+            <a:avLst/>
+          </a:prstGeom>
+          <a:noFill/>
+          <a:ln/>
+        </p:spPr>
+        <p:txBody>
+          <a:bodyPr wrap="square" lIns="0" tIns="0" rIns="0" bIns="0" rtlCol="0" anchor="ctr"/>
+          <a:lstStyle/>
+          <a:p>
+            <a:pPr indent="0" marL="0">
+              <a:buNone/>
+            </a:pPr>
+            <a:r>
+              <a:rPr lang="en-US" sz="1450" b="1" dirty="0">
+                <a:solidFill>
+                  <a:srgbClr val="1B6E78"/>
+                </a:solidFill>
+                <a:latin typeface="Calibri" pitchFamily="34" charset="0"/>
+                <a:ea typeface="Calibri" pitchFamily="34" charset="-122"/>
+                <a:cs typeface="Calibri" pitchFamily="34" charset="-120"/>
+              </a:rPr>
+              <a:t>Single cohort</a:t>
+            </a:r>
+            <a:endParaRPr lang="en-US" sz="1450" dirty="0"/>
+          </a:p>
+        </p:txBody>
+      </p:sp>
+      <p:sp>
+        <p:nvSpPr>
+          <p:cNvPr id="22" name="Text 20"/>
+          <p:cNvSpPr/>
+          <p:nvPr/>
+        </p:nvSpPr>
+        <p:spPr>
+          <a:xfrm>
+            <a:off x="6720840" y="5276088"/>
+            <a:ext cx="4983480" cy="539496"/>
+          </a:xfrm>
+          <a:prstGeom prst="rect">
+            <a:avLst/>
+          </a:prstGeom>
+          <a:noFill/>
+          <a:ln/>
+        </p:spPr>
+        <p:txBody>
+          <a:bodyPr wrap="square" lIns="0" tIns="0" rIns="0" bIns="0" rtlCol="0" anchor="t"/>
+          <a:lstStyle/>
+          <a:p>
+            <a:pPr indent="0" marL="0">
+              <a:lnSpc>
+                <a:spcPts val="1600"/>
+              </a:lnSpc>
+              <a:buNone/>
+            </a:pPr>
+            <a:r>
+              <a:rPr lang="en-US" sz="1250" dirty="0">
+                <a:solidFill>
+                  <a:srgbClr val="45565B"/>
+                </a:solidFill>
+                <a:latin typeface="Calibri" pitchFamily="34" charset="0"/>
+                <a:ea typeface="Calibri" pitchFamily="34" charset="-122"/>
+                <a:cs typeface="Calibri" pitchFamily="34" charset="-120"/>
+              </a:rPr>
+              <a:t>No independent biopsy series or protein validation.</a:t>
+            </a:r>
+            <a:endParaRPr lang="en-US" sz="1250" dirty="0"/>
+          </a:p>
+        </p:txBody>
+      </p:sp>
+      <p:sp>
+        <p:nvSpPr>
+          <p:cNvPr id="23" name="Text 21"/>
+          <p:cNvSpPr/>
+          <p:nvPr/>
+        </p:nvSpPr>
+        <p:spPr>
+          <a:xfrm>
+            <a:off x="11612880" y="6355080"/>
+            <a:ext cx="457200" cy="320040"/>
+          </a:xfrm>
+          <a:prstGeom prst="rect">
+            <a:avLst/>
+          </a:prstGeom>
+          <a:noFill/>
+          <a:ln/>
+        </p:spPr>
+        <p:txBody>
+          <a:bodyPr wrap="square" rtlCol="0" anchor="ctr"/>
+          <a:lstStyle/>
+          <a:p>
+            <a:pPr algn="r" indent="0" marL="0">
+              <a:buNone/>
+            </a:pPr>
+            <a:r>
+              <a:rPr lang="en-US" sz="1000" dirty="0">
+                <a:solidFill>
+                  <a:srgbClr val="5C6E73"/>
+                </a:solidFill>
+                <a:latin typeface="Calibri" pitchFamily="34" charset="0"/>
+                <a:ea typeface="Calibri" pitchFamily="34" charset="-122"/>
+                <a:cs typeface="Calibri" pitchFamily="34" charset="-120"/>
+              </a:rPr>
+              <a:t>15</a:t>
+            </a:r>
+            <a:endParaRPr lang="en-US" sz="1000" dirty="0"/>
+          </a:p>
+        </p:txBody>
+      </p:sp>
+    </p:spTree>
+  </p:cSld>
+  <p:clrMapOvr>
+    <a:masterClrMapping/>
+  </p:clrMapOvr>
+</p:sld>
+</file>
+
+<file path=ppt/slides/slide16.xml><?xml version="1.0" encoding="utf-8"?>
+<p:sld xmlns:a="http://schemas.openxmlformats.org/drawingml/2006/main" xmlns:r="http://schemas.openxmlformats.org/officeDocument/2006/relationships" xmlns:p="http://schemas.openxmlformats.org/presentationml/2006/main">
+  <p:cSld name="Slide 16">
+    <p:bg>
+      <p:bgPr>
+        <a:solidFill>
+          <a:srgbClr val="16242B"/>
+        </a:solidFill>
+      </p:bgPr>
+    </p:bg>
+    <p:spTree>
+      <p:nvGrpSpPr>
+        <p:cNvPr id="1" name=""/>
+        <p:cNvGrpSpPr/>
+        <p:nvPr/>
+      </p:nvGrpSpPr>
+      <p:grpSpPr>
+        <a:xfrm>
+          <a:off x="0" y="0"/>
+          <a:ext cx="0" cy="0"/>
+          <a:chOff x="0" y="0"/>
+          <a:chExt cx="0" cy="0"/>
+        </a:xfrm>
+      </p:grpSpPr>
+      <p:sp>
+        <p:nvSpPr>
+          <p:cNvPr id="2" name="Shape 0"/>
+          <p:cNvSpPr/>
+          <p:nvPr/>
+        </p:nvSpPr>
+        <p:spPr>
+          <a:xfrm>
+            <a:off x="0" y="0"/>
+            <a:ext cx="256032" cy="6858000"/>
+          </a:xfrm>
+          <a:prstGeom prst="rect">
+            <a:avLst/>
+          </a:prstGeom>
+          <a:solidFill>
+            <a:srgbClr val="1B6E78"/>
+          </a:solidFill>
+          <a:ln/>
+        </p:spPr>
+      </p:sp>
+      <p:sp>
+        <p:nvSpPr>
+          <p:cNvPr id="3" name="Shape 1"/>
+          <p:cNvSpPr/>
+          <p:nvPr/>
+        </p:nvSpPr>
+        <p:spPr>
+          <a:xfrm>
+            <a:off x="256032" y="0"/>
+            <a:ext cx="109728" cy="6858000"/>
           </a:xfrm>
           <a:prstGeom prst="rect">
             <a:avLst/>
@@ -6522,14 +6605,14 @@
       </p:sp>
       <p:sp>
         <p:nvSpPr>
-          <p:cNvPr id="19" name="Text 17"/>
-          <p:cNvSpPr/>
-          <p:nvPr/>
-        </p:nvSpPr>
-        <p:spPr>
-          <a:xfrm>
-            <a:off x="6766560" y="4315968"/>
-            <a:ext cx="4937760" cy="457200"/>
+          <p:cNvPr id="4" name="Text 2"/>
+          <p:cNvSpPr/>
+          <p:nvPr/>
+        </p:nvSpPr>
+        <p:spPr>
+          <a:xfrm>
+            <a:off x="914400" y="731520"/>
+            <a:ext cx="10058400" cy="365760"/>
           </a:xfrm>
           <a:prstGeom prst="rect">
             <a:avLst/>
@@ -6545,15 +6628,489 @@
               <a:buNone/>
             </a:pPr>
             <a:r>
-              <a:rPr lang="en-US" sz="1700" b="1" dirty="0">
-                <a:solidFill>
-                  <a:srgbClr val="1B2B31"/>
+              <a:rPr lang="en-US" sz="1400" b="1" spc="300" kern="0" dirty="0">
+                <a:solidFill>
+                  <a:srgbClr val="9FC0C4"/>
+                </a:solidFill>
+                <a:latin typeface="Calibri" pitchFamily="34" charset="0"/>
+                <a:ea typeface="Calibri" pitchFamily="34" charset="-122"/>
+                <a:cs typeface="Calibri" pitchFamily="34" charset="-120"/>
+              </a:rPr>
+              <a:t>CONCLUSION</a:t>
+            </a:r>
+            <a:endParaRPr lang="en-US" sz="1400" dirty="0"/>
+          </a:p>
+        </p:txBody>
+      </p:sp>
+      <p:sp>
+        <p:nvSpPr>
+          <p:cNvPr id="5" name="Text 3"/>
+          <p:cNvSpPr/>
+          <p:nvPr/>
+        </p:nvSpPr>
+        <p:spPr>
+          <a:xfrm>
+            <a:off x="914400" y="1280160"/>
+            <a:ext cx="10424160" cy="2194560"/>
+          </a:xfrm>
+          <a:prstGeom prst="rect">
+            <a:avLst/>
+          </a:prstGeom>
+          <a:noFill/>
+          <a:ln/>
+        </p:spPr>
+        <p:txBody>
+          <a:bodyPr wrap="square" lIns="0" tIns="0" rIns="0" bIns="0" rtlCol="0" anchor="ctr"/>
+          <a:lstStyle/>
+          <a:p>
+            <a:pPr indent="0" marL="0">
+              <a:lnSpc>
+                <a:spcPts val="3200"/>
+              </a:lnSpc>
+              <a:buNone/>
+            </a:pPr>
+            <a:r>
+              <a:rPr lang="en-US" sz="2300" dirty="0">
+                <a:solidFill>
+                  <a:srgbClr val="FFFFFF"/>
                 </a:solidFill>
                 <a:latin typeface="Georgia" pitchFamily="34" charset="0"/>
                 <a:ea typeface="Georgia" pitchFamily="34" charset="-122"/>
                 <a:cs typeface="Georgia" pitchFamily="34" charset="-120"/>
               </a:rPr>
-              <a:t>Donor-level inference</a:t>
+              <a:t>Across acquisition-matched biopsy MASLD, raw-count donor-level snRNA shows </a:t>
+            </a:r>
+            <a:pPr indent="0" marL="0">
+              <a:lnSpc>
+                <a:spcPts val="3200"/>
+              </a:lnSpc>
+              <a:buNone/>
+            </a:pPr>
+            <a:r>
+              <a:rPr lang="en-US" sz="2300" b="1" dirty="0">
+                <a:solidFill>
+                  <a:srgbClr val="1B6E78"/>
+                </a:solidFill>
+                <a:latin typeface="Georgia" pitchFamily="34" charset="0"/>
+                <a:ea typeface="Georgia" pitchFamily="34" charset="-122"/>
+                <a:cs typeface="Georgia" pitchFamily="34" charset="-120"/>
+              </a:rPr>
+              <a:t>no detectable marker-count de-zonation</a:t>
+            </a:r>
+            <a:pPr indent="0" marL="0">
+              <a:lnSpc>
+                <a:spcPts val="3200"/>
+              </a:lnSpc>
+              <a:buNone/>
+            </a:pPr>
+            <a:r>
+              <a:rPr lang="en-US" sz="2300" dirty="0">
+                <a:solidFill>
+                  <a:srgbClr val="FFFFFF"/>
+                </a:solidFill>
+                <a:latin typeface="Georgia" pitchFamily="34" charset="0"/>
+                <a:ea typeface="Georgia" pitchFamily="34" charset="-122"/>
+                <a:cs typeface="Georgia" pitchFamily="34" charset="-120"/>
+              </a:rPr>
+              <a:t> — excluding near-total collapse, but underpowered for moderate/focal change. The end-stage signal is confined to heterogeneous explants and is </a:t>
+            </a:r>
+            <a:pPr indent="0" marL="0">
+              <a:lnSpc>
+                <a:spcPts val="3200"/>
+              </a:lnSpc>
+              <a:buNone/>
+            </a:pPr>
+            <a:r>
+              <a:rPr lang="en-US" sz="2300" b="1" dirty="0">
+                <a:solidFill>
+                  <a:srgbClr val="C0561B"/>
+                </a:solidFill>
+                <a:latin typeface="Georgia" pitchFamily="34" charset="0"/>
+                <a:ea typeface="Georgia" pitchFamily="34" charset="-122"/>
+                <a:cs typeface="Georgia" pitchFamily="34" charset="-120"/>
+              </a:rPr>
+              <a:t>inseparable from organ-wide procurement stress</a:t>
+            </a:r>
+            <a:pPr indent="0" marL="0">
+              <a:lnSpc>
+                <a:spcPts val="3200"/>
+              </a:lnSpc>
+              <a:buNone/>
+            </a:pPr>
+            <a:r>
+              <a:rPr lang="en-US" sz="2300" dirty="0">
+                <a:solidFill>
+                  <a:srgbClr val="FFFFFF"/>
+                </a:solidFill>
+                <a:latin typeface="Georgia" pitchFamily="34" charset="0"/>
+                <a:ea typeface="Georgia" pitchFamily="34" charset="-122"/>
+                <a:cs typeface="Georgia" pitchFamily="34" charset="-120"/>
+              </a:rPr>
+              <a:t> — not identifiable as progressive disease.</a:t>
+            </a:r>
+            <a:endParaRPr lang="en-US" sz="2300" dirty="0"/>
+          </a:p>
+        </p:txBody>
+      </p:sp>
+      <p:sp>
+        <p:nvSpPr>
+          <p:cNvPr id="6" name="Shape 4"/>
+          <p:cNvSpPr/>
+          <p:nvPr/>
+        </p:nvSpPr>
+        <p:spPr>
+          <a:xfrm>
+            <a:off x="914400" y="3611880"/>
+            <a:ext cx="10332720" cy="0"/>
+          </a:xfrm>
+          <a:prstGeom prst="line">
+            <a:avLst/>
+          </a:prstGeom>
+          <a:noFill/>
+          <a:ln w="19050">
+            <a:solidFill>
+              <a:srgbClr val="35515A"/>
+            </a:solidFill>
+            <a:prstDash val="solid"/>
+          </a:ln>
+        </p:spPr>
+      </p:sp>
+      <p:sp>
+        <p:nvSpPr>
+          <p:cNvPr id="7" name="Text 5"/>
+          <p:cNvSpPr/>
+          <p:nvPr/>
+        </p:nvSpPr>
+        <p:spPr>
+          <a:xfrm>
+            <a:off x="914400" y="3840480"/>
+            <a:ext cx="10058400" cy="365760"/>
+          </a:xfrm>
+          <a:prstGeom prst="rect">
+            <a:avLst/>
+          </a:prstGeom>
+          <a:noFill/>
+          <a:ln/>
+        </p:spPr>
+        <p:txBody>
+          <a:bodyPr wrap="square" lIns="0" tIns="0" rIns="0" bIns="0" rtlCol="0" anchor="ctr"/>
+          <a:lstStyle/>
+          <a:p>
+            <a:pPr indent="0" marL="0">
+              <a:buNone/>
+            </a:pPr>
+            <a:r>
+              <a:rPr lang="en-US" sz="1400" b="1" spc="200" kern="0" dirty="0">
+                <a:solidFill>
+                  <a:srgbClr val="C0561B"/>
+                </a:solidFill>
+                <a:latin typeface="Calibri" pitchFamily="34" charset="0"/>
+                <a:ea typeface="Calibri" pitchFamily="34" charset="-122"/>
+                <a:cs typeface="Calibri" pitchFamily="34" charset="-120"/>
+              </a:rPr>
+              <a:t>The transferable lesson</a:t>
+            </a:r>
+            <a:endParaRPr lang="en-US" sz="1400" dirty="0"/>
+          </a:p>
+        </p:txBody>
+      </p:sp>
+      <p:sp>
+        <p:nvSpPr>
+          <p:cNvPr id="8" name="Text 6"/>
+          <p:cNvSpPr/>
+          <p:nvPr/>
+        </p:nvSpPr>
+        <p:spPr>
+          <a:xfrm>
+            <a:off x="914400" y="4251960"/>
+            <a:ext cx="10332720" cy="1463040"/>
+          </a:xfrm>
+          <a:prstGeom prst="rect">
+            <a:avLst/>
+          </a:prstGeom>
+          <a:noFill/>
+          <a:ln/>
+        </p:spPr>
+        <p:txBody>
+          <a:bodyPr wrap="square" lIns="0" tIns="0" rIns="0" bIns="0" rtlCol="0" anchor="ctr"/>
+          <a:lstStyle/>
+          <a:p>
+            <a:pPr indent="0" marL="0">
+              <a:lnSpc>
+                <a:spcPts val="2400"/>
+              </a:lnSpc>
+              <a:buNone/>
+            </a:pPr>
+            <a:r>
+              <a:rPr lang="en-US" sz="1650" i="1" dirty="0">
+                <a:solidFill>
+                  <a:srgbClr val="D7E6E8"/>
+                </a:solidFill>
+                <a:latin typeface="Calibri" pitchFamily="34" charset="0"/>
+                <a:ea typeface="Calibri" pitchFamily="34" charset="-122"/>
+                <a:cs typeface="Calibri" pitchFamily="34" charset="-120"/>
+              </a:rPr>
+              <a:t>Relative summary statistics — marker correlations, spreads, z-scores — on cohorts where disease stage tracks tissue acquisition can manufacture biology. Count-based, depth-matched, donor-level analysis with an explicit confound audit is the more conservative standard.</a:t>
+            </a:r>
+            <a:endParaRPr lang="en-US" sz="1650" dirty="0"/>
+          </a:p>
+        </p:txBody>
+      </p:sp>
+      <p:sp>
+        <p:nvSpPr>
+          <p:cNvPr id="9" name="Text 7"/>
+          <p:cNvSpPr/>
+          <p:nvPr/>
+        </p:nvSpPr>
+        <p:spPr>
+          <a:xfrm>
+            <a:off x="11612880" y="6355080"/>
+            <a:ext cx="457200" cy="320040"/>
+          </a:xfrm>
+          <a:prstGeom prst="rect">
+            <a:avLst/>
+          </a:prstGeom>
+          <a:noFill/>
+          <a:ln/>
+        </p:spPr>
+        <p:txBody>
+          <a:bodyPr wrap="square" rtlCol="0" anchor="ctr"/>
+          <a:lstStyle/>
+          <a:p>
+            <a:pPr algn="r" indent="0" marL="0">
+              <a:buNone/>
+            </a:pPr>
+            <a:r>
+              <a:rPr lang="en-US" sz="1000" dirty="0">
+                <a:solidFill>
+                  <a:srgbClr val="5C6E73"/>
+                </a:solidFill>
+                <a:latin typeface="Calibri" pitchFamily="34" charset="0"/>
+                <a:ea typeface="Calibri" pitchFamily="34" charset="-122"/>
+                <a:cs typeface="Calibri" pitchFamily="34" charset="-120"/>
+              </a:rPr>
+              <a:t>16</a:t>
+            </a:r>
+            <a:endParaRPr lang="en-US" sz="1000" dirty="0"/>
+          </a:p>
+        </p:txBody>
+      </p:sp>
+    </p:spTree>
+  </p:cSld>
+  <p:clrMapOvr>
+    <a:masterClrMapping/>
+  </p:clrMapOvr>
+</p:sld>
+</file>
+
+<file path=ppt/slides/slide17.xml><?xml version="1.0" encoding="utf-8"?>
+<p:sld xmlns:a="http://schemas.openxmlformats.org/drawingml/2006/main" xmlns:r="http://schemas.openxmlformats.org/officeDocument/2006/relationships" xmlns:p="http://schemas.openxmlformats.org/presentationml/2006/main">
+  <p:cSld name="Slide 17">
+    <p:bg>
+      <p:bgPr>
+        <a:solidFill>
+          <a:srgbClr val="F7F5F1"/>
+        </a:solidFill>
+      </p:bgPr>
+    </p:bg>
+    <p:spTree>
+      <p:nvGrpSpPr>
+        <p:cNvPr id="1" name=""/>
+        <p:cNvGrpSpPr/>
+        <p:nvPr/>
+      </p:nvGrpSpPr>
+      <p:grpSpPr>
+        <a:xfrm>
+          <a:off x="0" y="0"/>
+          <a:ext cx="0" cy="0"/>
+          <a:chOff x="0" y="0"/>
+          <a:chExt cx="0" cy="0"/>
+        </a:xfrm>
+      </p:grpSpPr>
+      <p:sp>
+        <p:nvSpPr>
+          <p:cNvPr id="2" name="Shape 0"/>
+          <p:cNvSpPr/>
+          <p:nvPr/>
+        </p:nvSpPr>
+        <p:spPr>
+          <a:xfrm>
+            <a:off x="640080" y="502920"/>
+            <a:ext cx="164592" cy="310896"/>
+          </a:xfrm>
+          <a:prstGeom prst="rect">
+            <a:avLst/>
+          </a:prstGeom>
+          <a:solidFill>
+            <a:srgbClr val="1B6E78"/>
+          </a:solidFill>
+          <a:ln/>
+        </p:spPr>
+      </p:sp>
+      <p:sp>
+        <p:nvSpPr>
+          <p:cNvPr id="3" name="Text 1"/>
+          <p:cNvSpPr/>
+          <p:nvPr/>
+        </p:nvSpPr>
+        <p:spPr>
+          <a:xfrm>
+            <a:off x="896112" y="502920"/>
+            <a:ext cx="8229600" cy="310896"/>
+          </a:xfrm>
+          <a:prstGeom prst="rect">
+            <a:avLst/>
+          </a:prstGeom>
+          <a:noFill/>
+          <a:ln/>
+        </p:spPr>
+        <p:txBody>
+          <a:bodyPr wrap="square" lIns="0" tIns="0" rIns="0" bIns="0" rtlCol="0" anchor="ctr"/>
+          <a:lstStyle/>
+          <a:p>
+            <a:pPr indent="0" marL="0">
+              <a:buNone/>
+            </a:pPr>
+            <a:r>
+              <a:rPr lang="en-US" sz="1200" b="1" spc="300" kern="0" dirty="0">
+                <a:solidFill>
+                  <a:srgbClr val="1B6E78"/>
+                </a:solidFill>
+                <a:latin typeface="Calibri" pitchFamily="34" charset="0"/>
+                <a:ea typeface="Calibri" pitchFamily="34" charset="-122"/>
+                <a:cs typeface="Calibri" pitchFamily="34" charset="-120"/>
+              </a:rPr>
+              <a:t>APPENDIX · METHODS</a:t>
+            </a:r>
+            <a:endParaRPr lang="en-US" sz="1200" dirty="0"/>
+          </a:p>
+        </p:txBody>
+      </p:sp>
+      <p:sp>
+        <p:nvSpPr>
+          <p:cNvPr id="4" name="Text 2"/>
+          <p:cNvSpPr/>
+          <p:nvPr/>
+        </p:nvSpPr>
+        <p:spPr>
+          <a:xfrm>
+            <a:off x="640080" y="868680"/>
+            <a:ext cx="10881360" cy="914400"/>
+          </a:xfrm>
+          <a:prstGeom prst="rect">
+            <a:avLst/>
+          </a:prstGeom>
+          <a:noFill/>
+          <a:ln/>
+        </p:spPr>
+        <p:txBody>
+          <a:bodyPr wrap="square" lIns="0" tIns="0" rIns="0" bIns="0" rtlCol="0" anchor="ctr"/>
+          <a:lstStyle/>
+          <a:p>
+            <a:pPr indent="0" marL="0">
+              <a:lnSpc>
+                <a:spcPts val="3400"/>
+              </a:lnSpc>
+              <a:buNone/>
+            </a:pPr>
+            <a:r>
+              <a:rPr lang="en-US" sz="3000" b="1" dirty="0">
+                <a:solidFill>
+                  <a:srgbClr val="1B2B31"/>
+                </a:solidFill>
+                <a:latin typeface="Georgia" pitchFamily="34" charset="0"/>
+                <a:ea typeface="Georgia" pitchFamily="34" charset="-122"/>
+                <a:cs typeface="Georgia" pitchFamily="34" charset="-120"/>
+              </a:rPr>
+              <a:t>Methods, in brief</a:t>
+            </a:r>
+            <a:endParaRPr lang="en-US" sz="3000" dirty="0"/>
+          </a:p>
+        </p:txBody>
+      </p:sp>
+      <p:sp>
+        <p:nvSpPr>
+          <p:cNvPr id="5" name="Shape 3"/>
+          <p:cNvSpPr/>
+          <p:nvPr/>
+        </p:nvSpPr>
+        <p:spPr>
+          <a:xfrm>
+            <a:off x="640080" y="2057400"/>
+            <a:ext cx="5486400" cy="1783080"/>
+          </a:xfrm>
+          <a:prstGeom prst="roundRect">
+            <a:avLst>
+              <a:gd name="adj" fmla="val 3590"/>
+            </a:avLst>
+          </a:prstGeom>
+          <a:solidFill>
+            <a:srgbClr val="FFFFFF"/>
+          </a:solidFill>
+          <a:ln/>
+          <a:effectLst>
+            <a:outerShdw sx="100000" sy="100000" kx="0" ky="0" algn="bl" rotWithShape="0" blurRad="88900" dist="38100" dir="8100000">
+              <a:srgbClr val="000000">
+                <a:alpha val="13000"/>
+              </a:srgbClr>
+            </a:outerShdw>
+          </a:effectLst>
+        </p:spPr>
+      </p:sp>
+      <p:sp>
+        <p:nvSpPr>
+          <p:cNvPr id="6" name="Shape 4"/>
+          <p:cNvSpPr/>
+          <p:nvPr/>
+        </p:nvSpPr>
+        <p:spPr>
+          <a:xfrm>
+            <a:off x="640080" y="2057400"/>
+            <a:ext cx="109728" cy="1783080"/>
+          </a:xfrm>
+          <a:prstGeom prst="rect">
+            <a:avLst/>
+          </a:prstGeom>
+          <a:solidFill>
+            <a:srgbClr val="1B6E78"/>
+          </a:solidFill>
+          <a:ln/>
+        </p:spPr>
+      </p:sp>
+      <p:sp>
+        <p:nvSpPr>
+          <p:cNvPr id="7" name="Text 5"/>
+          <p:cNvSpPr/>
+          <p:nvPr/>
+        </p:nvSpPr>
+        <p:spPr>
+          <a:xfrm>
+            <a:off x="960120" y="2258568"/>
+            <a:ext cx="4937760" cy="457200"/>
+          </a:xfrm>
+          <a:prstGeom prst="rect">
+            <a:avLst/>
+          </a:prstGeom>
+          <a:noFill/>
+          <a:ln/>
+        </p:spPr>
+        <p:txBody>
+          <a:bodyPr wrap="square" lIns="0" tIns="0" rIns="0" bIns="0" rtlCol="0" anchor="ctr"/>
+          <a:lstStyle/>
+          <a:p>
+            <a:pPr indent="0" marL="0">
+              <a:buNone/>
+            </a:pPr>
+            <a:r>
+              <a:rPr lang="en-US" sz="1700" b="1" dirty="0">
+                <a:solidFill>
+                  <a:srgbClr val="1B2B31"/>
+                </a:solidFill>
+                <a:latin typeface="Georgia" pitchFamily="34" charset="0"/>
+                <a:ea typeface="Georgia" pitchFamily="34" charset="-122"/>
+                <a:cs typeface="Georgia" pitchFamily="34" charset="-120"/>
+              </a:rPr>
+              <a:t>Raw molecule counts</a:t>
             </a:r>
             <a:endParaRPr lang="en-US" sz="1700" dirty="0"/>
           </a:p>
@@ -6561,13 +7118,13 @@
       </p:sp>
       <p:sp>
         <p:nvSpPr>
-          <p:cNvPr id="20" name="Text 18"/>
-          <p:cNvSpPr/>
-          <p:nvPr/>
-        </p:nvSpPr>
-        <p:spPr>
-          <a:xfrm>
-            <a:off x="6766560" y="4828032"/>
+          <p:cNvPr id="8" name="Text 6"/>
+          <p:cNvSpPr/>
+          <p:nvPr/>
+        </p:nvSpPr>
+        <p:spPr>
+          <a:xfrm>
+            <a:off x="960120" y="2770632"/>
             <a:ext cx="4937760" cy="914400"/>
           </a:xfrm>
           <a:prstGeom prst="rect">
@@ -6595,7 +7152,7 @@
                 <a:ea typeface="Calibri" pitchFamily="34" charset="-122"/>
                 <a:cs typeface="Calibri" pitchFamily="34" charset="-120"/>
               </a:rPr>
-              <a:t>Donor is the unit (~47): per-donor medians + ranges by stage. Two axes — fibrosis F0–F4 and NAS. Minimum detectable effect estimated at donor level.</a:t>
+              <a:t>Extracted the RNA-assay counts from the Seurat object — the shipped matrix is an SCT model output, not molecules. 45-gene panel + full library size per nucleus.</a:t>
             </a:r>
             <a:endParaRPr lang="en-US" sz="1300" dirty="0"/>
           </a:p>
@@ -6603,14 +7160,63 @@
       </p:sp>
       <p:sp>
         <p:nvSpPr>
-          <p:cNvPr id="21" name="Text 19"/>
-          <p:cNvSpPr/>
-          <p:nvPr/>
-        </p:nvSpPr>
-        <p:spPr>
-          <a:xfrm>
-            <a:off x="640080" y="5897880"/>
-            <a:ext cx="10881360" cy="365760"/>
+          <p:cNvPr id="9" name="Shape 7"/>
+          <p:cNvSpPr/>
+          <p:nvPr/>
+        </p:nvSpPr>
+        <p:spPr>
+          <a:xfrm>
+            <a:off x="6446520" y="2057400"/>
+            <a:ext cx="5486400" cy="1783080"/>
+          </a:xfrm>
+          <a:prstGeom prst="roundRect">
+            <a:avLst>
+              <a:gd name="adj" fmla="val 3590"/>
+            </a:avLst>
+          </a:prstGeom>
+          <a:solidFill>
+            <a:srgbClr val="FFFFFF"/>
+          </a:solidFill>
+          <a:ln/>
+          <a:effectLst>
+            <a:outerShdw sx="100000" sy="100000" kx="0" ky="0" algn="bl" rotWithShape="0" blurRad="88900" dist="38100" dir="8100000">
+              <a:srgbClr val="000000">
+                <a:alpha val="13000"/>
+              </a:srgbClr>
+            </a:outerShdw>
+          </a:effectLst>
+        </p:spPr>
+      </p:sp>
+      <p:sp>
+        <p:nvSpPr>
+          <p:cNvPr id="10" name="Shape 8"/>
+          <p:cNvSpPr/>
+          <p:nvPr/>
+        </p:nvSpPr>
+        <p:spPr>
+          <a:xfrm>
+            <a:off x="6446520" y="2057400"/>
+            <a:ext cx="109728" cy="1783080"/>
+          </a:xfrm>
+          <a:prstGeom prst="rect">
+            <a:avLst/>
+          </a:prstGeom>
+          <a:solidFill>
+            <a:srgbClr val="C0561B"/>
+          </a:solidFill>
+          <a:ln/>
+        </p:spPr>
+      </p:sp>
+      <p:sp>
+        <p:nvSpPr>
+          <p:cNvPr id="11" name="Text 9"/>
+          <p:cNvSpPr/>
+          <p:nvPr/>
+        </p:nvSpPr>
+        <p:spPr>
+          <a:xfrm>
+            <a:off x="6766560" y="2258568"/>
+            <a:ext cx="4937760" cy="457200"/>
           </a:xfrm>
           <a:prstGeom prst="rect">
             <a:avLst/>
@@ -6626,30 +7232,121 @@
               <a:buNone/>
             </a:pPr>
             <a:r>
-              <a:rPr lang="en-US" sz="1150" i="1" dirty="0">
-                <a:solidFill>
-                  <a:srgbClr val="5C6E73"/>
+              <a:rPr lang="en-US" sz="1700" b="1" dirty="0">
+                <a:solidFill>
+                  <a:srgbClr val="1B2B31"/>
+                </a:solidFill>
+                <a:latin typeface="Georgia" pitchFamily="34" charset="0"/>
+                <a:ea typeface="Georgia" pitchFamily="34" charset="-122"/>
+                <a:cs typeface="Georgia" pitchFamily="34" charset="-120"/>
+              </a:rPr>
+              <a:t>Depth-matched</a:t>
+            </a:r>
+            <a:endParaRPr lang="en-US" sz="1700" dirty="0"/>
+          </a:p>
+        </p:txBody>
+      </p:sp>
+      <p:sp>
+        <p:nvSpPr>
+          <p:cNvPr id="12" name="Text 10"/>
+          <p:cNvSpPr/>
+          <p:nvPr/>
+        </p:nvSpPr>
+        <p:spPr>
+          <a:xfrm>
+            <a:off x="6766560" y="2770632"/>
+            <a:ext cx="4937760" cy="914400"/>
+          </a:xfrm>
+          <a:prstGeom prst="rect">
+            <a:avLst/>
+          </a:prstGeom>
+          <a:noFill/>
+          <a:ln/>
+        </p:spPr>
+        <p:txBody>
+          <a:bodyPr wrap="square" lIns="0" tIns="0" rIns="0" bIns="0" rtlCol="0" anchor="t"/>
+          <a:lstStyle/>
+          <a:p>
+            <a:pPr indent="0" marL="0">
+              <a:lnSpc>
+                <a:spcPts val="1800"/>
+              </a:lnSpc>
+              <a:buNone/>
+            </a:pPr>
+            <a:r>
+              <a:rPr lang="en-US" sz="1300" dirty="0">
+                <a:solidFill>
+                  <a:srgbClr val="45565B"/>
                 </a:solidFill>
                 <a:latin typeface="Calibri" pitchFamily="34" charset="0"/>
                 <a:ea typeface="Calibri" pitchFamily="34" charset="-122"/>
                 <a:cs typeface="Calibri" pitchFamily="34" charset="-120"/>
               </a:rPr>
-              <a:t>GSE202379 (Gribben et al., Nature 2024) · 47 donors · 69,426 hepatocyte nuclei · full numeric record in FINDINGS.md</a:t>
-            </a:r>
-            <a:endParaRPr lang="en-US" sz="1150" dirty="0"/>
-          </a:p>
-        </p:txBody>
-      </p:sp>
-      <p:sp>
-        <p:nvSpPr>
-          <p:cNvPr id="22" name="Text 20"/>
-          <p:cNvSpPr/>
-          <p:nvPr/>
-        </p:nvSpPr>
-        <p:spPr>
-          <a:xfrm>
-            <a:off x="11612880" y="6355080"/>
-            <a:ext cx="457200" cy="320040"/>
+              <a:t>Downsample every nucleus to a common budget (1,000 / 1,500 / 3,000 UMIs) by binomial thinning, averaged over 8 draws — the standard count-preserving depth control.</a:t>
+            </a:r>
+            <a:endParaRPr lang="en-US" sz="1300" dirty="0"/>
+          </a:p>
+        </p:txBody>
+      </p:sp>
+      <p:sp>
+        <p:nvSpPr>
+          <p:cNvPr id="13" name="Shape 11"/>
+          <p:cNvSpPr/>
+          <p:nvPr/>
+        </p:nvSpPr>
+        <p:spPr>
+          <a:xfrm>
+            <a:off x="640080" y="4114800"/>
+            <a:ext cx="5486400" cy="1783080"/>
+          </a:xfrm>
+          <a:prstGeom prst="roundRect">
+            <a:avLst>
+              <a:gd name="adj" fmla="val 3590"/>
+            </a:avLst>
+          </a:prstGeom>
+          <a:solidFill>
+            <a:srgbClr val="FFFFFF"/>
+          </a:solidFill>
+          <a:ln/>
+          <a:effectLst>
+            <a:outerShdw sx="100000" sy="100000" kx="0" ky="0" algn="bl" rotWithShape="0" blurRad="88900" dist="38100" dir="8100000">
+              <a:srgbClr val="000000">
+                <a:alpha val="13000"/>
+              </a:srgbClr>
+            </a:outerShdw>
+          </a:effectLst>
+        </p:spPr>
+      </p:sp>
+      <p:sp>
+        <p:nvSpPr>
+          <p:cNvPr id="14" name="Shape 12"/>
+          <p:cNvSpPr/>
+          <p:nvPr/>
+        </p:nvSpPr>
+        <p:spPr>
+          <a:xfrm>
+            <a:off x="640080" y="4114800"/>
+            <a:ext cx="109728" cy="1783080"/>
+          </a:xfrm>
+          <a:prstGeom prst="rect">
+            <a:avLst/>
+          </a:prstGeom>
+          <a:solidFill>
+            <a:srgbClr val="1B6E78"/>
+          </a:solidFill>
+          <a:ln/>
+        </p:spPr>
+      </p:sp>
+      <p:sp>
+        <p:nvSpPr>
+          <p:cNvPr id="15" name="Text 13"/>
+          <p:cNvSpPr/>
+          <p:nvPr/>
+        </p:nvSpPr>
+        <p:spPr>
+          <a:xfrm>
+            <a:off x="960120" y="4315968"/>
+            <a:ext cx="4937760" cy="457200"/>
           </a:xfrm>
           <a:prstGeom prst="rect">
             <a:avLst/>
@@ -6658,22 +7355,272 @@
           <a:ln/>
         </p:spPr>
         <p:txBody>
-          <a:bodyPr wrap="square" rtlCol="0" anchor="ctr"/>
-          <a:lstStyle/>
-          <a:p>
-            <a:pPr algn="r" indent="0" marL="0">
-              <a:buNone/>
-            </a:pPr>
-            <a:r>
-              <a:rPr lang="en-US" sz="1000" dirty="0">
-                <a:solidFill>
-                  <a:srgbClr val="5C6E73"/>
+          <a:bodyPr wrap="square" lIns="0" tIns="0" rIns="0" bIns="0" rtlCol="0" anchor="ctr"/>
+          <a:lstStyle/>
+          <a:p>
+            <a:pPr indent="0" marL="0">
+              <a:buNone/>
+            </a:pPr>
+            <a:r>
+              <a:rPr lang="en-US" sz="1700" b="1" dirty="0">
+                <a:solidFill>
+                  <a:srgbClr val="1B2B31"/>
+                </a:solidFill>
+                <a:latin typeface="Georgia" pitchFamily="34" charset="0"/>
+                <a:ea typeface="Georgia" pitchFamily="34" charset="-122"/>
+                <a:cs typeface="Georgia" pitchFamily="34" charset="-120"/>
+              </a:rPr>
+              <a:t>Anchor census</a:t>
+            </a:r>
+            <a:endParaRPr lang="en-US" sz="1700" dirty="0"/>
+          </a:p>
+        </p:txBody>
+      </p:sp>
+      <p:sp>
+        <p:nvSpPr>
+          <p:cNvPr id="16" name="Text 14"/>
+          <p:cNvSpPr/>
+          <p:nvPr/>
+        </p:nvSpPr>
+        <p:spPr>
+          <a:xfrm>
+            <a:off x="960120" y="4828032"/>
+            <a:ext cx="4937760" cy="914400"/>
+          </a:xfrm>
+          <a:prstGeom prst="rect">
+            <a:avLst/>
+          </a:prstGeom>
+          <a:noFill/>
+          <a:ln/>
+        </p:spPr>
+        <p:txBody>
+          <a:bodyPr wrap="square" lIns="0" tIns="0" rIns="0" bIns="0" rtlCol="0" anchor="t"/>
+          <a:lstStyle/>
+          <a:p>
+            <a:pPr indent="0" marL="0">
+              <a:lnSpc>
+                <a:spcPts val="1800"/>
+              </a:lnSpc>
+              <a:buNone/>
+            </a:pPr>
+            <a:r>
+              <a:rPr lang="en-US" sz="1300" dirty="0">
+                <a:solidFill>
+                  <a:srgbClr val="45565B"/>
                 </a:solidFill>
                 <a:latin typeface="Calibri" pitchFamily="34" charset="0"/>
                 <a:ea typeface="Calibri" pitchFamily="34" charset="-122"/>
                 <a:cs typeface="Calibri" pitchFamily="34" charset="-120"/>
               </a:rPr>
-              <a:t>15</a:t>
+              <a:t>Classify each nucleus PC / PP / dual / null on the canonical landmarks (GLUL, CYP3A4 vs ASS1, CPS1, PCK1, HAL, ALDOB); sweep thresholds, anchor genes, and programs.</a:t>
+            </a:r>
+            <a:endParaRPr lang="en-US" sz="1300" dirty="0"/>
+          </a:p>
+        </p:txBody>
+      </p:sp>
+      <p:sp>
+        <p:nvSpPr>
+          <p:cNvPr id="17" name="Shape 15"/>
+          <p:cNvSpPr/>
+          <p:nvPr/>
+        </p:nvSpPr>
+        <p:spPr>
+          <a:xfrm>
+            <a:off x="6446520" y="4114800"/>
+            <a:ext cx="5486400" cy="1783080"/>
+          </a:xfrm>
+          <a:prstGeom prst="roundRect">
+            <a:avLst>
+              <a:gd name="adj" fmla="val 3590"/>
+            </a:avLst>
+          </a:prstGeom>
+          <a:solidFill>
+            <a:srgbClr val="FFFFFF"/>
+          </a:solidFill>
+          <a:ln/>
+          <a:effectLst>
+            <a:outerShdw sx="100000" sy="100000" kx="0" ky="0" algn="bl" rotWithShape="0" blurRad="88900" dist="38100" dir="8100000">
+              <a:srgbClr val="000000">
+                <a:alpha val="13000"/>
+              </a:srgbClr>
+            </a:outerShdw>
+          </a:effectLst>
+        </p:spPr>
+      </p:sp>
+      <p:sp>
+        <p:nvSpPr>
+          <p:cNvPr id="18" name="Shape 16"/>
+          <p:cNvSpPr/>
+          <p:nvPr/>
+        </p:nvSpPr>
+        <p:spPr>
+          <a:xfrm>
+            <a:off x="6446520" y="4114800"/>
+            <a:ext cx="109728" cy="1783080"/>
+          </a:xfrm>
+          <a:prstGeom prst="rect">
+            <a:avLst/>
+          </a:prstGeom>
+          <a:solidFill>
+            <a:srgbClr val="C0561B"/>
+          </a:solidFill>
+          <a:ln/>
+        </p:spPr>
+      </p:sp>
+      <p:sp>
+        <p:nvSpPr>
+          <p:cNvPr id="19" name="Text 17"/>
+          <p:cNvSpPr/>
+          <p:nvPr/>
+        </p:nvSpPr>
+        <p:spPr>
+          <a:xfrm>
+            <a:off x="6766560" y="4315968"/>
+            <a:ext cx="4937760" cy="457200"/>
+          </a:xfrm>
+          <a:prstGeom prst="rect">
+            <a:avLst/>
+          </a:prstGeom>
+          <a:noFill/>
+          <a:ln/>
+        </p:spPr>
+        <p:txBody>
+          <a:bodyPr wrap="square" lIns="0" tIns="0" rIns="0" bIns="0" rtlCol="0" anchor="ctr"/>
+          <a:lstStyle/>
+          <a:p>
+            <a:pPr indent="0" marL="0">
+              <a:buNone/>
+            </a:pPr>
+            <a:r>
+              <a:rPr lang="en-US" sz="1700" b="1" dirty="0">
+                <a:solidFill>
+                  <a:srgbClr val="1B2B31"/>
+                </a:solidFill>
+                <a:latin typeface="Georgia" pitchFamily="34" charset="0"/>
+                <a:ea typeface="Georgia" pitchFamily="34" charset="-122"/>
+                <a:cs typeface="Georgia" pitchFamily="34" charset="-120"/>
+              </a:rPr>
+              <a:t>Donor-level inference</a:t>
+            </a:r>
+            <a:endParaRPr lang="en-US" sz="1700" dirty="0"/>
+          </a:p>
+        </p:txBody>
+      </p:sp>
+      <p:sp>
+        <p:nvSpPr>
+          <p:cNvPr id="20" name="Text 18"/>
+          <p:cNvSpPr/>
+          <p:nvPr/>
+        </p:nvSpPr>
+        <p:spPr>
+          <a:xfrm>
+            <a:off x="6766560" y="4828032"/>
+            <a:ext cx="4937760" cy="914400"/>
+          </a:xfrm>
+          <a:prstGeom prst="rect">
+            <a:avLst/>
+          </a:prstGeom>
+          <a:noFill/>
+          <a:ln/>
+        </p:spPr>
+        <p:txBody>
+          <a:bodyPr wrap="square" lIns="0" tIns="0" rIns="0" bIns="0" rtlCol="0" anchor="t"/>
+          <a:lstStyle/>
+          <a:p>
+            <a:pPr indent="0" marL="0">
+              <a:lnSpc>
+                <a:spcPts val="1800"/>
+              </a:lnSpc>
+              <a:buNone/>
+            </a:pPr>
+            <a:r>
+              <a:rPr lang="en-US" sz="1300" dirty="0">
+                <a:solidFill>
+                  <a:srgbClr val="45565B"/>
+                </a:solidFill>
+                <a:latin typeface="Calibri" pitchFamily="34" charset="0"/>
+                <a:ea typeface="Calibri" pitchFamily="34" charset="-122"/>
+                <a:cs typeface="Calibri" pitchFamily="34" charset="-120"/>
+              </a:rPr>
+              <a:t>Donor is the unit (~47): per-donor medians + ranges by stage. Two axes — fibrosis F0–F4 and NAS. Minimum detectable effect estimated at donor level.</a:t>
+            </a:r>
+            <a:endParaRPr lang="en-US" sz="1300" dirty="0"/>
+          </a:p>
+        </p:txBody>
+      </p:sp>
+      <p:sp>
+        <p:nvSpPr>
+          <p:cNvPr id="21" name="Text 19"/>
+          <p:cNvSpPr/>
+          <p:nvPr/>
+        </p:nvSpPr>
+        <p:spPr>
+          <a:xfrm>
+            <a:off x="640080" y="5897880"/>
+            <a:ext cx="10881360" cy="365760"/>
+          </a:xfrm>
+          <a:prstGeom prst="rect">
+            <a:avLst/>
+          </a:prstGeom>
+          <a:noFill/>
+          <a:ln/>
+        </p:spPr>
+        <p:txBody>
+          <a:bodyPr wrap="square" lIns="0" tIns="0" rIns="0" bIns="0" rtlCol="0" anchor="ctr"/>
+          <a:lstStyle/>
+          <a:p>
+            <a:pPr indent="0" marL="0">
+              <a:buNone/>
+            </a:pPr>
+            <a:r>
+              <a:rPr lang="en-US" sz="1150" i="1" dirty="0">
+                <a:solidFill>
+                  <a:srgbClr val="5C6E73"/>
+                </a:solidFill>
+                <a:latin typeface="Calibri" pitchFamily="34" charset="0"/>
+                <a:ea typeface="Calibri" pitchFamily="34" charset="-122"/>
+                <a:cs typeface="Calibri" pitchFamily="34" charset="-120"/>
+              </a:rPr>
+              <a:t>GSE202379 (Gribben et al., Nature 2024) · 47 donors · 69,426 hepatocyte nuclei · full numeric record in FINDINGS.md</a:t>
+            </a:r>
+            <a:endParaRPr lang="en-US" sz="1150" dirty="0"/>
+          </a:p>
+        </p:txBody>
+      </p:sp>
+      <p:sp>
+        <p:nvSpPr>
+          <p:cNvPr id="22" name="Text 20"/>
+          <p:cNvSpPr/>
+          <p:nvPr/>
+        </p:nvSpPr>
+        <p:spPr>
+          <a:xfrm>
+            <a:off x="11612880" y="6355080"/>
+            <a:ext cx="457200" cy="320040"/>
+          </a:xfrm>
+          <a:prstGeom prst="rect">
+            <a:avLst/>
+          </a:prstGeom>
+          <a:noFill/>
+          <a:ln/>
+        </p:spPr>
+        <p:txBody>
+          <a:bodyPr wrap="square" rtlCol="0" anchor="ctr"/>
+          <a:lstStyle/>
+          <a:p>
+            <a:pPr algn="r" indent="0" marL="0">
+              <a:buNone/>
+            </a:pPr>
+            <a:r>
+              <a:rPr lang="en-US" sz="1000" dirty="0">
+                <a:solidFill>
+                  <a:srgbClr val="5C6E73"/>
+                </a:solidFill>
+                <a:latin typeface="Calibri" pitchFamily="34" charset="0"/>
+                <a:ea typeface="Calibri" pitchFamily="34" charset="-122"/>
+                <a:cs typeface="Calibri" pitchFamily="34" charset="-120"/>
+              </a:rPr>
+              <a:t>17</a:t>
             </a:r>
             <a:endParaRPr lang="en-US" sz="1000" dirty="0"/>
           </a:p>
@@ -8121,7 +9068,7 @@
                 <a:ea typeface="Calibri" pitchFamily="34" charset="-122"/>
                 <a:cs typeface="Calibri" pitchFamily="34" charset="-120"/>
               </a:rPr>
-              <a:t>THE CATCH</a:t>
+              <a:t>THE LEGACY APPROACH</a:t>
             </a:r>
             <a:endParaRPr lang="en-US" sz="1200" dirty="0"/>
           </a:p>
@@ -8163,6 +9110,675 @@
                 <a:ea typeface="Georgia" pitchFamily="34" charset="-122"/>
                 <a:cs typeface="Georgia" pitchFamily="34" charset="-120"/>
               </a:rPr>
+              <a:t>How we first read the data — and the claim it produced</a:t>
+            </a:r>
+            <a:endParaRPr lang="en-US" sz="3000" dirty="0"/>
+          </a:p>
+        </p:txBody>
+      </p:sp>
+      <p:sp>
+        <p:nvSpPr>
+          <p:cNvPr id="5" name="Shape 3"/>
+          <p:cNvSpPr/>
+          <p:nvPr/>
+        </p:nvSpPr>
+        <p:spPr>
+          <a:xfrm>
+            <a:off x="640080" y="1874520"/>
+            <a:ext cx="5486400" cy="3200400"/>
+          </a:xfrm>
+          <a:prstGeom prst="roundRect">
+            <a:avLst>
+              <a:gd name="adj" fmla="val 2286"/>
+            </a:avLst>
+          </a:prstGeom>
+          <a:solidFill>
+            <a:srgbClr val="FFFFFF"/>
+          </a:solidFill>
+          <a:ln/>
+          <a:effectLst>
+            <a:outerShdw sx="100000" sy="100000" kx="0" ky="0" algn="bl" rotWithShape="0" blurRad="88900" dist="38100" dir="8100000">
+              <a:srgbClr val="000000">
+                <a:alpha val="13000"/>
+              </a:srgbClr>
+            </a:outerShdw>
+          </a:effectLst>
+        </p:spPr>
+      </p:sp>
+      <p:sp>
+        <p:nvSpPr>
+          <p:cNvPr id="6" name="Text 4"/>
+          <p:cNvSpPr/>
+          <p:nvPr/>
+        </p:nvSpPr>
+        <p:spPr>
+          <a:xfrm>
+            <a:off x="868680" y="2011680"/>
+            <a:ext cx="5029200" cy="365760"/>
+          </a:xfrm>
+          <a:prstGeom prst="rect">
+            <a:avLst/>
+          </a:prstGeom>
+          <a:noFill/>
+          <a:ln/>
+        </p:spPr>
+        <p:txBody>
+          <a:bodyPr wrap="square" lIns="0" tIns="0" rIns="0" bIns="0" rtlCol="0" anchor="ctr"/>
+          <a:lstStyle/>
+          <a:p>
+            <a:pPr indent="0" marL="0">
+              <a:buNone/>
+            </a:pPr>
+            <a:r>
+              <a:rPr lang="en-US" sz="1600" b="1" dirty="0">
+                <a:solidFill>
+                  <a:srgbClr val="1B6E78"/>
+                </a:solidFill>
+                <a:latin typeface="Georgia" pitchFamily="34" charset="0"/>
+                <a:ea typeface="Georgia" pitchFamily="34" charset="-122"/>
+                <a:cs typeface="Georgia" pitchFamily="34" charset="-120"/>
+              </a:rPr>
+              <a:t>The metrics we used at first</a:t>
+            </a:r>
+            <a:endParaRPr lang="en-US" sz="1600" dirty="0"/>
+          </a:p>
+        </p:txBody>
+      </p:sp>
+      <p:sp>
+        <p:nvSpPr>
+          <p:cNvPr id="7" name="Text 5"/>
+          <p:cNvSpPr/>
+          <p:nvPr/>
+        </p:nvSpPr>
+        <p:spPr>
+          <a:xfrm>
+            <a:off x="868680" y="2514600"/>
+            <a:ext cx="5029200" cy="2377440"/>
+          </a:xfrm>
+          <a:prstGeom prst="rect">
+            <a:avLst/>
+          </a:prstGeom>
+          <a:noFill/>
+          <a:ln/>
+        </p:spPr>
+        <p:txBody>
+          <a:bodyPr wrap="square" lIns="0" tIns="0" rIns="0" bIns="0" rtlCol="0" anchor="t"/>
+          <a:lstStyle/>
+          <a:p>
+            <a:pPr indent="0" marL="0">
+              <a:lnSpc>
+                <a:spcPts val="2600"/>
+              </a:lnSpc>
+              <a:buNone/>
+            </a:pPr>
+            <a:r>
+              <a:rPr lang="en-US" sz="1450" b="1" dirty="0">
+                <a:solidFill>
+                  <a:srgbClr val="1B2B31"/>
+                </a:solidFill>
+                <a:latin typeface="Calibri" pitchFamily="34" charset="0"/>
+                <a:ea typeface="Calibri" pitchFamily="34" charset="-122"/>
+                <a:cs typeface="Calibri" pitchFamily="34" charset="-120"/>
+              </a:rPr>
+              <a:t>z-scored zonation coordinate — </a:t>
+            </a:r>
+            <a:pPr indent="0" marL="0">
+              <a:lnSpc>
+                <a:spcPts val="2600"/>
+              </a:lnSpc>
+              <a:buNone/>
+            </a:pPr>
+            <a:r>
+              <a:rPr lang="en-US" sz="1450" dirty="0">
+                <a:solidFill>
+                  <a:srgbClr val="5C6E73"/>
+                </a:solidFill>
+                <a:latin typeface="Calibri" pitchFamily="34" charset="0"/>
+                <a:ea typeface="Calibri" pitchFamily="34" charset="-122"/>
+                <a:cs typeface="Calibri" pitchFamily="34" charset="-120"/>
+              </a:rPr>
+              <a:t>z(PC) − z(PP) per cell
+</a:t>
+            </a:r>
+            <a:endParaRPr lang="en-US" sz="1450" dirty="0"/>
+          </a:p>
+          <a:p>
+            <a:pPr indent="0" marL="0">
+              <a:lnSpc>
+                <a:spcPts val="2600"/>
+              </a:lnSpc>
+              <a:buNone/>
+            </a:pPr>
+            <a:r>
+              <a:rPr lang="en-US" sz="1450" b="1" dirty="0">
+                <a:solidFill>
+                  <a:srgbClr val="1B2B31"/>
+                </a:solidFill>
+                <a:latin typeface="Calibri" pitchFamily="34" charset="0"/>
+                <a:ea typeface="Calibri" pitchFamily="34" charset="-122"/>
+                <a:cs typeface="Calibri" pitchFamily="34" charset="-120"/>
+              </a:rPr>
+              <a:t>PC–PP marker anti-correlation
+</a:t>
+            </a:r>
+            <a:endParaRPr lang="en-US" sz="1450" dirty="0"/>
+          </a:p>
+          <a:p>
+            <a:pPr indent="0" marL="0">
+              <a:lnSpc>
+                <a:spcPts val="2600"/>
+              </a:lnSpc>
+              <a:buNone/>
+            </a:pPr>
+            <a:r>
+              <a:rPr lang="en-US" sz="1450" b="1" dirty="0">
+                <a:solidFill>
+                  <a:srgbClr val="1B2B31"/>
+                </a:solidFill>
+                <a:latin typeface="Calibri" pitchFamily="34" charset="0"/>
+                <a:ea typeface="Calibri" pitchFamily="34" charset="-122"/>
+                <a:cs typeface="Calibri" pitchFamily="34" charset="-120"/>
+              </a:rPr>
+              <a:t>coordinate spread / IQR per stage
+</a:t>
+            </a:r>
+            <a:endParaRPr lang="en-US" sz="1450" dirty="0"/>
+          </a:p>
+          <a:p>
+            <a:pPr indent="0" marL="0">
+              <a:lnSpc>
+                <a:spcPts val="2600"/>
+              </a:lnSpc>
+              <a:buNone/>
+            </a:pPr>
+            <a:r>
+              <a:rPr lang="en-US" sz="1450" b="1" dirty="0">
+                <a:solidFill>
+                  <a:srgbClr val="1B2B31"/>
+                </a:solidFill>
+                <a:latin typeface="Calibri" pitchFamily="34" charset="0"/>
+                <a:ea typeface="Calibri" pitchFamily="34" charset="-122"/>
+                <a:cs typeface="Calibri" pitchFamily="34" charset="-120"/>
+              </a:rPr>
+              <a:t>zonation heatmaps &amp; slope-loss plots</a:t>
+            </a:r>
+            <a:endParaRPr lang="en-US" sz="1450" dirty="0"/>
+          </a:p>
+        </p:txBody>
+      </p:sp>
+      <p:sp>
+        <p:nvSpPr>
+          <p:cNvPr id="8" name="Shape 6"/>
+          <p:cNvSpPr/>
+          <p:nvPr/>
+        </p:nvSpPr>
+        <p:spPr>
+          <a:xfrm>
+            <a:off x="6355080" y="1874520"/>
+            <a:ext cx="5166360" cy="3200400"/>
+          </a:xfrm>
+          <a:prstGeom prst="roundRect">
+            <a:avLst>
+              <a:gd name="adj" fmla="val 2286"/>
+            </a:avLst>
+          </a:prstGeom>
+          <a:solidFill>
+            <a:srgbClr val="16242B"/>
+          </a:solidFill>
+          <a:ln/>
+          <a:effectLst>
+            <a:outerShdw sx="100000" sy="100000" kx="0" ky="0" algn="bl" rotWithShape="0" blurRad="88900" dist="38100" dir="8100000">
+              <a:srgbClr val="000000">
+                <a:alpha val="13000"/>
+              </a:srgbClr>
+            </a:outerShdw>
+          </a:effectLst>
+        </p:spPr>
+      </p:sp>
+      <p:sp>
+        <p:nvSpPr>
+          <p:cNvPr id="9" name="Text 7"/>
+          <p:cNvSpPr/>
+          <p:nvPr/>
+        </p:nvSpPr>
+        <p:spPr>
+          <a:xfrm>
+            <a:off x="6583680" y="2011680"/>
+            <a:ext cx="4754880" cy="365760"/>
+          </a:xfrm>
+          <a:prstGeom prst="rect">
+            <a:avLst/>
+          </a:prstGeom>
+          <a:noFill/>
+          <a:ln/>
+        </p:spPr>
+        <p:txBody>
+          <a:bodyPr wrap="square" lIns="0" tIns="0" rIns="0" bIns="0" rtlCol="0" anchor="ctr"/>
+          <a:lstStyle/>
+          <a:p>
+            <a:pPr indent="0" marL="0">
+              <a:buNone/>
+            </a:pPr>
+            <a:r>
+              <a:rPr lang="en-US" sz="1600" b="1" dirty="0">
+                <a:solidFill>
+                  <a:srgbClr val="9FC0C4"/>
+                </a:solidFill>
+                <a:latin typeface="Georgia" pitchFamily="34" charset="0"/>
+                <a:ea typeface="Georgia" pitchFamily="34" charset="-122"/>
+                <a:cs typeface="Georgia" pitchFamily="34" charset="-120"/>
+              </a:rPr>
+              <a:t>The claim it produced</a:t>
+            </a:r>
+            <a:endParaRPr lang="en-US" sz="1600" dirty="0"/>
+          </a:p>
+        </p:txBody>
+      </p:sp>
+      <p:sp>
+        <p:nvSpPr>
+          <p:cNvPr id="10" name="Text 8"/>
+          <p:cNvSpPr/>
+          <p:nvPr/>
+        </p:nvSpPr>
+        <p:spPr>
+          <a:xfrm>
+            <a:off x="6583680" y="2606040"/>
+            <a:ext cx="4754880" cy="1371600"/>
+          </a:xfrm>
+          <a:prstGeom prst="rect">
+            <a:avLst/>
+          </a:prstGeom>
+          <a:noFill/>
+          <a:ln/>
+        </p:spPr>
+        <p:txBody>
+          <a:bodyPr wrap="square" lIns="0" tIns="0" rIns="0" bIns="0" rtlCol="0" anchor="ctr"/>
+          <a:lstStyle/>
+          <a:p>
+            <a:pPr indent="0" marL="0">
+              <a:lnSpc>
+                <a:spcPts val="2600"/>
+              </a:lnSpc>
+              <a:buNone/>
+            </a:pPr>
+            <a:r>
+              <a:rPr lang="en-US" sz="2000" i="1" dirty="0">
+                <a:solidFill>
+                  <a:srgbClr val="FFFFFF"/>
+                </a:solidFill>
+                <a:latin typeface="Georgia" pitchFamily="34" charset="0"/>
+                <a:ea typeface="Georgia" pitchFamily="34" charset="-122"/>
+                <a:cs typeface="Georgia" pitchFamily="34" charset="-120"/>
+              </a:rPr>
+              <a:t>“Hepatocytes lose their zonation;</a:t>
+            </a:r>
+            <a:endParaRPr lang="en-US" sz="2000" dirty="0"/>
+          </a:p>
+          <a:p>
+            <a:pPr indent="0" marL="0">
+              <a:lnSpc>
+                <a:spcPts val="2600"/>
+              </a:lnSpc>
+              <a:buNone/>
+            </a:pPr>
+            <a:r>
+              <a:rPr lang="en-US" sz="2000" i="1" dirty="0">
+                <a:solidFill>
+                  <a:srgbClr val="FFFFFF"/>
+                </a:solidFill>
+                <a:latin typeface="Georgia" pitchFamily="34" charset="0"/>
+                <a:ea typeface="Georgia" pitchFamily="34" charset="-122"/>
+                <a:cs typeface="Georgia" pitchFamily="34" charset="-120"/>
+              </a:rPr>
+              <a:t>the pericentral program turns off,</a:t>
+            </a:r>
+            <a:endParaRPr lang="en-US" sz="2000" dirty="0"/>
+          </a:p>
+          <a:p>
+            <a:pPr indent="0" marL="0">
+              <a:lnSpc>
+                <a:spcPts val="2600"/>
+              </a:lnSpc>
+              <a:buNone/>
+            </a:pPr>
+            <a:r>
+              <a:rPr lang="en-US" sz="2000" i="1" dirty="0">
+                <a:solidFill>
+                  <a:srgbClr val="FFFFFF"/>
+                </a:solidFill>
+                <a:latin typeface="Georgia" pitchFamily="34" charset="0"/>
+                <a:ea typeface="Georgia" pitchFamily="34" charset="-122"/>
+                <a:cs typeface="Georgia" pitchFamily="34" charset="-120"/>
+              </a:rPr>
+              <a:t>strongest at end-stage.”</a:t>
+            </a:r>
+            <a:endParaRPr lang="en-US" sz="2000" dirty="0"/>
+          </a:p>
+        </p:txBody>
+      </p:sp>
+      <p:sp>
+        <p:nvSpPr>
+          <p:cNvPr id="11" name="Text 9"/>
+          <p:cNvSpPr/>
+          <p:nvPr/>
+        </p:nvSpPr>
+        <p:spPr>
+          <a:xfrm>
+            <a:off x="6583680" y="4023360"/>
+            <a:ext cx="4754880" cy="914400"/>
+          </a:xfrm>
+          <a:prstGeom prst="rect">
+            <a:avLst/>
+          </a:prstGeom>
+          <a:noFill/>
+          <a:ln/>
+        </p:spPr>
+        <p:txBody>
+          <a:bodyPr wrap="square" lIns="0" tIns="0" rIns="0" bIns="0" rtlCol="0" anchor="ctr"/>
+          <a:lstStyle/>
+          <a:p>
+            <a:pPr indent="0" marL="0">
+              <a:lnSpc>
+                <a:spcPts val="1900"/>
+              </a:lnSpc>
+              <a:buNone/>
+            </a:pPr>
+            <a:r>
+              <a:rPr lang="en-US" sz="1350" dirty="0">
+                <a:solidFill>
+                  <a:srgbClr val="CFE0E2"/>
+                </a:solidFill>
+                <a:latin typeface="Calibri" pitchFamily="34" charset="0"/>
+                <a:ea typeface="Calibri" pitchFamily="34" charset="-122"/>
+                <a:cs typeface="Calibri" pitchFamily="34" charset="-120"/>
+              </a:rPr>
+              <a:t>Every metric is a </a:t>
+            </a:r>
+            <a:pPr indent="0" marL="0">
+              <a:lnSpc>
+                <a:spcPts val="1900"/>
+              </a:lnSpc>
+              <a:buNone/>
+            </a:pPr>
+            <a:r>
+              <a:rPr lang="en-US" sz="1350" b="1" dirty="0">
+                <a:solidFill>
+                  <a:srgbClr val="C0561B"/>
+                </a:solidFill>
+                <a:latin typeface="Calibri" pitchFamily="34" charset="0"/>
+                <a:ea typeface="Calibri" pitchFamily="34" charset="-122"/>
+                <a:cs typeface="Calibri" pitchFamily="34" charset="-120"/>
+              </a:rPr>
+              <a:t>relative summary</a:t>
+            </a:r>
+            <a:pPr indent="0" marL="0">
+              <a:lnSpc>
+                <a:spcPts val="1900"/>
+              </a:lnSpc>
+              <a:buNone/>
+            </a:pPr>
+            <a:r>
+              <a:rPr lang="en-US" sz="1350" dirty="0">
+                <a:solidFill>
+                  <a:srgbClr val="CFE0E2"/>
+                </a:solidFill>
+                <a:latin typeface="Calibri" pitchFamily="34" charset="0"/>
+                <a:ea typeface="Calibri" pitchFamily="34" charset="-122"/>
+                <a:cs typeface="Calibri" pitchFamily="34" charset="-120"/>
+              </a:rPr>
+              <a:t> — z-scored, correlation-based, pooled across all samples. It hides who moved, how many, and from where.</a:t>
+            </a:r>
+            <a:endParaRPr lang="en-US" sz="1350" dirty="0"/>
+          </a:p>
+        </p:txBody>
+      </p:sp>
+      <p:sp>
+        <p:nvSpPr>
+          <p:cNvPr id="12" name="Shape 10"/>
+          <p:cNvSpPr/>
+          <p:nvPr/>
+        </p:nvSpPr>
+        <p:spPr>
+          <a:xfrm>
+            <a:off x="640080" y="5257800"/>
+            <a:ext cx="10881360" cy="868680"/>
+          </a:xfrm>
+          <a:prstGeom prst="roundRect">
+            <a:avLst>
+              <a:gd name="adj" fmla="val 7368"/>
+            </a:avLst>
+          </a:prstGeom>
+          <a:solidFill>
+            <a:srgbClr val="ECF1F1"/>
+          </a:solidFill>
+          <a:ln/>
+        </p:spPr>
+      </p:sp>
+      <p:sp>
+        <p:nvSpPr>
+          <p:cNvPr id="13" name="Text 11"/>
+          <p:cNvSpPr/>
+          <p:nvPr/>
+        </p:nvSpPr>
+        <p:spPr>
+          <a:xfrm>
+            <a:off x="914400" y="5394960"/>
+            <a:ext cx="10332720" cy="594360"/>
+          </a:xfrm>
+          <a:prstGeom prst="rect">
+            <a:avLst/>
+          </a:prstGeom>
+          <a:noFill/>
+          <a:ln/>
+        </p:spPr>
+        <p:txBody>
+          <a:bodyPr wrap="square" lIns="0" tIns="0" rIns="0" bIns="0" rtlCol="0" anchor="ctr"/>
+          <a:lstStyle/>
+          <a:p>
+            <a:pPr indent="0" marL="0">
+              <a:lnSpc>
+                <a:spcPts val="1900"/>
+              </a:lnSpc>
+              <a:buNone/>
+            </a:pPr>
+            <a:r>
+              <a:rPr lang="en-US" sz="1400" b="1" dirty="0">
+                <a:solidFill>
+                  <a:srgbClr val="C0561B"/>
+                </a:solidFill>
+                <a:latin typeface="Calibri" pitchFamily="34" charset="0"/>
+                <a:ea typeface="Calibri" pitchFamily="34" charset="-122"/>
+                <a:cs typeface="Calibri" pitchFamily="34" charset="-120"/>
+              </a:rPr>
+              <a:t>The trap:  </a:t>
+            </a:r>
+            <a:pPr indent="0" marL="0">
+              <a:lnSpc>
+                <a:spcPts val="1900"/>
+              </a:lnSpc>
+              <a:buNone/>
+            </a:pPr>
+            <a:r>
+              <a:rPr lang="en-US" sz="1400" dirty="0">
+                <a:solidFill>
+                  <a:srgbClr val="1B2B31"/>
+                </a:solidFill>
+                <a:latin typeface="Calibri" pitchFamily="34" charset="0"/>
+                <a:ea typeface="Calibri" pitchFamily="34" charset="-122"/>
+                <a:cs typeface="Calibri" pitchFamily="34" charset="-120"/>
+              </a:rPr>
+              <a:t>these statistics pool healthy, biopsy and end-stage samples together — across a hidden sampling discontinuity. The next slides show what that discontinuity is, and why it fakes a collapse.</a:t>
+            </a:r>
+            <a:endParaRPr lang="en-US" sz="1400" dirty="0"/>
+          </a:p>
+        </p:txBody>
+      </p:sp>
+      <p:sp>
+        <p:nvSpPr>
+          <p:cNvPr id="14" name="Text 12"/>
+          <p:cNvSpPr/>
+          <p:nvPr/>
+        </p:nvSpPr>
+        <p:spPr>
+          <a:xfrm>
+            <a:off x="11612880" y="6355080"/>
+            <a:ext cx="457200" cy="320040"/>
+          </a:xfrm>
+          <a:prstGeom prst="rect">
+            <a:avLst/>
+          </a:prstGeom>
+          <a:noFill/>
+          <a:ln/>
+        </p:spPr>
+        <p:txBody>
+          <a:bodyPr wrap="square" rtlCol="0" anchor="ctr"/>
+          <a:lstStyle/>
+          <a:p>
+            <a:pPr algn="r" indent="0" marL="0">
+              <a:buNone/>
+            </a:pPr>
+            <a:r>
+              <a:rPr lang="en-US" sz="1000" dirty="0">
+                <a:solidFill>
+                  <a:srgbClr val="5C6E73"/>
+                </a:solidFill>
+                <a:latin typeface="Calibri" pitchFamily="34" charset="0"/>
+                <a:ea typeface="Calibri" pitchFamily="34" charset="-122"/>
+                <a:cs typeface="Calibri" pitchFamily="34" charset="-120"/>
+              </a:rPr>
+              <a:t>4</a:t>
+            </a:r>
+            <a:endParaRPr lang="en-US" sz="1000" dirty="0"/>
+          </a:p>
+        </p:txBody>
+      </p:sp>
+    </p:spTree>
+  </p:cSld>
+  <p:clrMapOvr>
+    <a:masterClrMapping/>
+  </p:clrMapOvr>
+</p:sld>
+</file>
+
+<file path=ppt/slides/slide5.xml><?xml version="1.0" encoding="utf-8"?>
+<p:sld xmlns:a="http://schemas.openxmlformats.org/drawingml/2006/main" xmlns:r="http://schemas.openxmlformats.org/officeDocument/2006/relationships" xmlns:p="http://schemas.openxmlformats.org/presentationml/2006/main">
+  <p:cSld name="Slide 5">
+    <p:bg>
+      <p:bgPr>
+        <a:solidFill>
+          <a:srgbClr val="F7F5F1"/>
+        </a:solidFill>
+      </p:bgPr>
+    </p:bg>
+    <p:spTree>
+      <p:nvGrpSpPr>
+        <p:cNvPr id="1" name=""/>
+        <p:cNvGrpSpPr/>
+        <p:nvPr/>
+      </p:nvGrpSpPr>
+      <p:grpSpPr>
+        <a:xfrm>
+          <a:off x="0" y="0"/>
+          <a:ext cx="0" cy="0"/>
+          <a:chOff x="0" y="0"/>
+          <a:chExt cx="0" cy="0"/>
+        </a:xfrm>
+      </p:grpSpPr>
+      <p:sp>
+        <p:nvSpPr>
+          <p:cNvPr id="2" name="Shape 0"/>
+          <p:cNvSpPr/>
+          <p:nvPr/>
+        </p:nvSpPr>
+        <p:spPr>
+          <a:xfrm>
+            <a:off x="640080" y="502920"/>
+            <a:ext cx="164592" cy="310896"/>
+          </a:xfrm>
+          <a:prstGeom prst="rect">
+            <a:avLst/>
+          </a:prstGeom>
+          <a:solidFill>
+            <a:srgbClr val="C0561B"/>
+          </a:solidFill>
+          <a:ln/>
+        </p:spPr>
+      </p:sp>
+      <p:sp>
+        <p:nvSpPr>
+          <p:cNvPr id="3" name="Text 1"/>
+          <p:cNvSpPr/>
+          <p:nvPr/>
+        </p:nvSpPr>
+        <p:spPr>
+          <a:xfrm>
+            <a:off x="896112" y="502920"/>
+            <a:ext cx="8229600" cy="310896"/>
+          </a:xfrm>
+          <a:prstGeom prst="rect">
+            <a:avLst/>
+          </a:prstGeom>
+          <a:noFill/>
+          <a:ln/>
+        </p:spPr>
+        <p:txBody>
+          <a:bodyPr wrap="square" lIns="0" tIns="0" rIns="0" bIns="0" rtlCol="0" anchor="ctr"/>
+          <a:lstStyle/>
+          <a:p>
+            <a:pPr indent="0" marL="0">
+              <a:buNone/>
+            </a:pPr>
+            <a:r>
+              <a:rPr lang="en-US" sz="1200" b="1" spc="300" kern="0" dirty="0">
+                <a:solidFill>
+                  <a:srgbClr val="C0561B"/>
+                </a:solidFill>
+                <a:latin typeface="Calibri" pitchFamily="34" charset="0"/>
+                <a:ea typeface="Calibri" pitchFamily="34" charset="-122"/>
+                <a:cs typeface="Calibri" pitchFamily="34" charset="-120"/>
+              </a:rPr>
+              <a:t>THE CATCH</a:t>
+            </a:r>
+            <a:endParaRPr lang="en-US" sz="1200" dirty="0"/>
+          </a:p>
+        </p:txBody>
+      </p:sp>
+      <p:sp>
+        <p:nvSpPr>
+          <p:cNvPr id="4" name="Text 2"/>
+          <p:cNvSpPr/>
+          <p:nvPr/>
+        </p:nvSpPr>
+        <p:spPr>
+          <a:xfrm>
+            <a:off x="640080" y="868680"/>
+            <a:ext cx="10881360" cy="914400"/>
+          </a:xfrm>
+          <a:prstGeom prst="rect">
+            <a:avLst/>
+          </a:prstGeom>
+          <a:noFill/>
+          <a:ln/>
+        </p:spPr>
+        <p:txBody>
+          <a:bodyPr wrap="square" lIns="0" tIns="0" rIns="0" bIns="0" rtlCol="0" anchor="ctr"/>
+          <a:lstStyle/>
+          <a:p>
+            <a:pPr indent="0" marL="0">
+              <a:lnSpc>
+                <a:spcPts val="3400"/>
+              </a:lnSpc>
+              <a:buNone/>
+            </a:pPr>
+            <a:r>
+              <a:rPr lang="en-US" sz="3000" b="1" dirty="0">
+                <a:solidFill>
+                  <a:srgbClr val="1B2B31"/>
+                </a:solidFill>
+                <a:latin typeface="Georgia" pitchFamily="34" charset="0"/>
+                <a:ea typeface="Georgia" pitchFamily="34" charset="-122"/>
+                <a:cs typeface="Georgia" pitchFamily="34" charset="-120"/>
+              </a:rPr>
               <a:t>Disease stage is confounded with how the tissue was collected</a:t>
             </a:r>
             <a:endParaRPr lang="en-US" sz="3000" dirty="0"/>
@@ -8171,7 +9787,7 @@
       </p:sp>
       <p:graphicFrame>
         <p:nvGraphicFramePr>
-          <p:cNvPr id="5" name="Table 0"/>
+          <p:cNvPr id="6" name="Table 0"/>
           <p:cNvGraphicFramePr>
             <a:graphicFrameLocks noGrp="1"/>
           </p:cNvGraphicFramePr>
@@ -10106,363 +11722,6 @@
                 <a:ea typeface="Calibri" pitchFamily="34" charset="-122"/>
                 <a:cs typeface="Calibri" pitchFamily="34" charset="-120"/>
               </a:rPr>
-              <a:t>4</a:t>
-            </a:r>
-            <a:endParaRPr lang="en-US" sz="1000" dirty="0"/>
-          </a:p>
-        </p:txBody>
-      </p:sp>
-    </p:spTree>
-  </p:cSld>
-  <p:clrMapOvr>
-    <a:masterClrMapping/>
-  </p:clrMapOvr>
-</p:sld>
-</file>
-
-<file path=ppt/slides/slide5.xml><?xml version="1.0" encoding="utf-8"?>
-<p:sld xmlns:a="http://schemas.openxmlformats.org/drawingml/2006/main" xmlns:r="http://schemas.openxmlformats.org/officeDocument/2006/relationships" xmlns:p="http://schemas.openxmlformats.org/presentationml/2006/main">
-  <p:cSld name="Slide 5">
-    <p:bg>
-      <p:bgPr>
-        <a:solidFill>
-          <a:srgbClr val="F7F5F1"/>
-        </a:solidFill>
-      </p:bgPr>
-    </p:bg>
-    <p:spTree>
-      <p:nvGrpSpPr>
-        <p:cNvPr id="1" name=""/>
-        <p:cNvGrpSpPr/>
-        <p:nvPr/>
-      </p:nvGrpSpPr>
-      <p:grpSpPr>
-        <a:xfrm>
-          <a:off x="0" y="0"/>
-          <a:ext cx="0" cy="0"/>
-          <a:chOff x="0" y="0"/>
-          <a:chExt cx="0" cy="0"/>
-        </a:xfrm>
-      </p:grpSpPr>
-      <p:sp>
-        <p:nvSpPr>
-          <p:cNvPr id="2" name="Shape 0"/>
-          <p:cNvSpPr/>
-          <p:nvPr/>
-        </p:nvSpPr>
-        <p:spPr>
-          <a:xfrm>
-            <a:off x="640080" y="502920"/>
-            <a:ext cx="164592" cy="310896"/>
-          </a:xfrm>
-          <a:prstGeom prst="rect">
-            <a:avLst/>
-          </a:prstGeom>
-          <a:solidFill>
-            <a:srgbClr val="C0561B"/>
-          </a:solidFill>
-          <a:ln/>
-        </p:spPr>
-      </p:sp>
-      <p:sp>
-        <p:nvSpPr>
-          <p:cNvPr id="3" name="Text 1"/>
-          <p:cNvSpPr/>
-          <p:nvPr/>
-        </p:nvSpPr>
-        <p:spPr>
-          <a:xfrm>
-            <a:off x="896112" y="502920"/>
-            <a:ext cx="8229600" cy="310896"/>
-          </a:xfrm>
-          <a:prstGeom prst="rect">
-            <a:avLst/>
-          </a:prstGeom>
-          <a:noFill/>
-          <a:ln/>
-        </p:spPr>
-        <p:txBody>
-          <a:bodyPr wrap="square" lIns="0" tIns="0" rIns="0" bIns="0" rtlCol="0" anchor="ctr"/>
-          <a:lstStyle/>
-          <a:p>
-            <a:pPr indent="0" marL="0">
-              <a:buNone/>
-            </a:pPr>
-            <a:r>
-              <a:rPr lang="en-US" sz="1200" b="1" spc="300" kern="0" dirty="0">
-                <a:solidFill>
-                  <a:srgbClr val="C0561B"/>
-                </a:solidFill>
-                <a:latin typeface="Calibri" pitchFamily="34" charset="0"/>
-                <a:ea typeface="Calibri" pitchFamily="34" charset="-122"/>
-                <a:cs typeface="Calibri" pitchFamily="34" charset="-120"/>
-              </a:rPr>
-              <a:t>WHY IT MATTERS</a:t>
-            </a:r>
-            <a:endParaRPr lang="en-US" sz="1200" dirty="0"/>
-          </a:p>
-        </p:txBody>
-      </p:sp>
-      <p:sp>
-        <p:nvSpPr>
-          <p:cNvPr id="4" name="Text 2"/>
-          <p:cNvSpPr/>
-          <p:nvPr/>
-        </p:nvSpPr>
-        <p:spPr>
-          <a:xfrm>
-            <a:off x="640080" y="868680"/>
-            <a:ext cx="10881360" cy="914400"/>
-          </a:xfrm>
-          <a:prstGeom prst="rect">
-            <a:avLst/>
-          </a:prstGeom>
-          <a:noFill/>
-          <a:ln/>
-        </p:spPr>
-        <p:txBody>
-          <a:bodyPr wrap="square" lIns="0" tIns="0" rIns="0" bIns="0" rtlCol="0" anchor="ctr"/>
-          <a:lstStyle/>
-          <a:p>
-            <a:pPr indent="0" marL="0">
-              <a:lnSpc>
-                <a:spcPts val="3400"/>
-              </a:lnSpc>
-              <a:buNone/>
-            </a:pPr>
-            <a:r>
-              <a:rPr lang="en-US" sz="3000" b="1" dirty="0">
-                <a:solidFill>
-                  <a:srgbClr val="1B2B31"/>
-                </a:solidFill>
-                <a:latin typeface="Georgia" pitchFamily="34" charset="0"/>
-                <a:ea typeface="Georgia" pitchFamily="34" charset="-122"/>
-                <a:cs typeface="Georgia" pitchFamily="34" charset="-120"/>
-              </a:rPr>
-              <a:t>The end-stage “collapse” rides on organ-wide procurement stress</a:t>
-            </a:r>
-            <a:endParaRPr lang="en-US" sz="3000" dirty="0"/>
-          </a:p>
-        </p:txBody>
-      </p:sp>
-      <p:graphicFrame>
-        <p:nvGraphicFramePr>
-          <p:cNvPr id="5" name="Chart 0" descr=""/>
-          <p:cNvGraphicFramePr/>
-          <p:nvPr/>
-        </p:nvGraphicFramePr>
-        <p:xfrm>
-          <a:off x="640080" y="1965960"/>
-          <a:ext cx="6949440" cy="4023360"/>
-        </p:xfrm>
-        <a:graphic xmlns:a="http://schemas.openxmlformats.org/drawingml/2006/main">
-          <a:graphicData uri="http://schemas.openxmlformats.org/drawingml/2006/chart">
-            <c:chart xmlns:c="http://schemas.openxmlformats.org/drawingml/2006/chart" r:id="rId1"/>
-          </a:graphicData>
-        </a:graphic>
-      </p:graphicFrame>
-      <p:sp>
-        <p:nvSpPr>
-          <p:cNvPr id="6" name="Text 3"/>
-          <p:cNvSpPr/>
-          <p:nvPr/>
-        </p:nvSpPr>
-        <p:spPr>
-          <a:xfrm>
-            <a:off x="640080" y="5897880"/>
-            <a:ext cx="6949440" cy="365760"/>
-          </a:xfrm>
-          <a:prstGeom prst="rect">
-            <a:avLst/>
-          </a:prstGeom>
-          <a:noFill/>
-          <a:ln/>
-        </p:spPr>
-        <p:txBody>
-          <a:bodyPr wrap="square" lIns="0" tIns="0" rIns="0" bIns="0" rtlCol="0" anchor="ctr"/>
-          <a:lstStyle/>
-          <a:p>
-            <a:pPr algn="ctr" indent="0" marL="0">
-              <a:buNone/>
-            </a:pPr>
-            <a:r>
-              <a:rPr lang="en-US" sz="1200" i="1" dirty="0">
-                <a:solidFill>
-                  <a:srgbClr val="5C6E73"/>
-                </a:solidFill>
-                <a:latin typeface="Calibri" pitchFamily="34" charset="0"/>
-                <a:ea typeface="Calibri" pitchFamily="34" charset="-122"/>
-                <a:cs typeface="Calibri" pitchFamily="34" charset="-120"/>
-              </a:rPr>
-              <a:t>raw stress UMIs per 10⁴ by lineage (donor-median); explant/biopsy ≈ 5–21× across lineages</a:t>
-            </a:r>
-            <a:endParaRPr lang="en-US" sz="1200" dirty="0"/>
-          </a:p>
-        </p:txBody>
-      </p:sp>
-      <p:sp>
-        <p:nvSpPr>
-          <p:cNvPr id="7" name="Shape 4"/>
-          <p:cNvSpPr/>
-          <p:nvPr/>
-        </p:nvSpPr>
-        <p:spPr>
-          <a:xfrm>
-            <a:off x="7955280" y="1965960"/>
-            <a:ext cx="3566160" cy="4023360"/>
-          </a:xfrm>
-          <a:prstGeom prst="roundRect">
-            <a:avLst>
-              <a:gd name="adj" fmla="val 2051"/>
-            </a:avLst>
-          </a:prstGeom>
-          <a:solidFill>
-            <a:srgbClr val="123F47"/>
-          </a:solidFill>
-          <a:ln/>
-          <a:effectLst>
-            <a:outerShdw sx="100000" sy="100000" kx="0" ky="0" algn="bl" rotWithShape="0" blurRad="88900" dist="38100" dir="8100000">
-              <a:srgbClr val="000000">
-                <a:alpha val="13000"/>
-              </a:srgbClr>
-            </a:outerShdw>
-          </a:effectLst>
-        </p:spPr>
-      </p:sp>
-      <p:sp>
-        <p:nvSpPr>
-          <p:cNvPr id="8" name="Text 5"/>
-          <p:cNvSpPr/>
-          <p:nvPr/>
-        </p:nvSpPr>
-        <p:spPr>
-          <a:xfrm>
-            <a:off x="8183880" y="2240280"/>
-            <a:ext cx="3108960" cy="3474720"/>
-          </a:xfrm>
-          <a:prstGeom prst="rect">
-            <a:avLst/>
-          </a:prstGeom>
-          <a:noFill/>
-          <a:ln/>
-        </p:spPr>
-        <p:txBody>
-          <a:bodyPr wrap="square" lIns="0" tIns="0" rIns="0" bIns="0" rtlCol="0" anchor="t"/>
-          <a:lstStyle/>
-          <a:p>
-            <a:pPr indent="0" marL="0">
-              <a:lnSpc>
-                <a:spcPts val="2100"/>
-              </a:lnSpc>
-              <a:buNone/>
-            </a:pPr>
-            <a:r>
-              <a:rPr lang="en-US" sz="1700" b="1" dirty="0">
-                <a:solidFill>
-                  <a:srgbClr val="C0561B"/>
-                </a:solidFill>
-                <a:latin typeface="Calibri" pitchFamily="34" charset="0"/>
-                <a:ea typeface="Calibri" pitchFamily="34" charset="-122"/>
-                <a:cs typeface="Calibri" pitchFamily="34" charset="-120"/>
-              </a:rPr>
-              <a:t>Endothelial cells</a:t>
-            </a:r>
-            <a:endParaRPr lang="en-US" sz="1450" dirty="0"/>
-          </a:p>
-          <a:p>
-            <a:pPr indent="0" marL="0">
-              <a:lnSpc>
-                <a:spcPts val="2100"/>
-              </a:lnSpc>
-              <a:buNone/>
-            </a:pPr>
-            <a:r>
-              <a:rPr lang="en-US" sz="1450" dirty="0">
-                <a:solidFill>
-                  <a:srgbClr val="FFFFFF"/>
-                </a:solidFill>
-                <a:latin typeface="Calibri" pitchFamily="34" charset="0"/>
-                <a:ea typeface="Calibri" pitchFamily="34" charset="-122"/>
-                <a:cs typeface="Calibri" pitchFamily="34" charset="-120"/>
-              </a:rPr>
-              <a:t>— irrelevant to hepatocyte zonation — are as stressed as hepatocytes.
-</a:t>
-            </a:r>
-            <a:endParaRPr lang="en-US" sz="1450" dirty="0"/>
-          </a:p>
-          <a:p>
-            <a:pPr indent="0" marL="0">
-              <a:lnSpc>
-                <a:spcPts val="2100"/>
-              </a:lnSpc>
-              <a:buNone/>
-            </a:pPr>
-            <a:r>
-              <a:rPr lang="en-US" sz="1450" dirty="0">
-                <a:solidFill>
-                  <a:srgbClr val="D7E6E8"/>
-                </a:solidFill>
-                <a:latin typeface="Calibri" pitchFamily="34" charset="0"/>
-                <a:ea typeface="Calibri" pitchFamily="34" charset="-122"/>
-                <a:cs typeface="Calibri" pitchFamily="34" charset="-120"/>
-              </a:rPr>
-              <a:t>⇒ organ-level ischemia / handling, not a hepatocyte disease program.
-</a:t>
-            </a:r>
-            <a:pPr indent="0" marL="0">
-              <a:lnSpc>
-                <a:spcPts val="2100"/>
-              </a:lnSpc>
-              <a:buNone/>
-            </a:pPr>
-            <a:r>
-              <a:rPr lang="en-US" sz="1450" b="1" dirty="0">
-                <a:solidFill>
-                  <a:srgbClr val="FFFFFF"/>
-                </a:solidFill>
-                <a:latin typeface="Calibri" pitchFamily="34" charset="0"/>
-                <a:ea typeface="Calibri" pitchFamily="34" charset="-122"/>
-                <a:cs typeface="Calibri" pitchFamily="34" charset="-120"/>
-              </a:rPr>
-              <a:t>End-stage excluded as a disease endpoint.</a:t>
-            </a:r>
-            <a:endParaRPr lang="en-US" sz="1450" dirty="0"/>
-          </a:p>
-        </p:txBody>
-      </p:sp>
-      <p:sp>
-        <p:nvSpPr>
-          <p:cNvPr id="9" name="Text 6"/>
-          <p:cNvSpPr/>
-          <p:nvPr/>
-        </p:nvSpPr>
-        <p:spPr>
-          <a:xfrm>
-            <a:off x="11612880" y="6355080"/>
-            <a:ext cx="457200" cy="320040"/>
-          </a:xfrm>
-          <a:prstGeom prst="rect">
-            <a:avLst/>
-          </a:prstGeom>
-          <a:noFill/>
-          <a:ln/>
-        </p:spPr>
-        <p:txBody>
-          <a:bodyPr wrap="square" rtlCol="0" anchor="ctr"/>
-          <a:lstStyle/>
-          <a:p>
-            <a:pPr algn="r" indent="0" marL="0">
-              <a:buNone/>
-            </a:pPr>
-            <a:r>
-              <a:rPr lang="en-US" sz="1000" dirty="0">
-                <a:solidFill>
-                  <a:srgbClr val="5C6E73"/>
-                </a:solidFill>
-                <a:latin typeface="Calibri" pitchFamily="34" charset="0"/>
-                <a:ea typeface="Calibri" pitchFamily="34" charset="-122"/>
-                <a:cs typeface="Calibri" pitchFamily="34" charset="-120"/>
-              </a:rPr>
               <a:t>5</a:t>
             </a:r>
             <a:endParaRPr lang="en-US" sz="1000" dirty="0"/>
@@ -10516,7 +11775,7 @@
             <a:avLst/>
           </a:prstGeom>
           <a:solidFill>
-            <a:srgbClr val="1B6E78"/>
+            <a:srgbClr val="C0561B"/>
           </a:solidFill>
           <a:ln/>
         </p:spPr>
@@ -10548,13 +11807,13 @@
             <a:r>
               <a:rPr lang="en-US" sz="1200" b="1" spc="300" kern="0" dirty="0">
                 <a:solidFill>
-                  <a:srgbClr val="1B6E78"/>
+                  <a:srgbClr val="C0561B"/>
                 </a:solidFill>
                 <a:latin typeface="Calibri" pitchFamily="34" charset="0"/>
                 <a:ea typeface="Calibri" pitchFamily="34" charset="-122"/>
                 <a:cs typeface="Calibri" pitchFamily="34" charset="-120"/>
               </a:rPr>
-              <a:t>HOW WE MEASURED</a:t>
+              <a:t>WHY IT MATTERS</a:t>
             </a:r>
             <a:endParaRPr lang="en-US" sz="1200" dirty="0"/>
           </a:p>
@@ -10596,30 +11855,85 @@
                 <a:ea typeface="Georgia" pitchFamily="34" charset="-122"/>
                 <a:cs typeface="Georgia" pitchFamily="34" charset="-120"/>
               </a:rPr>
-              <a:t>We changed the measurement, not just the plot</a:t>
+              <a:t>The end-stage “collapse” rides on organ-wide procurement stress</a:t>
             </a:r>
             <a:endParaRPr lang="en-US" sz="3000" dirty="0"/>
           </a:p>
         </p:txBody>
       </p:sp>
-      <p:sp>
-        <p:nvSpPr>
-          <p:cNvPr id="5" name="Shape 3"/>
-          <p:cNvSpPr/>
-          <p:nvPr/>
-        </p:nvSpPr>
-        <p:spPr>
-          <a:xfrm>
-            <a:off x="640080" y="2057400"/>
-            <a:ext cx="5486400" cy="1783080"/>
+      <p:graphicFrame>
+        <p:nvGraphicFramePr>
+          <p:cNvPr id="5" name="Chart 0" descr=""/>
+          <p:cNvGraphicFramePr/>
+          <p:nvPr/>
+        </p:nvGraphicFramePr>
+        <p:xfrm>
+          <a:off x="640080" y="1965960"/>
+          <a:ext cx="6949440" cy="4023360"/>
+        </p:xfrm>
+        <a:graphic xmlns:a="http://schemas.openxmlformats.org/drawingml/2006/main">
+          <a:graphicData uri="http://schemas.openxmlformats.org/drawingml/2006/chart">
+            <c:chart xmlns:c="http://schemas.openxmlformats.org/drawingml/2006/chart" r:id="rId1"/>
+          </a:graphicData>
+        </a:graphic>
+      </p:graphicFrame>
+      <p:sp>
+        <p:nvSpPr>
+          <p:cNvPr id="6" name="Text 3"/>
+          <p:cNvSpPr/>
+          <p:nvPr/>
+        </p:nvSpPr>
+        <p:spPr>
+          <a:xfrm>
+            <a:off x="640080" y="5897880"/>
+            <a:ext cx="6949440" cy="365760"/>
+          </a:xfrm>
+          <a:prstGeom prst="rect">
+            <a:avLst/>
+          </a:prstGeom>
+          <a:noFill/>
+          <a:ln/>
+        </p:spPr>
+        <p:txBody>
+          <a:bodyPr wrap="square" lIns="0" tIns="0" rIns="0" bIns="0" rtlCol="0" anchor="ctr"/>
+          <a:lstStyle/>
+          <a:p>
+            <a:pPr algn="ctr" indent="0" marL="0">
+              <a:buNone/>
+            </a:pPr>
+            <a:r>
+              <a:rPr lang="en-US" sz="1200" i="1" dirty="0">
+                <a:solidFill>
+                  <a:srgbClr val="5C6E73"/>
+                </a:solidFill>
+                <a:latin typeface="Calibri" pitchFamily="34" charset="0"/>
+                <a:ea typeface="Calibri" pitchFamily="34" charset="-122"/>
+                <a:cs typeface="Calibri" pitchFamily="34" charset="-120"/>
+              </a:rPr>
+              <a:t>raw stress UMIs per 10⁴ by lineage (donor-median); explant/biopsy ≈ 5–21× across lineages</a:t>
+            </a:r>
+            <a:endParaRPr lang="en-US" sz="1200" dirty="0"/>
+          </a:p>
+        </p:txBody>
+      </p:sp>
+      <p:sp>
+        <p:nvSpPr>
+          <p:cNvPr id="7" name="Shape 4"/>
+          <p:cNvSpPr/>
+          <p:nvPr/>
+        </p:nvSpPr>
+        <p:spPr>
+          <a:xfrm>
+            <a:off x="7955280" y="1965960"/>
+            <a:ext cx="3566160" cy="4023360"/>
           </a:xfrm>
           <a:prstGeom prst="roundRect">
             <a:avLst>
-              <a:gd name="adj" fmla="val 3590"/>
+              <a:gd name="adj" fmla="val 2051"/>
             </a:avLst>
           </a:prstGeom>
           <a:solidFill>
-            <a:srgbClr val="FFFFFF"/>
+            <a:srgbClr val="123F47"/>
           </a:solidFill>
           <a:ln/>
           <a:effectLst>
@@ -10633,34 +11947,14 @@
       </p:sp>
       <p:sp>
         <p:nvSpPr>
-          <p:cNvPr id="6" name="Shape 4"/>
-          <p:cNvSpPr/>
-          <p:nvPr/>
-        </p:nvSpPr>
-        <p:spPr>
-          <a:xfrm>
-            <a:off x="640080" y="2057400"/>
-            <a:ext cx="109728" cy="1783080"/>
-          </a:xfrm>
-          <a:prstGeom prst="rect">
-            <a:avLst/>
-          </a:prstGeom>
-          <a:solidFill>
-            <a:srgbClr val="1B6E78"/>
-          </a:solidFill>
-          <a:ln/>
-        </p:spPr>
-      </p:sp>
-      <p:sp>
-        <p:nvSpPr>
-          <p:cNvPr id="7" name="Text 5"/>
-          <p:cNvSpPr/>
-          <p:nvPr/>
-        </p:nvSpPr>
-        <p:spPr>
-          <a:xfrm>
-            <a:off x="960120" y="2258568"/>
-            <a:ext cx="4937760" cy="457200"/>
+          <p:cNvPr id="8" name="Text 5"/>
+          <p:cNvSpPr/>
+          <p:nvPr/>
+        </p:nvSpPr>
+        <p:spPr>
+          <a:xfrm>
+            <a:off x="8183880" y="2240280"/>
+            <a:ext cx="3108960" cy="3474720"/>
           </a:xfrm>
           <a:prstGeom prst="rect">
             <a:avLst/>
@@ -10669,462 +11963,92 @@
           <a:ln/>
         </p:spPr>
         <p:txBody>
-          <a:bodyPr wrap="square" lIns="0" tIns="0" rIns="0" bIns="0" rtlCol="0" anchor="ctr"/>
-          <a:lstStyle/>
-          <a:p>
-            <a:pPr indent="0" marL="0">
-              <a:buNone/>
-            </a:pPr>
-            <a:r>
-              <a:rPr lang="en-US" sz="1800" b="1" dirty="0">
-                <a:solidFill>
-                  <a:srgbClr val="1B2B31"/>
-                </a:solidFill>
-                <a:latin typeface="Georgia" pitchFamily="34" charset="0"/>
-                <a:ea typeface="Georgia" pitchFamily="34" charset="-122"/>
-                <a:cs typeface="Georgia" pitchFamily="34" charset="-120"/>
-              </a:rPr>
-              <a:t>Raw UMI counts</a:t>
-            </a:r>
-            <a:endParaRPr lang="en-US" sz="1800" dirty="0"/>
-          </a:p>
-        </p:txBody>
-      </p:sp>
-      <p:sp>
-        <p:nvSpPr>
-          <p:cNvPr id="8" name="Text 6"/>
-          <p:cNvSpPr/>
-          <p:nvPr/>
-        </p:nvSpPr>
-        <p:spPr>
-          <a:xfrm>
-            <a:off x="960120" y="2770632"/>
-            <a:ext cx="4937760" cy="914400"/>
-          </a:xfrm>
-          <a:prstGeom prst="rect">
-            <a:avLst/>
-          </a:prstGeom>
-          <a:noFill/>
-          <a:ln/>
-        </p:spPr>
-        <p:txBody>
           <a:bodyPr wrap="square" lIns="0" tIns="0" rIns="0" bIns="0" rtlCol="0" anchor="t"/>
           <a:lstStyle/>
           <a:p>
             <a:pPr indent="0" marL="0">
               <a:lnSpc>
-                <a:spcPts val="1900"/>
+                <a:spcPts val="2100"/>
               </a:lnSpc>
               <a:buNone/>
             </a:pPr>
             <a:r>
-              <a:rPr lang="en-US" sz="1350" dirty="0">
-                <a:solidFill>
-                  <a:srgbClr val="45565B"/>
+              <a:rPr lang="en-US" sz="1700" b="1" dirty="0">
+                <a:solidFill>
+                  <a:srgbClr val="C0561B"/>
                 </a:solidFill>
                 <a:latin typeface="Calibri" pitchFamily="34" charset="0"/>
                 <a:ea typeface="Calibri" pitchFamily="34" charset="-122"/>
                 <a:cs typeface="Calibri" pitchFamily="34" charset="-120"/>
               </a:rPr>
-              <a:t>The shipped matrix is an SCT model output (depth squeezed to ~5k). We extracted real molecule counts from the RNA assay.</a:t>
-            </a:r>
-            <a:endParaRPr lang="en-US" sz="1350" dirty="0"/>
-          </a:p>
-        </p:txBody>
-      </p:sp>
-      <p:sp>
-        <p:nvSpPr>
-          <p:cNvPr id="9" name="Shape 7"/>
-          <p:cNvSpPr/>
-          <p:nvPr/>
-        </p:nvSpPr>
-        <p:spPr>
-          <a:xfrm>
-            <a:off x="6446520" y="2057400"/>
-            <a:ext cx="5486400" cy="1783080"/>
-          </a:xfrm>
-          <a:prstGeom prst="roundRect">
-            <a:avLst>
-              <a:gd name="adj" fmla="val 3590"/>
-            </a:avLst>
-          </a:prstGeom>
-          <a:solidFill>
-            <a:srgbClr val="FFFFFF"/>
-          </a:solidFill>
-          <a:ln/>
-          <a:effectLst>
-            <a:outerShdw sx="100000" sy="100000" kx="0" ky="0" algn="bl" rotWithShape="0" blurRad="88900" dist="38100" dir="8100000">
-              <a:srgbClr val="000000">
-                <a:alpha val="13000"/>
-              </a:srgbClr>
-            </a:outerShdw>
-          </a:effectLst>
-        </p:spPr>
-      </p:sp>
-      <p:sp>
-        <p:nvSpPr>
-          <p:cNvPr id="10" name="Shape 8"/>
-          <p:cNvSpPr/>
-          <p:nvPr/>
-        </p:nvSpPr>
-        <p:spPr>
-          <a:xfrm>
-            <a:off x="6446520" y="2057400"/>
-            <a:ext cx="109728" cy="1783080"/>
-          </a:xfrm>
-          <a:prstGeom prst="rect">
-            <a:avLst/>
-          </a:prstGeom>
-          <a:solidFill>
-            <a:srgbClr val="C0561B"/>
-          </a:solidFill>
-          <a:ln/>
-        </p:spPr>
-      </p:sp>
-      <p:sp>
-        <p:nvSpPr>
-          <p:cNvPr id="11" name="Text 9"/>
-          <p:cNvSpPr/>
-          <p:nvPr/>
-        </p:nvSpPr>
-        <p:spPr>
-          <a:xfrm>
-            <a:off x="6766560" y="2258568"/>
-            <a:ext cx="4937760" cy="457200"/>
-          </a:xfrm>
-          <a:prstGeom prst="rect">
-            <a:avLst/>
-          </a:prstGeom>
-          <a:noFill/>
-          <a:ln/>
-        </p:spPr>
-        <p:txBody>
-          <a:bodyPr wrap="square" lIns="0" tIns="0" rIns="0" bIns="0" rtlCol="0" anchor="ctr"/>
-          <a:lstStyle/>
-          <a:p>
-            <a:pPr indent="0" marL="0">
-              <a:buNone/>
-            </a:pPr>
-            <a:r>
-              <a:rPr lang="en-US" sz="1800" b="1" dirty="0">
-                <a:solidFill>
-                  <a:srgbClr val="1B2B31"/>
-                </a:solidFill>
-                <a:latin typeface="Georgia" pitchFamily="34" charset="0"/>
-                <a:ea typeface="Georgia" pitchFamily="34" charset="-122"/>
-                <a:cs typeface="Georgia" pitchFamily="34" charset="-120"/>
-              </a:rPr>
-              <a:t>Depth-matched</a:t>
-            </a:r>
-            <a:endParaRPr lang="en-US" sz="1800" dirty="0"/>
-          </a:p>
-        </p:txBody>
-      </p:sp>
-      <p:sp>
-        <p:nvSpPr>
-          <p:cNvPr id="12" name="Text 10"/>
-          <p:cNvSpPr/>
-          <p:nvPr/>
-        </p:nvSpPr>
-        <p:spPr>
-          <a:xfrm>
-            <a:off x="6766560" y="2770632"/>
-            <a:ext cx="4937760" cy="914400"/>
-          </a:xfrm>
-          <a:prstGeom prst="rect">
-            <a:avLst/>
-          </a:prstGeom>
-          <a:noFill/>
-          <a:ln/>
-        </p:spPr>
-        <p:txBody>
-          <a:bodyPr wrap="square" lIns="0" tIns="0" rIns="0" bIns="0" rtlCol="0" anchor="t"/>
-          <a:lstStyle/>
+              <a:t>Endothelial cells</a:t>
+            </a:r>
+            <a:endParaRPr lang="en-US" sz="1450" dirty="0"/>
+          </a:p>
           <a:p>
             <a:pPr indent="0" marL="0">
               <a:lnSpc>
-                <a:spcPts val="1900"/>
+                <a:spcPts val="2100"/>
               </a:lnSpc>
               <a:buNone/>
             </a:pPr>
             <a:r>
-              <a:rPr lang="en-US" sz="1350" dirty="0">
-                <a:solidFill>
-                  <a:srgbClr val="45565B"/>
+              <a:rPr lang="en-US" sz="1450" dirty="0">
+                <a:solidFill>
+                  <a:srgbClr val="FFFFFF"/>
                 </a:solidFill>
                 <a:latin typeface="Calibri" pitchFamily="34" charset="0"/>
                 <a:ea typeface="Calibri" pitchFamily="34" charset="-122"/>
                 <a:cs typeface="Calibri" pitchFamily="34" charset="-120"/>
               </a:rPr>
-              <a:t>Downsample every nucleus to a common budget so detection differences reflect biology, not sequencing depth. Averaged over draws.</a:t>
-            </a:r>
-            <a:endParaRPr lang="en-US" sz="1350" dirty="0"/>
-          </a:p>
-        </p:txBody>
-      </p:sp>
-      <p:sp>
-        <p:nvSpPr>
-          <p:cNvPr id="13" name="Shape 11"/>
-          <p:cNvSpPr/>
-          <p:nvPr/>
-        </p:nvSpPr>
-        <p:spPr>
-          <a:xfrm>
-            <a:off x="640080" y="4114800"/>
-            <a:ext cx="5486400" cy="1783080"/>
-          </a:xfrm>
-          <a:prstGeom prst="roundRect">
-            <a:avLst>
-              <a:gd name="adj" fmla="val 3590"/>
-            </a:avLst>
-          </a:prstGeom>
-          <a:solidFill>
-            <a:srgbClr val="FFFFFF"/>
-          </a:solidFill>
-          <a:ln/>
-          <a:effectLst>
-            <a:outerShdw sx="100000" sy="100000" kx="0" ky="0" algn="bl" rotWithShape="0" blurRad="88900" dist="38100" dir="8100000">
-              <a:srgbClr val="000000">
-                <a:alpha val="13000"/>
-              </a:srgbClr>
-            </a:outerShdw>
-          </a:effectLst>
-        </p:spPr>
-      </p:sp>
-      <p:sp>
-        <p:nvSpPr>
-          <p:cNvPr id="14" name="Shape 12"/>
-          <p:cNvSpPr/>
-          <p:nvPr/>
-        </p:nvSpPr>
-        <p:spPr>
-          <a:xfrm>
-            <a:off x="640080" y="4114800"/>
-            <a:ext cx="109728" cy="1783080"/>
-          </a:xfrm>
-          <a:prstGeom prst="rect">
-            <a:avLst/>
-          </a:prstGeom>
-          <a:solidFill>
-            <a:srgbClr val="1B6E78"/>
-          </a:solidFill>
-          <a:ln/>
-        </p:spPr>
-      </p:sp>
-      <p:sp>
-        <p:nvSpPr>
-          <p:cNvPr id="15" name="Text 13"/>
-          <p:cNvSpPr/>
-          <p:nvPr/>
-        </p:nvSpPr>
-        <p:spPr>
-          <a:xfrm>
-            <a:off x="960120" y="4315968"/>
-            <a:ext cx="4937760" cy="457200"/>
-          </a:xfrm>
-          <a:prstGeom prst="rect">
-            <a:avLst/>
-          </a:prstGeom>
-          <a:noFill/>
-          <a:ln/>
-        </p:spPr>
-        <p:txBody>
-          <a:bodyPr wrap="square" lIns="0" tIns="0" rIns="0" bIns="0" rtlCol="0" anchor="ctr"/>
-          <a:lstStyle/>
-          <a:p>
-            <a:pPr indent="0" marL="0">
-              <a:buNone/>
-            </a:pPr>
-            <a:r>
-              <a:rPr lang="en-US" sz="1800" b="1" dirty="0">
-                <a:solidFill>
-                  <a:srgbClr val="1B2B31"/>
-                </a:solidFill>
-                <a:latin typeface="Georgia" pitchFamily="34" charset="0"/>
-                <a:ea typeface="Georgia" pitchFamily="34" charset="-122"/>
-                <a:cs typeface="Georgia" pitchFamily="34" charset="-120"/>
-              </a:rPr>
-              <a:t>Donor is the unit</a:t>
-            </a:r>
-            <a:endParaRPr lang="en-US" sz="1800" dirty="0"/>
-          </a:p>
-        </p:txBody>
-      </p:sp>
-      <p:sp>
-        <p:nvSpPr>
-          <p:cNvPr id="16" name="Text 14"/>
-          <p:cNvSpPr/>
-          <p:nvPr/>
-        </p:nvSpPr>
-        <p:spPr>
-          <a:xfrm>
-            <a:off x="960120" y="4828032"/>
-            <a:ext cx="4937760" cy="914400"/>
-          </a:xfrm>
-          <a:prstGeom prst="rect">
-            <a:avLst/>
-          </a:prstGeom>
-          <a:noFill/>
-          <a:ln/>
-        </p:spPr>
-        <p:txBody>
-          <a:bodyPr wrap="square" lIns="0" tIns="0" rIns="0" bIns="0" rtlCol="0" anchor="t"/>
-          <a:lstStyle/>
+              <a:t>— irrelevant to hepatocyte zonation — are as stressed as hepatocytes.
+</a:t>
+            </a:r>
+            <a:endParaRPr lang="en-US" sz="1450" dirty="0"/>
+          </a:p>
           <a:p>
             <a:pPr indent="0" marL="0">
               <a:lnSpc>
-                <a:spcPts val="1900"/>
+                <a:spcPts val="2100"/>
               </a:lnSpc>
               <a:buNone/>
             </a:pPr>
             <a:r>
-              <a:rPr lang="en-US" sz="1350" dirty="0">
-                <a:solidFill>
-                  <a:srgbClr val="45565B"/>
+              <a:rPr lang="en-US" sz="1450" dirty="0">
+                <a:solidFill>
+                  <a:srgbClr val="D7E6E8"/>
                 </a:solidFill>
                 <a:latin typeface="Calibri" pitchFamily="34" charset="0"/>
                 <a:ea typeface="Calibri" pitchFamily="34" charset="-122"/>
                 <a:cs typeface="Calibri" pitchFamily="34" charset="-120"/>
               </a:rPr>
-              <a:t>Inference at the donor level (~47), never the cell — no pseudoreplication of tens of thousands of nuclei.</a:t>
-            </a:r>
-            <a:endParaRPr lang="en-US" sz="1350" dirty="0"/>
-          </a:p>
-        </p:txBody>
-      </p:sp>
-      <p:sp>
-        <p:nvSpPr>
-          <p:cNvPr id="17" name="Shape 15"/>
-          <p:cNvSpPr/>
-          <p:nvPr/>
-        </p:nvSpPr>
-        <p:spPr>
-          <a:xfrm>
-            <a:off x="6446520" y="4114800"/>
-            <a:ext cx="5486400" cy="1783080"/>
-          </a:xfrm>
-          <a:prstGeom prst="roundRect">
-            <a:avLst>
-              <a:gd name="adj" fmla="val 3590"/>
-            </a:avLst>
-          </a:prstGeom>
-          <a:solidFill>
-            <a:srgbClr val="FFFFFF"/>
-          </a:solidFill>
-          <a:ln/>
-          <a:effectLst>
-            <a:outerShdw sx="100000" sy="100000" kx="0" ky="0" algn="bl" rotWithShape="0" blurRad="88900" dist="38100" dir="8100000">
-              <a:srgbClr val="000000">
-                <a:alpha val="13000"/>
-              </a:srgbClr>
-            </a:outerShdw>
-          </a:effectLst>
-        </p:spPr>
-      </p:sp>
-      <p:sp>
-        <p:nvSpPr>
-          <p:cNvPr id="18" name="Shape 16"/>
-          <p:cNvSpPr/>
-          <p:nvPr/>
-        </p:nvSpPr>
-        <p:spPr>
-          <a:xfrm>
-            <a:off x="6446520" y="4114800"/>
-            <a:ext cx="109728" cy="1783080"/>
-          </a:xfrm>
-          <a:prstGeom prst="rect">
-            <a:avLst/>
-          </a:prstGeom>
-          <a:solidFill>
-            <a:srgbClr val="C0561B"/>
-          </a:solidFill>
-          <a:ln/>
-        </p:spPr>
-      </p:sp>
-      <p:sp>
-        <p:nvSpPr>
-          <p:cNvPr id="19" name="Text 17"/>
-          <p:cNvSpPr/>
-          <p:nvPr/>
-        </p:nvSpPr>
-        <p:spPr>
-          <a:xfrm>
-            <a:off x="6766560" y="4315968"/>
-            <a:ext cx="4937760" cy="457200"/>
-          </a:xfrm>
-          <a:prstGeom prst="rect">
-            <a:avLst/>
-          </a:prstGeom>
-          <a:noFill/>
-          <a:ln/>
-        </p:spPr>
-        <p:txBody>
-          <a:bodyPr wrap="square" lIns="0" tIns="0" rIns="0" bIns="0" rtlCol="0" anchor="ctr"/>
-          <a:lstStyle/>
-          <a:p>
-            <a:pPr indent="0" marL="0">
-              <a:buNone/>
-            </a:pPr>
-            <a:r>
-              <a:rPr lang="en-US" sz="1800" b="1" dirty="0">
-                <a:solidFill>
-                  <a:srgbClr val="1B2B31"/>
-                </a:solidFill>
-                <a:latin typeface="Georgia" pitchFamily="34" charset="0"/>
-                <a:ea typeface="Georgia" pitchFamily="34" charset="-122"/>
-                <a:cs typeface="Georgia" pitchFamily="34" charset="-120"/>
-              </a:rPr>
-              <a:t>Counts, not summaries</a:t>
-            </a:r>
-            <a:endParaRPr lang="en-US" sz="1800" dirty="0"/>
-          </a:p>
-        </p:txBody>
-      </p:sp>
-      <p:sp>
-        <p:nvSpPr>
-          <p:cNvPr id="20" name="Text 18"/>
-          <p:cNvSpPr/>
-          <p:nvPr/>
-        </p:nvSpPr>
-        <p:spPr>
-          <a:xfrm>
-            <a:off x="6766560" y="4828032"/>
-            <a:ext cx="4937760" cy="914400"/>
-          </a:xfrm>
-          <a:prstGeom prst="rect">
-            <a:avLst/>
-          </a:prstGeom>
-          <a:noFill/>
-          <a:ln/>
-        </p:spPr>
-        <p:txBody>
-          <a:bodyPr wrap="square" lIns="0" tIns="0" rIns="0" bIns="0" rtlCol="0" anchor="t"/>
-          <a:lstStyle/>
-          <a:p>
+              <a:t>⇒ organ-level ischemia / handling, not a hepatocyte disease program.
+</a:t>
+            </a:r>
             <a:pPr indent="0" marL="0">
               <a:lnSpc>
-                <a:spcPts val="1900"/>
+                <a:spcPts val="2100"/>
               </a:lnSpc>
               <a:buNone/>
             </a:pPr>
             <a:r>
-              <a:rPr lang="en-US" sz="1350" dirty="0">
-                <a:solidFill>
-                  <a:srgbClr val="45565B"/>
+              <a:rPr lang="en-US" sz="1450" b="1" dirty="0">
+                <a:solidFill>
+                  <a:srgbClr val="FFFFFF"/>
                 </a:solidFill>
                 <a:latin typeface="Calibri" pitchFamily="34" charset="0"/>
                 <a:ea typeface="Calibri" pitchFamily="34" charset="-122"/>
                 <a:cs typeface="Calibri" pitchFamily="34" charset="-120"/>
               </a:rPr>
-              <a:t>Cell counts, fractions, molecule burdens — never marker correlations / spreads / z-scores that hide who moved.</a:t>
-            </a:r>
-            <a:endParaRPr lang="en-US" sz="1350" dirty="0"/>
-          </a:p>
-        </p:txBody>
-      </p:sp>
-      <p:sp>
-        <p:nvSpPr>
-          <p:cNvPr id="21" name="Text 19"/>
+              <a:t>End-stage excluded as a disease endpoint.</a:t>
+            </a:r>
+            <a:endParaRPr lang="en-US" sz="1450" dirty="0"/>
+          </a:p>
+        </p:txBody>
+      </p:sp>
+      <p:sp>
+        <p:nvSpPr>
+          <p:cNvPr id="9" name="Text 6"/>
           <p:cNvSpPr/>
           <p:nvPr/>
         </p:nvSpPr>
@@ -11208,7 +12132,7 @@
             <a:avLst/>
           </a:prstGeom>
           <a:solidFill>
-            <a:srgbClr val="1B6E78"/>
+            <a:srgbClr val="C0561B"/>
           </a:solidFill>
           <a:ln/>
         </p:spPr>
@@ -11240,13 +12164,13 @@
             <a:r>
               <a:rPr lang="en-US" sz="1200" b="1" spc="300" kern="0" dirty="0">
                 <a:solidFill>
-                  <a:srgbClr val="1B6E78"/>
+                  <a:srgbClr val="C0561B"/>
                 </a:solidFill>
                 <a:latin typeface="Calibri" pitchFamily="34" charset="0"/>
                 <a:ea typeface="Calibri" pitchFamily="34" charset="-122"/>
                 <a:cs typeface="Calibri" pitchFamily="34" charset="-120"/>
               </a:rPr>
-              <a:t>THE TEST</a:t>
+              <a:t>THE PARADOX</a:t>
             </a:r>
             <a:endParaRPr lang="en-US" sz="1200" dirty="0"/>
           </a:p>
@@ -11288,6 +12212,1259 @@
                 <a:ea typeface="Georgia" pitchFamily="34" charset="-122"/>
                 <a:cs typeface="Georgia" pitchFamily="34" charset="-120"/>
               </a:rPr>
+              <a:t>Simpson's paradox: the collapse is between groups, not within them</a:t>
+            </a:r>
+            <a:endParaRPr lang="en-US" sz="3000" dirty="0"/>
+          </a:p>
+        </p:txBody>
+      </p:sp>
+      <p:pic>
+        <p:nvPicPr>
+          <p:cNvPr id="5" name="Image 0" descr="../results/figures/h2/simpson_anticorr.png">    </p:cNvPr>
+          <p:cNvPicPr>
+            <a:picLocks noChangeAspect="1"/>
+          </p:cNvPicPr>
+          <p:nvPr/>
+        </p:nvPicPr>
+        <p:blipFill>
+          <a:blip r:embed="rId1"/>
+          <a:stretch>
+            <a:fillRect/>
+          </a:stretch>
+        </p:blipFill>
+        <p:spPr>
+          <a:xfrm>
+            <a:off x="640080" y="1783080"/>
+            <a:ext cx="7040880" cy="3584448"/>
+          </a:xfrm>
+          <a:prstGeom prst="rect">
+            <a:avLst/>
+          </a:prstGeom>
+        </p:spPr>
+      </p:pic>
+      <p:sp>
+        <p:nvSpPr>
+          <p:cNvPr id="6" name="Shape 3"/>
+          <p:cNvSpPr/>
+          <p:nvPr/>
+        </p:nvSpPr>
+        <p:spPr>
+          <a:xfrm>
+            <a:off x="7863840" y="1783080"/>
+            <a:ext cx="3657600" cy="2331720"/>
+          </a:xfrm>
+          <a:prstGeom prst="roundRect">
+            <a:avLst>
+              <a:gd name="adj" fmla="val 3137"/>
+            </a:avLst>
+          </a:prstGeom>
+          <a:solidFill>
+            <a:srgbClr val="FFFFFF"/>
+          </a:solidFill>
+          <a:ln/>
+          <a:effectLst>
+            <a:outerShdw sx="100000" sy="100000" kx="0" ky="0" algn="bl" rotWithShape="0" blurRad="88900" dist="38100" dir="8100000">
+              <a:srgbClr val="000000">
+                <a:alpha val="13000"/>
+              </a:srgbClr>
+            </a:outerShdw>
+          </a:effectLst>
+        </p:spPr>
+      </p:sp>
+      <p:sp>
+        <p:nvSpPr>
+          <p:cNvPr id="7" name="Text 4"/>
+          <p:cNvSpPr/>
+          <p:nvPr/>
+        </p:nvSpPr>
+        <p:spPr>
+          <a:xfrm>
+            <a:off x="8046720" y="1901952"/>
+            <a:ext cx="3291840" cy="320040"/>
+          </a:xfrm>
+          <a:prstGeom prst="rect">
+            <a:avLst/>
+          </a:prstGeom>
+          <a:noFill/>
+          <a:ln/>
+        </p:spPr>
+        <p:txBody>
+          <a:bodyPr wrap="square" lIns="0" tIns="0" rIns="0" bIns="0" rtlCol="0" anchor="ctr"/>
+          <a:lstStyle/>
+          <a:p>
+            <a:pPr indent="0" marL="0">
+              <a:buNone/>
+            </a:pPr>
+            <a:r>
+              <a:rPr lang="en-US" sz="1500" b="1" dirty="0">
+                <a:solidFill>
+                  <a:srgbClr val="1B6E78"/>
+                </a:solidFill>
+                <a:latin typeface="Georgia" pitchFamily="34" charset="0"/>
+                <a:ea typeface="Georgia" pitchFamily="34" charset="-122"/>
+                <a:cs typeface="Georgia" pitchFamily="34" charset="-120"/>
+              </a:rPr>
+              <a:t>The collapse dissolves</a:t>
+            </a:r>
+            <a:endParaRPr lang="en-US" sz="1500" dirty="0"/>
+          </a:p>
+        </p:txBody>
+      </p:sp>
+      <p:sp>
+        <p:nvSpPr>
+          <p:cNvPr id="8" name="Text 5"/>
+          <p:cNvSpPr/>
+          <p:nvPr/>
+        </p:nvSpPr>
+        <p:spPr>
+          <a:xfrm>
+            <a:off x="8046720" y="2286000"/>
+            <a:ext cx="3291840" cy="1737360"/>
+          </a:xfrm>
+          <a:prstGeom prst="rect">
+            <a:avLst/>
+          </a:prstGeom>
+          <a:noFill/>
+          <a:ln/>
+        </p:spPr>
+        <p:txBody>
+          <a:bodyPr wrap="square" lIns="0" tIns="0" rIns="0" bIns="0" rtlCol="0" anchor="t"/>
+          <a:lstStyle/>
+          <a:p>
+            <a:pPr indent="0" marL="0">
+              <a:lnSpc>
+                <a:spcPts val="2200"/>
+              </a:lnSpc>
+              <a:buNone/>
+            </a:pPr>
+            <a:r>
+              <a:rPr lang="en-US" sz="1350" dirty="0">
+                <a:solidFill>
+                  <a:srgbClr val="1B2B31"/>
+                </a:solidFill>
+                <a:latin typeface="Calibri" pitchFamily="34" charset="0"/>
+                <a:ea typeface="Calibri" pitchFamily="34" charset="-122"/>
+                <a:cs typeface="Calibri" pitchFamily="34" charset="-120"/>
+              </a:rPr>
+              <a:t>pooled (legacy):  </a:t>
+            </a:r>
+            <a:pPr indent="0" marL="0">
+              <a:lnSpc>
+                <a:spcPts val="2200"/>
+              </a:lnSpc>
+              <a:buNone/>
+            </a:pPr>
+            <a:r>
+              <a:rPr lang="en-US" sz="1350" b="1" dirty="0">
+                <a:solidFill>
+                  <a:srgbClr val="C0561B"/>
+                </a:solidFill>
+                <a:latin typeface="Calibri" pitchFamily="34" charset="0"/>
+                <a:ea typeface="Calibri" pitchFamily="34" charset="-122"/>
+                <a:cs typeface="Calibri" pitchFamily="34" charset="-120"/>
+              </a:rPr>
+              <a:t>+0.44, p=.002
+</a:t>
+            </a:r>
+            <a:endParaRPr lang="en-US" sz="1350" dirty="0"/>
+          </a:p>
+          <a:p>
+            <a:pPr indent="0" marL="0">
+              <a:lnSpc>
+                <a:spcPts val="2200"/>
+              </a:lnSpc>
+              <a:buNone/>
+            </a:pPr>
+            <a:r>
+              <a:rPr lang="en-US" sz="1350" dirty="0">
+                <a:solidFill>
+                  <a:srgbClr val="1B2B31"/>
+                </a:solidFill>
+                <a:latin typeface="Calibri" pitchFamily="34" charset="0"/>
+                <a:ea typeface="Calibri" pitchFamily="34" charset="-122"/>
+                <a:cs typeface="Calibri" pitchFamily="34" charset="-120"/>
+              </a:rPr>
+              <a:t>biopsy F0–F4 only:  </a:t>
+            </a:r>
+            <a:pPr indent="0" marL="0">
+              <a:lnSpc>
+                <a:spcPts val="2200"/>
+              </a:lnSpc>
+              <a:buNone/>
+            </a:pPr>
+            <a:r>
+              <a:rPr lang="en-US" sz="1350" b="1" dirty="0">
+                <a:solidFill>
+                  <a:srgbClr val="1B2B31"/>
+                </a:solidFill>
+                <a:latin typeface="Calibri" pitchFamily="34" charset="0"/>
+                <a:ea typeface="Calibri" pitchFamily="34" charset="-122"/>
+                <a:cs typeface="Calibri" pitchFamily="34" charset="-120"/>
+              </a:rPr>
+              <a:t>+0.29, p=.078 n.s.
+</a:t>
+            </a:r>
+            <a:endParaRPr lang="en-US" sz="1350" dirty="0"/>
+          </a:p>
+          <a:p>
+            <a:pPr indent="0" marL="0">
+              <a:lnSpc>
+                <a:spcPts val="2200"/>
+              </a:lnSpc>
+              <a:buNone/>
+            </a:pPr>
+            <a:r>
+              <a:rPr lang="en-US" sz="1350" dirty="0">
+                <a:solidFill>
+                  <a:srgbClr val="1B2B31"/>
+                </a:solidFill>
+                <a:latin typeface="Calibri" pitchFamily="34" charset="0"/>
+                <a:ea typeface="Calibri" pitchFamily="34" charset="-122"/>
+                <a:cs typeface="Calibri" pitchFamily="34" charset="-120"/>
+              </a:rPr>
+              <a:t>depth-matched counts:  </a:t>
+            </a:r>
+            <a:pPr indent="0" marL="0">
+              <a:lnSpc>
+                <a:spcPts val="2200"/>
+              </a:lnSpc>
+              <a:buNone/>
+            </a:pPr>
+            <a:r>
+              <a:rPr lang="en-US" sz="1350" b="1" dirty="0">
+                <a:solidFill>
+                  <a:srgbClr val="1B6E78"/>
+                </a:solidFill>
+                <a:latin typeface="Calibri" pitchFamily="34" charset="0"/>
+                <a:ea typeface="Calibri" pitchFamily="34" charset="-122"/>
+                <a:cs typeface="Calibri" pitchFamily="34" charset="-120"/>
+              </a:rPr>
+              <a:t>flat</a:t>
+            </a:r>
+            <a:endParaRPr lang="en-US" sz="1350" dirty="0"/>
+          </a:p>
+        </p:txBody>
+      </p:sp>
+      <p:sp>
+        <p:nvSpPr>
+          <p:cNvPr id="9" name="Shape 6"/>
+          <p:cNvSpPr/>
+          <p:nvPr/>
+        </p:nvSpPr>
+        <p:spPr>
+          <a:xfrm>
+            <a:off x="7863840" y="4251960"/>
+            <a:ext cx="3657600" cy="1097280"/>
+          </a:xfrm>
+          <a:prstGeom prst="roundRect">
+            <a:avLst>
+              <a:gd name="adj" fmla="val 5833"/>
+            </a:avLst>
+          </a:prstGeom>
+          <a:solidFill>
+            <a:srgbClr val="ECF1F1"/>
+          </a:solidFill>
+          <a:ln/>
+        </p:spPr>
+      </p:sp>
+      <p:sp>
+        <p:nvSpPr>
+          <p:cNvPr id="10" name="Text 7"/>
+          <p:cNvSpPr/>
+          <p:nvPr/>
+        </p:nvSpPr>
+        <p:spPr>
+          <a:xfrm>
+            <a:off x="8046720" y="4343400"/>
+            <a:ext cx="3291840" cy="914400"/>
+          </a:xfrm>
+          <a:prstGeom prst="rect">
+            <a:avLst/>
+          </a:prstGeom>
+          <a:noFill/>
+          <a:ln/>
+        </p:spPr>
+        <p:txBody>
+          <a:bodyPr wrap="square" lIns="0" tIns="0" rIns="0" bIns="0" rtlCol="0" anchor="ctr"/>
+          <a:lstStyle/>
+          <a:p>
+            <a:pPr indent="0" marL="0">
+              <a:lnSpc>
+                <a:spcPts val="1700"/>
+              </a:lnSpc>
+              <a:buNone/>
+            </a:pPr>
+            <a:r>
+              <a:rPr lang="en-US" sz="1250" b="1" dirty="0">
+                <a:solidFill>
+                  <a:srgbClr val="C0561B"/>
+                </a:solidFill>
+                <a:latin typeface="Calibri" pitchFamily="34" charset="0"/>
+                <a:ea typeface="Calibri" pitchFamily="34" charset="-122"/>
+                <a:cs typeface="Calibri" pitchFamily="34" charset="-120"/>
+              </a:rPr>
+              <a:t>Lurking variable: </a:t>
+            </a:r>
+            <a:pPr indent="0" marL="0">
+              <a:lnSpc>
+                <a:spcPts val="1700"/>
+              </a:lnSpc>
+              <a:buNone/>
+            </a:pPr>
+            <a:r>
+              <a:rPr lang="en-US" sz="1250" dirty="0">
+                <a:solidFill>
+                  <a:srgbClr val="1B2B31"/>
+                </a:solidFill>
+                <a:latin typeface="Calibri" pitchFamily="34" charset="0"/>
+                <a:ea typeface="Calibri" pitchFamily="34" charset="-122"/>
+                <a:cs typeface="Calibri" pitchFamily="34" charset="-120"/>
+              </a:rPr>
+              <a:t>procurement stress, maximal in end-stage organ cubes — collinear with disease stage.</a:t>
+            </a:r>
+            <a:endParaRPr lang="en-US" sz="1250" dirty="0"/>
+          </a:p>
+        </p:txBody>
+      </p:sp>
+      <p:sp>
+        <p:nvSpPr>
+          <p:cNvPr id="11" name="Shape 8"/>
+          <p:cNvSpPr/>
+          <p:nvPr/>
+        </p:nvSpPr>
+        <p:spPr>
+          <a:xfrm>
+            <a:off x="640080" y="5532120"/>
+            <a:ext cx="10881360" cy="777240"/>
+          </a:xfrm>
+          <a:prstGeom prst="roundRect">
+            <a:avLst>
+              <a:gd name="adj" fmla="val 8235"/>
+            </a:avLst>
+          </a:prstGeom>
+          <a:solidFill>
+            <a:srgbClr val="16242B"/>
+          </a:solidFill>
+          <a:ln/>
+        </p:spPr>
+      </p:sp>
+      <p:sp>
+        <p:nvSpPr>
+          <p:cNvPr id="12" name="Text 9"/>
+          <p:cNvSpPr/>
+          <p:nvPr/>
+        </p:nvSpPr>
+        <p:spPr>
+          <a:xfrm>
+            <a:off x="914400" y="5650992"/>
+            <a:ext cx="10332720" cy="548640"/>
+          </a:xfrm>
+          <a:prstGeom prst="rect">
+            <a:avLst/>
+          </a:prstGeom>
+          <a:noFill/>
+          <a:ln/>
+        </p:spPr>
+        <p:txBody>
+          <a:bodyPr wrap="square" lIns="0" tIns="0" rIns="0" bIns="0" rtlCol="0" anchor="ctr"/>
+          <a:lstStyle/>
+          <a:p>
+            <a:pPr indent="0" marL="0">
+              <a:lnSpc>
+                <a:spcPts val="1800"/>
+              </a:lnSpc>
+              <a:buNone/>
+            </a:pPr>
+            <a:r>
+              <a:rPr lang="en-US" sz="1350" b="1" dirty="0">
+                <a:solidFill>
+                  <a:srgbClr val="C0561B"/>
+                </a:solidFill>
+                <a:latin typeface="Calibri" pitchFamily="34" charset="0"/>
+                <a:ea typeface="Calibri" pitchFamily="34" charset="-122"/>
+                <a:cs typeface="Calibri" pitchFamily="34" charset="-120"/>
+              </a:rPr>
+              <a:t>Textbook reversal:  </a:t>
+            </a:r>
+            <a:pPr indent="0" marL="0">
+              <a:lnSpc>
+                <a:spcPts val="1800"/>
+              </a:lnSpc>
+              <a:buNone/>
+            </a:pPr>
+            <a:r>
+              <a:rPr lang="en-US" sz="1350" dirty="0">
+                <a:solidFill>
+                  <a:srgbClr val="CFE0E2"/>
+                </a:solidFill>
+                <a:latin typeface="Calibri" pitchFamily="34" charset="0"/>
+                <a:ea typeface="Calibri" pitchFamily="34" charset="-122"/>
+                <a:cs typeface="Calibri" pitchFamily="34" charset="-120"/>
+              </a:rPr>
+              <a:t>each healthy donor is individually zonated (anti-corr −0.21), yet pooling the four flips the sign to +0.01 — “de-zonation” manufactured purely by aggregation.</a:t>
+            </a:r>
+            <a:endParaRPr lang="en-US" sz="1350" dirty="0"/>
+          </a:p>
+        </p:txBody>
+      </p:sp>
+      <p:sp>
+        <p:nvSpPr>
+          <p:cNvPr id="13" name="Text 10"/>
+          <p:cNvSpPr/>
+          <p:nvPr/>
+        </p:nvSpPr>
+        <p:spPr>
+          <a:xfrm>
+            <a:off x="11612880" y="6355080"/>
+            <a:ext cx="457200" cy="320040"/>
+          </a:xfrm>
+          <a:prstGeom prst="rect">
+            <a:avLst/>
+          </a:prstGeom>
+          <a:noFill/>
+          <a:ln/>
+        </p:spPr>
+        <p:txBody>
+          <a:bodyPr wrap="square" rtlCol="0" anchor="ctr"/>
+          <a:lstStyle/>
+          <a:p>
+            <a:pPr algn="r" indent="0" marL="0">
+              <a:buNone/>
+            </a:pPr>
+            <a:r>
+              <a:rPr lang="en-US" sz="1000" dirty="0">
+                <a:solidFill>
+                  <a:srgbClr val="5C6E73"/>
+                </a:solidFill>
+                <a:latin typeface="Calibri" pitchFamily="34" charset="0"/>
+                <a:ea typeface="Calibri" pitchFamily="34" charset="-122"/>
+                <a:cs typeface="Calibri" pitchFamily="34" charset="-120"/>
+              </a:rPr>
+              <a:t>7</a:t>
+            </a:r>
+            <a:endParaRPr lang="en-US" sz="1000" dirty="0"/>
+          </a:p>
+        </p:txBody>
+      </p:sp>
+    </p:spTree>
+  </p:cSld>
+  <p:clrMapOvr>
+    <a:masterClrMapping/>
+  </p:clrMapOvr>
+</p:sld>
+</file>
+
+<file path=ppt/slides/slide8.xml><?xml version="1.0" encoding="utf-8"?>
+<p:sld xmlns:a="http://schemas.openxmlformats.org/drawingml/2006/main" xmlns:r="http://schemas.openxmlformats.org/officeDocument/2006/relationships" xmlns:p="http://schemas.openxmlformats.org/presentationml/2006/main">
+  <p:cSld name="Slide 8">
+    <p:bg>
+      <p:bgPr>
+        <a:solidFill>
+          <a:srgbClr val="F7F5F1"/>
+        </a:solidFill>
+      </p:bgPr>
+    </p:bg>
+    <p:spTree>
+      <p:nvGrpSpPr>
+        <p:cNvPr id="1" name=""/>
+        <p:cNvGrpSpPr/>
+        <p:nvPr/>
+      </p:nvGrpSpPr>
+      <p:grpSpPr>
+        <a:xfrm>
+          <a:off x="0" y="0"/>
+          <a:ext cx="0" cy="0"/>
+          <a:chOff x="0" y="0"/>
+          <a:chExt cx="0" cy="0"/>
+        </a:xfrm>
+      </p:grpSpPr>
+      <p:sp>
+        <p:nvSpPr>
+          <p:cNvPr id="2" name="Shape 0"/>
+          <p:cNvSpPr/>
+          <p:nvPr/>
+        </p:nvSpPr>
+        <p:spPr>
+          <a:xfrm>
+            <a:off x="640080" y="502920"/>
+            <a:ext cx="164592" cy="310896"/>
+          </a:xfrm>
+          <a:prstGeom prst="rect">
+            <a:avLst/>
+          </a:prstGeom>
+          <a:solidFill>
+            <a:srgbClr val="1B6E78"/>
+          </a:solidFill>
+          <a:ln/>
+        </p:spPr>
+      </p:sp>
+      <p:sp>
+        <p:nvSpPr>
+          <p:cNvPr id="3" name="Text 1"/>
+          <p:cNvSpPr/>
+          <p:nvPr/>
+        </p:nvSpPr>
+        <p:spPr>
+          <a:xfrm>
+            <a:off x="896112" y="502920"/>
+            <a:ext cx="8229600" cy="310896"/>
+          </a:xfrm>
+          <a:prstGeom prst="rect">
+            <a:avLst/>
+          </a:prstGeom>
+          <a:noFill/>
+          <a:ln/>
+        </p:spPr>
+        <p:txBody>
+          <a:bodyPr wrap="square" lIns="0" tIns="0" rIns="0" bIns="0" rtlCol="0" anchor="ctr"/>
+          <a:lstStyle/>
+          <a:p>
+            <a:pPr indent="0" marL="0">
+              <a:buNone/>
+            </a:pPr>
+            <a:r>
+              <a:rPr lang="en-US" sz="1200" b="1" spc="300" kern="0" dirty="0">
+                <a:solidFill>
+                  <a:srgbClr val="1B6E78"/>
+                </a:solidFill>
+                <a:latin typeface="Calibri" pitchFamily="34" charset="0"/>
+                <a:ea typeface="Calibri" pitchFamily="34" charset="-122"/>
+                <a:cs typeface="Calibri" pitchFamily="34" charset="-120"/>
+              </a:rPr>
+              <a:t>HOW WE MEASURED</a:t>
+            </a:r>
+            <a:endParaRPr lang="en-US" sz="1200" dirty="0"/>
+          </a:p>
+        </p:txBody>
+      </p:sp>
+      <p:sp>
+        <p:nvSpPr>
+          <p:cNvPr id="4" name="Text 2"/>
+          <p:cNvSpPr/>
+          <p:nvPr/>
+        </p:nvSpPr>
+        <p:spPr>
+          <a:xfrm>
+            <a:off x="640080" y="868680"/>
+            <a:ext cx="10881360" cy="914400"/>
+          </a:xfrm>
+          <a:prstGeom prst="rect">
+            <a:avLst/>
+          </a:prstGeom>
+          <a:noFill/>
+          <a:ln/>
+        </p:spPr>
+        <p:txBody>
+          <a:bodyPr wrap="square" lIns="0" tIns="0" rIns="0" bIns="0" rtlCol="0" anchor="ctr"/>
+          <a:lstStyle/>
+          <a:p>
+            <a:pPr indent="0" marL="0">
+              <a:lnSpc>
+                <a:spcPts val="3400"/>
+              </a:lnSpc>
+              <a:buNone/>
+            </a:pPr>
+            <a:r>
+              <a:rPr lang="en-US" sz="3000" b="1" dirty="0">
+                <a:solidFill>
+                  <a:srgbClr val="1B2B31"/>
+                </a:solidFill>
+                <a:latin typeface="Georgia" pitchFamily="34" charset="0"/>
+                <a:ea typeface="Georgia" pitchFamily="34" charset="-122"/>
+                <a:cs typeface="Georgia" pitchFamily="34" charset="-120"/>
+              </a:rPr>
+              <a:t>We changed the measurement, not just the plot</a:t>
+            </a:r>
+            <a:endParaRPr lang="en-US" sz="3000" dirty="0"/>
+          </a:p>
+        </p:txBody>
+      </p:sp>
+      <p:sp>
+        <p:nvSpPr>
+          <p:cNvPr id="5" name="Shape 3"/>
+          <p:cNvSpPr/>
+          <p:nvPr/>
+        </p:nvSpPr>
+        <p:spPr>
+          <a:xfrm>
+            <a:off x="640080" y="2057400"/>
+            <a:ext cx="5486400" cy="1783080"/>
+          </a:xfrm>
+          <a:prstGeom prst="roundRect">
+            <a:avLst>
+              <a:gd name="adj" fmla="val 3590"/>
+            </a:avLst>
+          </a:prstGeom>
+          <a:solidFill>
+            <a:srgbClr val="FFFFFF"/>
+          </a:solidFill>
+          <a:ln/>
+          <a:effectLst>
+            <a:outerShdw sx="100000" sy="100000" kx="0" ky="0" algn="bl" rotWithShape="0" blurRad="88900" dist="38100" dir="8100000">
+              <a:srgbClr val="000000">
+                <a:alpha val="13000"/>
+              </a:srgbClr>
+            </a:outerShdw>
+          </a:effectLst>
+        </p:spPr>
+      </p:sp>
+      <p:sp>
+        <p:nvSpPr>
+          <p:cNvPr id="6" name="Shape 4"/>
+          <p:cNvSpPr/>
+          <p:nvPr/>
+        </p:nvSpPr>
+        <p:spPr>
+          <a:xfrm>
+            <a:off x="640080" y="2057400"/>
+            <a:ext cx="109728" cy="1783080"/>
+          </a:xfrm>
+          <a:prstGeom prst="rect">
+            <a:avLst/>
+          </a:prstGeom>
+          <a:solidFill>
+            <a:srgbClr val="1B6E78"/>
+          </a:solidFill>
+          <a:ln/>
+        </p:spPr>
+      </p:sp>
+      <p:sp>
+        <p:nvSpPr>
+          <p:cNvPr id="7" name="Text 5"/>
+          <p:cNvSpPr/>
+          <p:nvPr/>
+        </p:nvSpPr>
+        <p:spPr>
+          <a:xfrm>
+            <a:off x="960120" y="2258568"/>
+            <a:ext cx="4937760" cy="457200"/>
+          </a:xfrm>
+          <a:prstGeom prst="rect">
+            <a:avLst/>
+          </a:prstGeom>
+          <a:noFill/>
+          <a:ln/>
+        </p:spPr>
+        <p:txBody>
+          <a:bodyPr wrap="square" lIns="0" tIns="0" rIns="0" bIns="0" rtlCol="0" anchor="ctr"/>
+          <a:lstStyle/>
+          <a:p>
+            <a:pPr indent="0" marL="0">
+              <a:buNone/>
+            </a:pPr>
+            <a:r>
+              <a:rPr lang="en-US" sz="1800" b="1" dirty="0">
+                <a:solidFill>
+                  <a:srgbClr val="1B2B31"/>
+                </a:solidFill>
+                <a:latin typeface="Georgia" pitchFamily="34" charset="0"/>
+                <a:ea typeface="Georgia" pitchFamily="34" charset="-122"/>
+                <a:cs typeface="Georgia" pitchFamily="34" charset="-120"/>
+              </a:rPr>
+              <a:t>Raw UMI counts</a:t>
+            </a:r>
+            <a:endParaRPr lang="en-US" sz="1800" dirty="0"/>
+          </a:p>
+        </p:txBody>
+      </p:sp>
+      <p:sp>
+        <p:nvSpPr>
+          <p:cNvPr id="8" name="Text 6"/>
+          <p:cNvSpPr/>
+          <p:nvPr/>
+        </p:nvSpPr>
+        <p:spPr>
+          <a:xfrm>
+            <a:off x="960120" y="2770632"/>
+            <a:ext cx="4937760" cy="914400"/>
+          </a:xfrm>
+          <a:prstGeom prst="rect">
+            <a:avLst/>
+          </a:prstGeom>
+          <a:noFill/>
+          <a:ln/>
+        </p:spPr>
+        <p:txBody>
+          <a:bodyPr wrap="square" lIns="0" tIns="0" rIns="0" bIns="0" rtlCol="0" anchor="t"/>
+          <a:lstStyle/>
+          <a:p>
+            <a:pPr indent="0" marL="0">
+              <a:lnSpc>
+                <a:spcPts val="1900"/>
+              </a:lnSpc>
+              <a:buNone/>
+            </a:pPr>
+            <a:r>
+              <a:rPr lang="en-US" sz="1350" dirty="0">
+                <a:solidFill>
+                  <a:srgbClr val="45565B"/>
+                </a:solidFill>
+                <a:latin typeface="Calibri" pitchFamily="34" charset="0"/>
+                <a:ea typeface="Calibri" pitchFamily="34" charset="-122"/>
+                <a:cs typeface="Calibri" pitchFamily="34" charset="-120"/>
+              </a:rPr>
+              <a:t>The shipped matrix is an SCT model output (depth squeezed to ~5k). We extracted real molecule counts from the RNA assay.</a:t>
+            </a:r>
+            <a:endParaRPr lang="en-US" sz="1350" dirty="0"/>
+          </a:p>
+        </p:txBody>
+      </p:sp>
+      <p:sp>
+        <p:nvSpPr>
+          <p:cNvPr id="9" name="Shape 7"/>
+          <p:cNvSpPr/>
+          <p:nvPr/>
+        </p:nvSpPr>
+        <p:spPr>
+          <a:xfrm>
+            <a:off x="6446520" y="2057400"/>
+            <a:ext cx="5486400" cy="1783080"/>
+          </a:xfrm>
+          <a:prstGeom prst="roundRect">
+            <a:avLst>
+              <a:gd name="adj" fmla="val 3590"/>
+            </a:avLst>
+          </a:prstGeom>
+          <a:solidFill>
+            <a:srgbClr val="FFFFFF"/>
+          </a:solidFill>
+          <a:ln/>
+          <a:effectLst>
+            <a:outerShdw sx="100000" sy="100000" kx="0" ky="0" algn="bl" rotWithShape="0" blurRad="88900" dist="38100" dir="8100000">
+              <a:srgbClr val="000000">
+                <a:alpha val="13000"/>
+              </a:srgbClr>
+            </a:outerShdw>
+          </a:effectLst>
+        </p:spPr>
+      </p:sp>
+      <p:sp>
+        <p:nvSpPr>
+          <p:cNvPr id="10" name="Shape 8"/>
+          <p:cNvSpPr/>
+          <p:nvPr/>
+        </p:nvSpPr>
+        <p:spPr>
+          <a:xfrm>
+            <a:off x="6446520" y="2057400"/>
+            <a:ext cx="109728" cy="1783080"/>
+          </a:xfrm>
+          <a:prstGeom prst="rect">
+            <a:avLst/>
+          </a:prstGeom>
+          <a:solidFill>
+            <a:srgbClr val="C0561B"/>
+          </a:solidFill>
+          <a:ln/>
+        </p:spPr>
+      </p:sp>
+      <p:sp>
+        <p:nvSpPr>
+          <p:cNvPr id="11" name="Text 9"/>
+          <p:cNvSpPr/>
+          <p:nvPr/>
+        </p:nvSpPr>
+        <p:spPr>
+          <a:xfrm>
+            <a:off x="6766560" y="2258568"/>
+            <a:ext cx="4937760" cy="457200"/>
+          </a:xfrm>
+          <a:prstGeom prst="rect">
+            <a:avLst/>
+          </a:prstGeom>
+          <a:noFill/>
+          <a:ln/>
+        </p:spPr>
+        <p:txBody>
+          <a:bodyPr wrap="square" lIns="0" tIns="0" rIns="0" bIns="0" rtlCol="0" anchor="ctr"/>
+          <a:lstStyle/>
+          <a:p>
+            <a:pPr indent="0" marL="0">
+              <a:buNone/>
+            </a:pPr>
+            <a:r>
+              <a:rPr lang="en-US" sz="1800" b="1" dirty="0">
+                <a:solidFill>
+                  <a:srgbClr val="1B2B31"/>
+                </a:solidFill>
+                <a:latin typeface="Georgia" pitchFamily="34" charset="0"/>
+                <a:ea typeface="Georgia" pitchFamily="34" charset="-122"/>
+                <a:cs typeface="Georgia" pitchFamily="34" charset="-120"/>
+              </a:rPr>
+              <a:t>Depth-matched</a:t>
+            </a:r>
+            <a:endParaRPr lang="en-US" sz="1800" dirty="0"/>
+          </a:p>
+        </p:txBody>
+      </p:sp>
+      <p:sp>
+        <p:nvSpPr>
+          <p:cNvPr id="12" name="Text 10"/>
+          <p:cNvSpPr/>
+          <p:nvPr/>
+        </p:nvSpPr>
+        <p:spPr>
+          <a:xfrm>
+            <a:off x="6766560" y="2770632"/>
+            <a:ext cx="4937760" cy="914400"/>
+          </a:xfrm>
+          <a:prstGeom prst="rect">
+            <a:avLst/>
+          </a:prstGeom>
+          <a:noFill/>
+          <a:ln/>
+        </p:spPr>
+        <p:txBody>
+          <a:bodyPr wrap="square" lIns="0" tIns="0" rIns="0" bIns="0" rtlCol="0" anchor="t"/>
+          <a:lstStyle/>
+          <a:p>
+            <a:pPr indent="0" marL="0">
+              <a:lnSpc>
+                <a:spcPts val="1900"/>
+              </a:lnSpc>
+              <a:buNone/>
+            </a:pPr>
+            <a:r>
+              <a:rPr lang="en-US" sz="1350" dirty="0">
+                <a:solidFill>
+                  <a:srgbClr val="45565B"/>
+                </a:solidFill>
+                <a:latin typeface="Calibri" pitchFamily="34" charset="0"/>
+                <a:ea typeface="Calibri" pitchFamily="34" charset="-122"/>
+                <a:cs typeface="Calibri" pitchFamily="34" charset="-120"/>
+              </a:rPr>
+              <a:t>Downsample every nucleus to a common budget so detection differences reflect biology, not sequencing depth. Averaged over draws.</a:t>
+            </a:r>
+            <a:endParaRPr lang="en-US" sz="1350" dirty="0"/>
+          </a:p>
+        </p:txBody>
+      </p:sp>
+      <p:sp>
+        <p:nvSpPr>
+          <p:cNvPr id="13" name="Shape 11"/>
+          <p:cNvSpPr/>
+          <p:nvPr/>
+        </p:nvSpPr>
+        <p:spPr>
+          <a:xfrm>
+            <a:off x="640080" y="4114800"/>
+            <a:ext cx="5486400" cy="1783080"/>
+          </a:xfrm>
+          <a:prstGeom prst="roundRect">
+            <a:avLst>
+              <a:gd name="adj" fmla="val 3590"/>
+            </a:avLst>
+          </a:prstGeom>
+          <a:solidFill>
+            <a:srgbClr val="FFFFFF"/>
+          </a:solidFill>
+          <a:ln/>
+          <a:effectLst>
+            <a:outerShdw sx="100000" sy="100000" kx="0" ky="0" algn="bl" rotWithShape="0" blurRad="88900" dist="38100" dir="8100000">
+              <a:srgbClr val="000000">
+                <a:alpha val="13000"/>
+              </a:srgbClr>
+            </a:outerShdw>
+          </a:effectLst>
+        </p:spPr>
+      </p:sp>
+      <p:sp>
+        <p:nvSpPr>
+          <p:cNvPr id="14" name="Shape 12"/>
+          <p:cNvSpPr/>
+          <p:nvPr/>
+        </p:nvSpPr>
+        <p:spPr>
+          <a:xfrm>
+            <a:off x="640080" y="4114800"/>
+            <a:ext cx="109728" cy="1783080"/>
+          </a:xfrm>
+          <a:prstGeom prst="rect">
+            <a:avLst/>
+          </a:prstGeom>
+          <a:solidFill>
+            <a:srgbClr val="1B6E78"/>
+          </a:solidFill>
+          <a:ln/>
+        </p:spPr>
+      </p:sp>
+      <p:sp>
+        <p:nvSpPr>
+          <p:cNvPr id="15" name="Text 13"/>
+          <p:cNvSpPr/>
+          <p:nvPr/>
+        </p:nvSpPr>
+        <p:spPr>
+          <a:xfrm>
+            <a:off x="960120" y="4315968"/>
+            <a:ext cx="4937760" cy="457200"/>
+          </a:xfrm>
+          <a:prstGeom prst="rect">
+            <a:avLst/>
+          </a:prstGeom>
+          <a:noFill/>
+          <a:ln/>
+        </p:spPr>
+        <p:txBody>
+          <a:bodyPr wrap="square" lIns="0" tIns="0" rIns="0" bIns="0" rtlCol="0" anchor="ctr"/>
+          <a:lstStyle/>
+          <a:p>
+            <a:pPr indent="0" marL="0">
+              <a:buNone/>
+            </a:pPr>
+            <a:r>
+              <a:rPr lang="en-US" sz="1800" b="1" dirty="0">
+                <a:solidFill>
+                  <a:srgbClr val="1B2B31"/>
+                </a:solidFill>
+                <a:latin typeface="Georgia" pitchFamily="34" charset="0"/>
+                <a:ea typeface="Georgia" pitchFamily="34" charset="-122"/>
+                <a:cs typeface="Georgia" pitchFamily="34" charset="-120"/>
+              </a:rPr>
+              <a:t>Donor is the unit</a:t>
+            </a:r>
+            <a:endParaRPr lang="en-US" sz="1800" dirty="0"/>
+          </a:p>
+        </p:txBody>
+      </p:sp>
+      <p:sp>
+        <p:nvSpPr>
+          <p:cNvPr id="16" name="Text 14"/>
+          <p:cNvSpPr/>
+          <p:nvPr/>
+        </p:nvSpPr>
+        <p:spPr>
+          <a:xfrm>
+            <a:off x="960120" y="4828032"/>
+            <a:ext cx="4937760" cy="914400"/>
+          </a:xfrm>
+          <a:prstGeom prst="rect">
+            <a:avLst/>
+          </a:prstGeom>
+          <a:noFill/>
+          <a:ln/>
+        </p:spPr>
+        <p:txBody>
+          <a:bodyPr wrap="square" lIns="0" tIns="0" rIns="0" bIns="0" rtlCol="0" anchor="t"/>
+          <a:lstStyle/>
+          <a:p>
+            <a:pPr indent="0" marL="0">
+              <a:lnSpc>
+                <a:spcPts val="1900"/>
+              </a:lnSpc>
+              <a:buNone/>
+            </a:pPr>
+            <a:r>
+              <a:rPr lang="en-US" sz="1350" dirty="0">
+                <a:solidFill>
+                  <a:srgbClr val="45565B"/>
+                </a:solidFill>
+                <a:latin typeface="Calibri" pitchFamily="34" charset="0"/>
+                <a:ea typeface="Calibri" pitchFamily="34" charset="-122"/>
+                <a:cs typeface="Calibri" pitchFamily="34" charset="-120"/>
+              </a:rPr>
+              <a:t>Inference at the donor level (~47), never the cell — no pseudoreplication of tens of thousands of nuclei.</a:t>
+            </a:r>
+            <a:endParaRPr lang="en-US" sz="1350" dirty="0"/>
+          </a:p>
+        </p:txBody>
+      </p:sp>
+      <p:sp>
+        <p:nvSpPr>
+          <p:cNvPr id="17" name="Shape 15"/>
+          <p:cNvSpPr/>
+          <p:nvPr/>
+        </p:nvSpPr>
+        <p:spPr>
+          <a:xfrm>
+            <a:off x="6446520" y="4114800"/>
+            <a:ext cx="5486400" cy="1783080"/>
+          </a:xfrm>
+          <a:prstGeom prst="roundRect">
+            <a:avLst>
+              <a:gd name="adj" fmla="val 3590"/>
+            </a:avLst>
+          </a:prstGeom>
+          <a:solidFill>
+            <a:srgbClr val="FFFFFF"/>
+          </a:solidFill>
+          <a:ln/>
+          <a:effectLst>
+            <a:outerShdw sx="100000" sy="100000" kx="0" ky="0" algn="bl" rotWithShape="0" blurRad="88900" dist="38100" dir="8100000">
+              <a:srgbClr val="000000">
+                <a:alpha val="13000"/>
+              </a:srgbClr>
+            </a:outerShdw>
+          </a:effectLst>
+        </p:spPr>
+      </p:sp>
+      <p:sp>
+        <p:nvSpPr>
+          <p:cNvPr id="18" name="Shape 16"/>
+          <p:cNvSpPr/>
+          <p:nvPr/>
+        </p:nvSpPr>
+        <p:spPr>
+          <a:xfrm>
+            <a:off x="6446520" y="4114800"/>
+            <a:ext cx="109728" cy="1783080"/>
+          </a:xfrm>
+          <a:prstGeom prst="rect">
+            <a:avLst/>
+          </a:prstGeom>
+          <a:solidFill>
+            <a:srgbClr val="C0561B"/>
+          </a:solidFill>
+          <a:ln/>
+        </p:spPr>
+      </p:sp>
+      <p:sp>
+        <p:nvSpPr>
+          <p:cNvPr id="19" name="Text 17"/>
+          <p:cNvSpPr/>
+          <p:nvPr/>
+        </p:nvSpPr>
+        <p:spPr>
+          <a:xfrm>
+            <a:off x="6766560" y="4315968"/>
+            <a:ext cx="4937760" cy="457200"/>
+          </a:xfrm>
+          <a:prstGeom prst="rect">
+            <a:avLst/>
+          </a:prstGeom>
+          <a:noFill/>
+          <a:ln/>
+        </p:spPr>
+        <p:txBody>
+          <a:bodyPr wrap="square" lIns="0" tIns="0" rIns="0" bIns="0" rtlCol="0" anchor="ctr"/>
+          <a:lstStyle/>
+          <a:p>
+            <a:pPr indent="0" marL="0">
+              <a:buNone/>
+            </a:pPr>
+            <a:r>
+              <a:rPr lang="en-US" sz="1800" b="1" dirty="0">
+                <a:solidFill>
+                  <a:srgbClr val="1B2B31"/>
+                </a:solidFill>
+                <a:latin typeface="Georgia" pitchFamily="34" charset="0"/>
+                <a:ea typeface="Georgia" pitchFamily="34" charset="-122"/>
+                <a:cs typeface="Georgia" pitchFamily="34" charset="-120"/>
+              </a:rPr>
+              <a:t>Counts, not summaries</a:t>
+            </a:r>
+            <a:endParaRPr lang="en-US" sz="1800" dirty="0"/>
+          </a:p>
+        </p:txBody>
+      </p:sp>
+      <p:sp>
+        <p:nvSpPr>
+          <p:cNvPr id="20" name="Text 18"/>
+          <p:cNvSpPr/>
+          <p:nvPr/>
+        </p:nvSpPr>
+        <p:spPr>
+          <a:xfrm>
+            <a:off x="6766560" y="4828032"/>
+            <a:ext cx="4937760" cy="914400"/>
+          </a:xfrm>
+          <a:prstGeom prst="rect">
+            <a:avLst/>
+          </a:prstGeom>
+          <a:noFill/>
+          <a:ln/>
+        </p:spPr>
+        <p:txBody>
+          <a:bodyPr wrap="square" lIns="0" tIns="0" rIns="0" bIns="0" rtlCol="0" anchor="t"/>
+          <a:lstStyle/>
+          <a:p>
+            <a:pPr indent="0" marL="0">
+              <a:lnSpc>
+                <a:spcPts val="1900"/>
+              </a:lnSpc>
+              <a:buNone/>
+            </a:pPr>
+            <a:r>
+              <a:rPr lang="en-US" sz="1350" dirty="0">
+                <a:solidFill>
+                  <a:srgbClr val="45565B"/>
+                </a:solidFill>
+                <a:latin typeface="Calibri" pitchFamily="34" charset="0"/>
+                <a:ea typeface="Calibri" pitchFamily="34" charset="-122"/>
+                <a:cs typeface="Calibri" pitchFamily="34" charset="-120"/>
+              </a:rPr>
+              <a:t>Cell counts, fractions, molecule burdens — never marker correlations / spreads / z-scores that hide who moved.</a:t>
+            </a:r>
+            <a:endParaRPr lang="en-US" sz="1350" dirty="0"/>
+          </a:p>
+        </p:txBody>
+      </p:sp>
+      <p:sp>
+        <p:nvSpPr>
+          <p:cNvPr id="21" name="Text 19"/>
+          <p:cNvSpPr/>
+          <p:nvPr/>
+        </p:nvSpPr>
+        <p:spPr>
+          <a:xfrm>
+            <a:off x="11612880" y="6355080"/>
+            <a:ext cx="457200" cy="320040"/>
+          </a:xfrm>
+          <a:prstGeom prst="rect">
+            <a:avLst/>
+          </a:prstGeom>
+          <a:noFill/>
+          <a:ln/>
+        </p:spPr>
+        <p:txBody>
+          <a:bodyPr wrap="square" rtlCol="0" anchor="ctr"/>
+          <a:lstStyle/>
+          <a:p>
+            <a:pPr algn="r" indent="0" marL="0">
+              <a:buNone/>
+            </a:pPr>
+            <a:r>
+              <a:rPr lang="en-US" sz="1000" dirty="0">
+                <a:solidFill>
+                  <a:srgbClr val="5C6E73"/>
+                </a:solidFill>
+                <a:latin typeface="Calibri" pitchFamily="34" charset="0"/>
+                <a:ea typeface="Calibri" pitchFamily="34" charset="-122"/>
+                <a:cs typeface="Calibri" pitchFamily="34" charset="-120"/>
+              </a:rPr>
+              <a:t>8</a:t>
+            </a:r>
+            <a:endParaRPr lang="en-US" sz="1000" dirty="0"/>
+          </a:p>
+        </p:txBody>
+      </p:sp>
+    </p:spTree>
+  </p:cSld>
+  <p:clrMapOvr>
+    <a:masterClrMapping/>
+  </p:clrMapOvr>
+</p:sld>
+</file>
+
+<file path=ppt/slides/slide9.xml><?xml version="1.0" encoding="utf-8"?>
+<p:sld xmlns:a="http://schemas.openxmlformats.org/drawingml/2006/main" xmlns:r="http://schemas.openxmlformats.org/officeDocument/2006/relationships" xmlns:p="http://schemas.openxmlformats.org/presentationml/2006/main">
+  <p:cSld name="Slide 9">
+    <p:bg>
+      <p:bgPr>
+        <a:solidFill>
+          <a:srgbClr val="F7F5F1"/>
+        </a:solidFill>
+      </p:bgPr>
+    </p:bg>
+    <p:spTree>
+      <p:nvGrpSpPr>
+        <p:cNvPr id="1" name=""/>
+        <p:cNvGrpSpPr/>
+        <p:nvPr/>
+      </p:nvGrpSpPr>
+      <p:grpSpPr>
+        <a:xfrm>
+          <a:off x="0" y="0"/>
+          <a:ext cx="0" cy="0"/>
+          <a:chOff x="0" y="0"/>
+          <a:chExt cx="0" cy="0"/>
+        </a:xfrm>
+      </p:grpSpPr>
+      <p:sp>
+        <p:nvSpPr>
+          <p:cNvPr id="2" name="Shape 0"/>
+          <p:cNvSpPr/>
+          <p:nvPr/>
+        </p:nvSpPr>
+        <p:spPr>
+          <a:xfrm>
+            <a:off x="640080" y="502920"/>
+            <a:ext cx="164592" cy="310896"/>
+          </a:xfrm>
+          <a:prstGeom prst="rect">
+            <a:avLst/>
+          </a:prstGeom>
+          <a:solidFill>
+            <a:srgbClr val="1B6E78"/>
+          </a:solidFill>
+          <a:ln/>
+        </p:spPr>
+      </p:sp>
+      <p:sp>
+        <p:nvSpPr>
+          <p:cNvPr id="3" name="Text 1"/>
+          <p:cNvSpPr/>
+          <p:nvPr/>
+        </p:nvSpPr>
+        <p:spPr>
+          <a:xfrm>
+            <a:off x="896112" y="502920"/>
+            <a:ext cx="8229600" cy="310896"/>
+          </a:xfrm>
+          <a:prstGeom prst="rect">
+            <a:avLst/>
+          </a:prstGeom>
+          <a:noFill/>
+          <a:ln/>
+        </p:spPr>
+        <p:txBody>
+          <a:bodyPr wrap="square" lIns="0" tIns="0" rIns="0" bIns="0" rtlCol="0" anchor="ctr"/>
+          <a:lstStyle/>
+          <a:p>
+            <a:pPr indent="0" marL="0">
+              <a:buNone/>
+            </a:pPr>
+            <a:r>
+              <a:rPr lang="en-US" sz="1200" b="1" spc="300" kern="0" dirty="0">
+                <a:solidFill>
+                  <a:srgbClr val="1B6E78"/>
+                </a:solidFill>
+                <a:latin typeface="Calibri" pitchFamily="34" charset="0"/>
+                <a:ea typeface="Calibri" pitchFamily="34" charset="-122"/>
+                <a:cs typeface="Calibri" pitchFamily="34" charset="-120"/>
+              </a:rPr>
+              <a:t>THE TEST</a:t>
+            </a:r>
+            <a:endParaRPr lang="en-US" sz="1200" dirty="0"/>
+          </a:p>
+        </p:txBody>
+      </p:sp>
+      <p:sp>
+        <p:nvSpPr>
+          <p:cNvPr id="4" name="Text 2"/>
+          <p:cNvSpPr/>
+          <p:nvPr/>
+        </p:nvSpPr>
+        <p:spPr>
+          <a:xfrm>
+            <a:off x="640080" y="868680"/>
+            <a:ext cx="10881360" cy="914400"/>
+          </a:xfrm>
+          <a:prstGeom prst="rect">
+            <a:avLst/>
+          </a:prstGeom>
+          <a:noFill/>
+          <a:ln/>
+        </p:spPr>
+        <p:txBody>
+          <a:bodyPr wrap="square" lIns="0" tIns="0" rIns="0" bIns="0" rtlCol="0" anchor="ctr"/>
+          <a:lstStyle/>
+          <a:p>
+            <a:pPr indent="0" marL="0">
+              <a:lnSpc>
+                <a:spcPts val="3400"/>
+              </a:lnSpc>
+              <a:buNone/>
+            </a:pPr>
+            <a:r>
+              <a:rPr lang="en-US" sz="3000" b="1" dirty="0">
+                <a:solidFill>
+                  <a:srgbClr val="1B2B31"/>
+                </a:solidFill>
+                <a:latin typeface="Georgia" pitchFamily="34" charset="0"/>
+                <a:ea typeface="Georgia" pitchFamily="34" charset="-122"/>
+                <a:cs typeface="Georgia" pitchFamily="34" charset="-120"/>
+              </a:rPr>
               <a:t>Six snRNA marker-count signatures expected under zonation collapse</a:t>
             </a:r>
             <a:endParaRPr lang="en-US" sz="3000" dirty="0"/>
@@ -11296,7 +13473,7 @@
       </p:sp>
       <p:graphicFrame>
         <p:nvGraphicFramePr>
-          <p:cNvPr id="8" name="Table 0"/>
+          <p:cNvPr id="10" name="Table 0"/>
           <p:cNvGraphicFramePr>
             <a:graphicFrameLocks noGrp="1"/>
           </p:cNvGraphicFramePr>
@@ -12770,775 +14947,6 @@
       <p:sp>
         <p:nvSpPr>
           <p:cNvPr id="6" name="Text 3"/>
-          <p:cNvSpPr/>
-          <p:nvPr/>
-        </p:nvSpPr>
-        <p:spPr>
-          <a:xfrm>
-            <a:off x="11612880" y="6355080"/>
-            <a:ext cx="457200" cy="320040"/>
-          </a:xfrm>
-          <a:prstGeom prst="rect">
-            <a:avLst/>
-          </a:prstGeom>
-          <a:noFill/>
-          <a:ln/>
-        </p:spPr>
-        <p:txBody>
-          <a:bodyPr wrap="square" rtlCol="0" anchor="ctr"/>
-          <a:lstStyle/>
-          <a:p>
-            <a:pPr algn="r" indent="0" marL="0">
-              <a:buNone/>
-            </a:pPr>
-            <a:r>
-              <a:rPr lang="en-US" sz="1000" dirty="0">
-                <a:solidFill>
-                  <a:srgbClr val="5C6E73"/>
-                </a:solidFill>
-                <a:latin typeface="Calibri" pitchFamily="34" charset="0"/>
-                <a:ea typeface="Calibri" pitchFamily="34" charset="-122"/>
-                <a:cs typeface="Calibri" pitchFamily="34" charset="-120"/>
-              </a:rPr>
-              <a:t>7</a:t>
-            </a:r>
-            <a:endParaRPr lang="en-US" sz="1000" dirty="0"/>
-          </a:p>
-        </p:txBody>
-      </p:sp>
-    </p:spTree>
-  </p:cSld>
-  <p:clrMapOvr>
-    <a:masterClrMapping/>
-  </p:clrMapOvr>
-</p:sld>
-</file>
-
-<file path=ppt/slides/slide8.xml><?xml version="1.0" encoding="utf-8"?>
-<p:sld xmlns:a="http://schemas.openxmlformats.org/drawingml/2006/main" xmlns:r="http://schemas.openxmlformats.org/officeDocument/2006/relationships" xmlns:p="http://schemas.openxmlformats.org/presentationml/2006/main">
-  <p:cSld name="Slide 8">
-    <p:bg>
-      <p:bgPr>
-        <a:solidFill>
-          <a:srgbClr val="F7F5F1"/>
-        </a:solidFill>
-      </p:bgPr>
-    </p:bg>
-    <p:spTree>
-      <p:nvGrpSpPr>
-        <p:cNvPr id="1" name=""/>
-        <p:cNvGrpSpPr/>
-        <p:nvPr/>
-      </p:nvGrpSpPr>
-      <p:grpSpPr>
-        <a:xfrm>
-          <a:off x="0" y="0"/>
-          <a:ext cx="0" cy="0"/>
-          <a:chOff x="0" y="0"/>
-          <a:chExt cx="0" cy="0"/>
-        </a:xfrm>
-      </p:grpSpPr>
-      <p:sp>
-        <p:nvSpPr>
-          <p:cNvPr id="2" name="Shape 0"/>
-          <p:cNvSpPr/>
-          <p:nvPr/>
-        </p:nvSpPr>
-        <p:spPr>
-          <a:xfrm>
-            <a:off x="640080" y="502920"/>
-            <a:ext cx="164592" cy="310896"/>
-          </a:xfrm>
-          <a:prstGeom prst="rect">
-            <a:avLst/>
-          </a:prstGeom>
-          <a:solidFill>
-            <a:srgbClr val="1B6E78"/>
-          </a:solidFill>
-          <a:ln/>
-        </p:spPr>
-      </p:sp>
-      <p:sp>
-        <p:nvSpPr>
-          <p:cNvPr id="3" name="Text 1"/>
-          <p:cNvSpPr/>
-          <p:nvPr/>
-        </p:nvSpPr>
-        <p:spPr>
-          <a:xfrm>
-            <a:off x="896112" y="502920"/>
-            <a:ext cx="8229600" cy="310896"/>
-          </a:xfrm>
-          <a:prstGeom prst="rect">
-            <a:avLst/>
-          </a:prstGeom>
-          <a:noFill/>
-          <a:ln/>
-        </p:spPr>
-        <p:txBody>
-          <a:bodyPr wrap="square" lIns="0" tIns="0" rIns="0" bIns="0" rtlCol="0" anchor="ctr"/>
-          <a:lstStyle/>
-          <a:p>
-            <a:pPr indent="0" marL="0">
-              <a:buNone/>
-            </a:pPr>
-            <a:r>
-              <a:rPr lang="en-US" sz="1200" b="1" spc="300" kern="0" dirty="0">
-                <a:solidFill>
-                  <a:srgbClr val="1B6E78"/>
-                </a:solidFill>
-                <a:latin typeface="Calibri" pitchFamily="34" charset="0"/>
-                <a:ea typeface="Calibri" pitchFamily="34" charset="-122"/>
-                <a:cs typeface="Calibri" pitchFamily="34" charset="-120"/>
-              </a:rPr>
-              <a:t>RESULT</a:t>
-            </a:r>
-            <a:endParaRPr lang="en-US" sz="1200" dirty="0"/>
-          </a:p>
-        </p:txBody>
-      </p:sp>
-      <p:sp>
-        <p:nvSpPr>
-          <p:cNvPr id="4" name="Text 2"/>
-          <p:cNvSpPr/>
-          <p:nvPr/>
-        </p:nvSpPr>
-        <p:spPr>
-          <a:xfrm>
-            <a:off x="640080" y="868680"/>
-            <a:ext cx="10881360" cy="914400"/>
-          </a:xfrm>
-          <a:prstGeom prst="rect">
-            <a:avLst/>
-          </a:prstGeom>
-          <a:noFill/>
-          <a:ln/>
-        </p:spPr>
-        <p:txBody>
-          <a:bodyPr wrap="square" lIns="0" tIns="0" rIns="0" bIns="0" rtlCol="0" anchor="ctr"/>
-          <a:lstStyle/>
-          <a:p>
-            <a:pPr indent="0" marL="0">
-              <a:lnSpc>
-                <a:spcPts val="3400"/>
-              </a:lnSpc>
-              <a:buNone/>
-            </a:pPr>
-            <a:r>
-              <a:rPr lang="en-US" sz="3000" b="1" dirty="0">
-                <a:solidFill>
-                  <a:srgbClr val="1B2B31"/>
-                </a:solidFill>
-                <a:latin typeface="Georgia" pitchFamily="34" charset="0"/>
-                <a:ea typeface="Georgia" pitchFamily="34" charset="-122"/>
-                <a:cs typeface="Georgia" pitchFamily="34" charset="-120"/>
-              </a:rPr>
-              <a:t>None detected — within biopsy-stage power (F1→cirrhotic F4)</a:t>
-            </a:r>
-            <a:endParaRPr lang="en-US" sz="3000" dirty="0"/>
-          </a:p>
-        </p:txBody>
-      </p:sp>
-      <p:graphicFrame>
-        <p:nvGraphicFramePr>
-          <p:cNvPr id="5" name="Chart 0" descr=""/>
-          <p:cNvGraphicFramePr/>
-          <p:nvPr/>
-        </p:nvGraphicFramePr>
-        <p:xfrm>
-          <a:off x="640080" y="2011680"/>
-          <a:ext cx="6126480" cy="3840480"/>
-        </p:xfrm>
-        <a:graphic xmlns:a="http://schemas.openxmlformats.org/drawingml/2006/main">
-          <a:graphicData uri="http://schemas.openxmlformats.org/drawingml/2006/chart">
-            <c:chart xmlns:c="http://schemas.openxmlformats.org/drawingml/2006/chart" r:id="rId1"/>
-          </a:graphicData>
-        </a:graphic>
-      </p:graphicFrame>
-      <p:sp>
-        <p:nvSpPr>
-          <p:cNvPr id="6" name="Text 3"/>
-          <p:cNvSpPr/>
-          <p:nvPr/>
-        </p:nvSpPr>
-        <p:spPr>
-          <a:xfrm>
-            <a:off x="640080" y="5852160"/>
-            <a:ext cx="6126480" cy="365760"/>
-          </a:xfrm>
-          <a:prstGeom prst="rect">
-            <a:avLst/>
-          </a:prstGeom>
-          <a:noFill/>
-          <a:ln/>
-        </p:spPr>
-        <p:txBody>
-          <a:bodyPr wrap="square" lIns="0" tIns="0" rIns="0" bIns="0" rtlCol="0" anchor="ctr"/>
-          <a:lstStyle/>
-          <a:p>
-            <a:pPr algn="ctr" indent="0" marL="0">
-              <a:buNone/>
-            </a:pPr>
-            <a:r>
-              <a:rPr lang="en-US" sz="1200" i="1" dirty="0">
-                <a:solidFill>
-                  <a:srgbClr val="5C6E73"/>
-                </a:solidFill>
-                <a:latin typeface="Calibri" pitchFamily="34" charset="0"/>
-                <a:ea typeface="Calibri" pitchFamily="34" charset="-122"/>
-                <a:cs typeface="Calibri" pitchFamily="34" charset="-120"/>
-              </a:rPr>
-              <a:t>Pericentral-anchor fraction of hepatocyte nuclei vs fibrosis stage (flat, non-monotone)</a:t>
-            </a:r>
-            <a:endParaRPr lang="en-US" sz="1200" dirty="0"/>
-          </a:p>
-        </p:txBody>
-      </p:sp>
-      <p:sp>
-        <p:nvSpPr>
-          <p:cNvPr id="7" name="Shape 4"/>
-          <p:cNvSpPr/>
-          <p:nvPr/>
-        </p:nvSpPr>
-        <p:spPr>
-          <a:xfrm>
-            <a:off x="7132320" y="2011680"/>
-            <a:ext cx="4389120" cy="3840480"/>
-          </a:xfrm>
-          <a:prstGeom prst="roundRect">
-            <a:avLst>
-              <a:gd name="adj" fmla="val 1905"/>
-            </a:avLst>
-          </a:prstGeom>
-          <a:solidFill>
-            <a:srgbClr val="FFFFFF"/>
-          </a:solidFill>
-          <a:ln/>
-          <a:effectLst>
-            <a:outerShdw sx="100000" sy="100000" kx="0" ky="0" algn="bl" rotWithShape="0" blurRad="88900" dist="38100" dir="8100000">
-              <a:srgbClr val="000000">
-                <a:alpha val="13000"/>
-              </a:srgbClr>
-            </a:outerShdw>
-          </a:effectLst>
-        </p:spPr>
-      </p:sp>
-      <p:sp>
-        <p:nvSpPr>
-          <p:cNvPr id="8" name="Text 5"/>
-          <p:cNvSpPr/>
-          <p:nvPr/>
-        </p:nvSpPr>
-        <p:spPr>
-          <a:xfrm>
-            <a:off x="7360920" y="2240280"/>
-            <a:ext cx="3931920" cy="457200"/>
-          </a:xfrm>
-          <a:prstGeom prst="rect">
-            <a:avLst/>
-          </a:prstGeom>
-          <a:noFill/>
-          <a:ln/>
-        </p:spPr>
-        <p:txBody>
-          <a:bodyPr wrap="square" lIns="0" tIns="0" rIns="0" bIns="0" rtlCol="0" anchor="ctr"/>
-          <a:lstStyle/>
-          <a:p>
-            <a:pPr indent="0" marL="0">
-              <a:buNone/>
-            </a:pPr>
-            <a:r>
-              <a:rPr lang="en-US" sz="1500" b="1" dirty="0">
-                <a:solidFill>
-                  <a:srgbClr val="1B2B31"/>
-                </a:solidFill>
-                <a:latin typeface="Calibri" pitchFamily="34" charset="0"/>
-                <a:ea typeface="Calibri" pitchFamily="34" charset="-122"/>
-                <a:cs typeface="Calibri" pitchFamily="34" charset="-120"/>
-              </a:rPr>
-              <a:t>Robust to everything that could fake a null:</a:t>
-            </a:r>
-            <a:endParaRPr lang="en-US" sz="1500" dirty="0"/>
-          </a:p>
-        </p:txBody>
-      </p:sp>
-      <p:sp>
-        <p:nvSpPr>
-          <p:cNvPr id="9" name="Text 6"/>
-          <p:cNvSpPr/>
-          <p:nvPr/>
-        </p:nvSpPr>
-        <p:spPr>
-          <a:xfrm>
-            <a:off x="7360920" y="2788920"/>
-            <a:ext cx="3931920" cy="2971800"/>
-          </a:xfrm>
-          <a:prstGeom prst="rect">
-            <a:avLst/>
-          </a:prstGeom>
-          <a:noFill/>
-          <a:ln/>
-        </p:spPr>
-        <p:txBody>
-          <a:bodyPr wrap="square" lIns="0" tIns="0" rIns="0" bIns="0" rtlCol="0" anchor="ctr"/>
-          <a:lstStyle/>
-          <a:p>
-            <a:pPr marL="342900" indent="-342900">
-              <a:lnSpc>
-                <a:spcPts val="1900"/>
-              </a:lnSpc>
-              <a:spcAft>
-                <a:spcPts val="500"/>
-              </a:spcAft>
-              <a:buSzPct val="100000"/>
-              <a:buChar char="•"/>
-            </a:pPr>
-            <a:r>
-              <a:rPr lang="en-US" sz="1300" dirty="0">
-                <a:solidFill>
-                  <a:srgbClr val="45565B"/>
-                </a:solidFill>
-                <a:latin typeface="Calibri" pitchFamily="34" charset="0"/>
-                <a:ea typeface="Calibri" pitchFamily="34" charset="-122"/>
-                <a:cs typeface="Calibri" pitchFamily="34" charset="-120"/>
-              </a:rPr>
-              <a:t>depth budget 1,000 / 1,500 / 3,000 UMIs</a:t>
-            </a:r>
-            <a:endParaRPr lang="en-US" sz="1300" dirty="0"/>
-          </a:p>
-          <a:p>
-            <a:pPr marL="342900" indent="-342900">
-              <a:lnSpc>
-                <a:spcPts val="1900"/>
-              </a:lnSpc>
-              <a:spcAft>
-                <a:spcPts val="500"/>
-              </a:spcAft>
-              <a:buSzPct val="100000"/>
-              <a:buChar char="•"/>
-            </a:pPr>
-            <a:r>
-              <a:rPr lang="en-US" sz="1300" dirty="0">
-                <a:solidFill>
-                  <a:srgbClr val="45565B"/>
-                </a:solidFill>
-                <a:latin typeface="Calibri" pitchFamily="34" charset="0"/>
-                <a:ea typeface="Calibri" pitchFamily="34" charset="-122"/>
-                <a:cs typeface="Calibri" pitchFamily="34" charset="-120"/>
-              </a:rPr>
-              <a:t>anchor = GLUL-only / CYP3A4-only / both</a:t>
-            </a:r>
-            <a:endParaRPr lang="en-US" sz="1300" dirty="0"/>
-          </a:p>
-          <a:p>
-            <a:pPr marL="342900" indent="-342900">
-              <a:lnSpc>
-                <a:spcPts val="1900"/>
-              </a:lnSpc>
-              <a:spcAft>
-                <a:spcPts val="500"/>
-              </a:spcAft>
-              <a:buSzPct val="100000"/>
-              <a:buChar char="•"/>
-            </a:pPr>
-            <a:r>
-              <a:rPr lang="en-US" sz="1300" dirty="0">
-                <a:solidFill>
-                  <a:srgbClr val="45565B"/>
-                </a:solidFill>
-                <a:latin typeface="Calibri" pitchFamily="34" charset="0"/>
-                <a:ea typeface="Calibri" pitchFamily="34" charset="-122"/>
-                <a:cs typeface="Calibri" pitchFamily="34" charset="-120"/>
-              </a:rPr>
-              <a:t>8 thinning draws (noise SD 0.006–0.010)</a:t>
-            </a:r>
-            <a:endParaRPr lang="en-US" sz="1300" dirty="0"/>
-          </a:p>
-          <a:p>
-            <a:pPr marL="342900" indent="-342900">
-              <a:lnSpc>
-                <a:spcPts val="1900"/>
-              </a:lnSpc>
-              <a:spcAft>
-                <a:spcPts val="500"/>
-              </a:spcAft>
-              <a:buSzPct val="100000"/>
-              <a:buChar char="•"/>
-            </a:pPr>
-            <a:r>
-              <a:rPr lang="en-US" sz="1300" dirty="0">
-                <a:solidFill>
-                  <a:srgbClr val="45565B"/>
-                </a:solidFill>
-                <a:latin typeface="Calibri" pitchFamily="34" charset="0"/>
-                <a:ea typeface="Calibri" pitchFamily="34" charset="-122"/>
-                <a:cs typeface="Calibri" pitchFamily="34" charset="-120"/>
-              </a:rPr>
-              <a:t>every UMI threshold</a:t>
-            </a:r>
-            <a:endParaRPr lang="en-US" sz="1300" dirty="0"/>
-          </a:p>
-          <a:p>
-            <a:pPr marL="342900" indent="-342900">
-              <a:lnSpc>
-                <a:spcPts val="1900"/>
-              </a:lnSpc>
-              <a:spcAft>
-                <a:spcPts val="500"/>
-              </a:spcAft>
-              <a:buSzPct val="100000"/>
-              <a:buChar char="•"/>
-            </a:pPr>
-            <a:r>
-              <a:rPr lang="en-US" sz="1300" dirty="0">
-                <a:solidFill>
-                  <a:srgbClr val="45565B"/>
-                </a:solidFill>
-                <a:latin typeface="Calibri" pitchFamily="34" charset="0"/>
-                <a:ea typeface="Calibri" pitchFamily="34" charset="-122"/>
-                <a:cs typeface="Calibri" pitchFamily="34" charset="-120"/>
-              </a:rPr>
-              <a:t>real co-expression (≥2 UMI): ~0 in biopsy vs 7× in explants</a:t>
-            </a:r>
-            <a:endParaRPr lang="en-US" sz="1300" dirty="0"/>
-          </a:p>
-          <a:p>
-            <a:pPr marL="342900" indent="-342900">
-              <a:lnSpc>
-                <a:spcPts val="1900"/>
-              </a:lnSpc>
-              <a:spcAft>
-                <a:spcPts val="500"/>
-              </a:spcAft>
-              <a:buSzPct val="100000"/>
-              <a:buChar char="•"/>
-            </a:pPr>
-            <a:r>
-              <a:rPr lang="en-US" sz="1300" dirty="0">
-                <a:solidFill>
-                  <a:srgbClr val="45565B"/>
-                </a:solidFill>
-                <a:latin typeface="Calibri" pitchFamily="34" charset="0"/>
-                <a:ea typeface="Calibri" pitchFamily="34" charset="-122"/>
-                <a:cs typeface="Calibri" pitchFamily="34" charset="-120"/>
-              </a:rPr>
-              <a:t>ambient, contamination, ploidy: tested in counts — none drives it</a:t>
-            </a:r>
-            <a:endParaRPr lang="en-US" sz="1300" dirty="0"/>
-          </a:p>
-        </p:txBody>
-      </p:sp>
-      <p:sp>
-        <p:nvSpPr>
-          <p:cNvPr id="10" name="Text 7"/>
-          <p:cNvSpPr/>
-          <p:nvPr/>
-        </p:nvSpPr>
-        <p:spPr>
-          <a:xfrm>
-            <a:off x="11612880" y="6355080"/>
-            <a:ext cx="457200" cy="320040"/>
-          </a:xfrm>
-          <a:prstGeom prst="rect">
-            <a:avLst/>
-          </a:prstGeom>
-          <a:noFill/>
-          <a:ln/>
-        </p:spPr>
-        <p:txBody>
-          <a:bodyPr wrap="square" rtlCol="0" anchor="ctr"/>
-          <a:lstStyle/>
-          <a:p>
-            <a:pPr algn="r" indent="0" marL="0">
-              <a:buNone/>
-            </a:pPr>
-            <a:r>
-              <a:rPr lang="en-US" sz="1000" dirty="0">
-                <a:solidFill>
-                  <a:srgbClr val="5C6E73"/>
-                </a:solidFill>
-                <a:latin typeface="Calibri" pitchFamily="34" charset="0"/>
-                <a:ea typeface="Calibri" pitchFamily="34" charset="-122"/>
-                <a:cs typeface="Calibri" pitchFamily="34" charset="-120"/>
-              </a:rPr>
-              <a:t>8</a:t>
-            </a:r>
-            <a:endParaRPr lang="en-US" sz="1000" dirty="0"/>
-          </a:p>
-        </p:txBody>
-      </p:sp>
-    </p:spTree>
-  </p:cSld>
-  <p:clrMapOvr>
-    <a:masterClrMapping/>
-  </p:clrMapOvr>
-</p:sld>
-</file>
-
-<file path=ppt/slides/slide9.xml><?xml version="1.0" encoding="utf-8"?>
-<p:sld xmlns:a="http://schemas.openxmlformats.org/drawingml/2006/main" xmlns:r="http://schemas.openxmlformats.org/officeDocument/2006/relationships" xmlns:p="http://schemas.openxmlformats.org/presentationml/2006/main">
-  <p:cSld name="Slide 9">
-    <p:bg>
-      <p:bgPr>
-        <a:solidFill>
-          <a:srgbClr val="F7F5F1"/>
-        </a:solidFill>
-      </p:bgPr>
-    </p:bg>
-    <p:spTree>
-      <p:nvGrpSpPr>
-        <p:cNvPr id="1" name=""/>
-        <p:cNvGrpSpPr/>
-        <p:nvPr/>
-      </p:nvGrpSpPr>
-      <p:grpSpPr>
-        <a:xfrm>
-          <a:off x="0" y="0"/>
-          <a:ext cx="0" cy="0"/>
-          <a:chOff x="0" y="0"/>
-          <a:chExt cx="0" cy="0"/>
-        </a:xfrm>
-      </p:grpSpPr>
-      <p:sp>
-        <p:nvSpPr>
-          <p:cNvPr id="2" name="Shape 0"/>
-          <p:cNvSpPr/>
-          <p:nvPr/>
-        </p:nvSpPr>
-        <p:spPr>
-          <a:xfrm>
-            <a:off x="640080" y="502920"/>
-            <a:ext cx="164592" cy="310896"/>
-          </a:xfrm>
-          <a:prstGeom prst="rect">
-            <a:avLst/>
-          </a:prstGeom>
-          <a:solidFill>
-            <a:srgbClr val="1B6E78"/>
-          </a:solidFill>
-          <a:ln/>
-        </p:spPr>
-      </p:sp>
-      <p:sp>
-        <p:nvSpPr>
-          <p:cNvPr id="3" name="Text 1"/>
-          <p:cNvSpPr/>
-          <p:nvPr/>
-        </p:nvSpPr>
-        <p:spPr>
-          <a:xfrm>
-            <a:off x="896112" y="502920"/>
-            <a:ext cx="8229600" cy="310896"/>
-          </a:xfrm>
-          <a:prstGeom prst="rect">
-            <a:avLst/>
-          </a:prstGeom>
-          <a:noFill/>
-          <a:ln/>
-        </p:spPr>
-        <p:txBody>
-          <a:bodyPr wrap="square" lIns="0" tIns="0" rIns="0" bIns="0" rtlCol="0" anchor="ctr"/>
-          <a:lstStyle/>
-          <a:p>
-            <a:pPr indent="0" marL="0">
-              <a:buNone/>
-            </a:pPr>
-            <a:r>
-              <a:rPr lang="en-US" sz="1200" b="1" spc="300" kern="0" dirty="0">
-                <a:solidFill>
-                  <a:srgbClr val="1B6E78"/>
-                </a:solidFill>
-                <a:latin typeface="Calibri" pitchFamily="34" charset="0"/>
-                <a:ea typeface="Calibri" pitchFamily="34" charset="-122"/>
-                <a:cs typeface="Calibri" pitchFamily="34" charset="-120"/>
-              </a:rPr>
-              <a:t>THE PICTURE</a:t>
-            </a:r>
-            <a:endParaRPr lang="en-US" sz="1200" dirty="0"/>
-          </a:p>
-        </p:txBody>
-      </p:sp>
-      <p:sp>
-        <p:nvSpPr>
-          <p:cNvPr id="4" name="Text 2"/>
-          <p:cNvSpPr/>
-          <p:nvPr/>
-        </p:nvSpPr>
-        <p:spPr>
-          <a:xfrm>
-            <a:off x="640080" y="868680"/>
-            <a:ext cx="10881360" cy="914400"/>
-          </a:xfrm>
-          <a:prstGeom prst="rect">
-            <a:avLst/>
-          </a:prstGeom>
-          <a:noFill/>
-          <a:ln/>
-        </p:spPr>
-        <p:txBody>
-          <a:bodyPr wrap="square" lIns="0" tIns="0" rIns="0" bIns="0" rtlCol="0" anchor="ctr"/>
-          <a:lstStyle/>
-          <a:p>
-            <a:pPr indent="0" marL="0">
-              <a:lnSpc>
-                <a:spcPts val="3400"/>
-              </a:lnSpc>
-              <a:buNone/>
-            </a:pPr>
-            <a:r>
-              <a:rPr lang="en-US" sz="3000" b="1" dirty="0">
-                <a:solidFill>
-                  <a:srgbClr val="1B2B31"/>
-                </a:solidFill>
-                <a:latin typeface="Georgia" pitchFamily="34" charset="0"/>
-                <a:ea typeface="Georgia" pitchFamily="34" charset="-122"/>
-                <a:cs typeface="Georgia" pitchFamily="34" charset="-120"/>
-              </a:rPr>
-              <a:t>The gradient stays broad through cirrhosis — collapses only in explants</a:t>
-            </a:r>
-            <a:endParaRPr lang="en-US" sz="3000" dirty="0"/>
-          </a:p>
-        </p:txBody>
-      </p:sp>
-      <p:pic>
-        <p:nvPicPr>
-          <p:cNvPr id="5" name="Image 0" descr="../results/figures/h2/gapfill_polarization.png">    </p:cNvPr>
-          <p:cNvPicPr>
-            <a:picLocks noChangeAspect="1"/>
-          </p:cNvPicPr>
-          <p:nvPr/>
-        </p:nvPicPr>
-        <p:blipFill>
-          <a:blip r:embed="rId1"/>
-          <a:srcRect l="0" r="0" t="0" b="0"/>
-          <a:stretch/>
-        </p:blipFill>
-        <p:spPr>
-          <a:xfrm>
-            <a:off x="640080" y="2148840"/>
-            <a:ext cx="8595360" cy="3886200"/>
-          </a:xfrm>
-          <a:prstGeom prst="rect">
-            <a:avLst/>
-          </a:prstGeom>
-        </p:spPr>
-      </p:pic>
-      <p:sp>
-        <p:nvSpPr>
-          <p:cNvPr id="6" name="Shape 3"/>
-          <p:cNvSpPr/>
-          <p:nvPr/>
-        </p:nvSpPr>
-        <p:spPr>
-          <a:xfrm>
-            <a:off x="9509760" y="2514600"/>
-            <a:ext cx="2103120" cy="3063240"/>
-          </a:xfrm>
-          <a:prstGeom prst="roundRect">
-            <a:avLst>
-              <a:gd name="adj" fmla="val 3478"/>
-            </a:avLst>
-          </a:prstGeom>
-          <a:solidFill>
-            <a:srgbClr val="123F47"/>
-          </a:solidFill>
-          <a:ln/>
-          <a:effectLst>
-            <a:outerShdw sx="100000" sy="100000" kx="0" ky="0" algn="bl" rotWithShape="0" blurRad="88900" dist="38100" dir="8100000">
-              <a:srgbClr val="000000">
-                <a:alpha val="13000"/>
-              </a:srgbClr>
-            </a:outerShdw>
-          </a:effectLst>
-        </p:spPr>
-      </p:sp>
-      <p:sp>
-        <p:nvSpPr>
-          <p:cNvPr id="7" name="Text 4"/>
-          <p:cNvSpPr/>
-          <p:nvPr/>
-        </p:nvSpPr>
-        <p:spPr>
-          <a:xfrm>
-            <a:off x="9710928" y="2514600"/>
-            <a:ext cx="1737360" cy="3063240"/>
-          </a:xfrm>
-          <a:prstGeom prst="rect">
-            <a:avLst/>
-          </a:prstGeom>
-          <a:noFill/>
-          <a:ln/>
-        </p:spPr>
-        <p:txBody>
-          <a:bodyPr wrap="square" lIns="0" tIns="0" rIns="0" bIns="0" rtlCol="0" anchor="ctr"/>
-          <a:lstStyle/>
-          <a:p>
-            <a:pPr indent="0" marL="0">
-              <a:lnSpc>
-                <a:spcPts val="1800"/>
-              </a:lnSpc>
-              <a:buNone/>
-            </a:pPr>
-            <a:r>
-              <a:rPr lang="en-US" sz="1300" dirty="0">
-                <a:solidFill>
-                  <a:srgbClr val="D7E6E8"/>
-                </a:solidFill>
-                <a:latin typeface="Calibri" pitchFamily="34" charset="0"/>
-                <a:ea typeface="Calibri" pitchFamily="34" charset="-122"/>
-                <a:cs typeface="Calibri" pitchFamily="34" charset="-120"/>
-              </a:rPr>
-              <a:t>Each panel = per-nucleus zonal balance, PC ↔ PP.
-</a:t>
-            </a:r>
-            <a:endParaRPr lang="en-US" sz="1300" dirty="0"/>
-          </a:p>
-          <a:p>
-            <a:pPr indent="0" marL="0">
-              <a:lnSpc>
-                <a:spcPts val="1800"/>
-              </a:lnSpc>
-              <a:buNone/>
-            </a:pPr>
-            <a:r>
-              <a:rPr lang="en-US" sz="1300" b="1" dirty="0">
-                <a:solidFill>
-                  <a:srgbClr val="FFFFFF"/>
-                </a:solidFill>
-                <a:latin typeface="Calibri" pitchFamily="34" charset="0"/>
-                <a:ea typeface="Calibri" pitchFamily="34" charset="-122"/>
-                <a:cs typeface="Calibri" pitchFamily="34" charset="-120"/>
-              </a:rPr>
-              <a:t>F0–F4: broad, spread — zonation intact.
-</a:t>
-            </a:r>
-            <a:endParaRPr lang="en-US" sz="1300" dirty="0"/>
-          </a:p>
-          <a:p>
-            <a:pPr indent="0" marL="0">
-              <a:lnSpc>
-                <a:spcPts val="1800"/>
-              </a:lnSpc>
-              <a:buNone/>
-            </a:pPr>
-            <a:r>
-              <a:rPr lang="en-US" sz="1300" b="1" dirty="0">
-                <a:solidFill>
-                  <a:srgbClr val="C0561B"/>
-                </a:solidFill>
-                <a:latin typeface="Calibri" pitchFamily="34" charset="0"/>
-                <a:ea typeface="Calibri" pitchFamily="34" charset="-122"/>
-                <a:cs typeface="Calibri" pitchFamily="34" charset="-120"/>
-              </a:rPr>
-              <a:t>Explant: abnormal only here, and heterogeneous across donors (one even retains PC).</a:t>
-            </a:r>
-            <a:endParaRPr lang="en-US" sz="1300" dirty="0"/>
-          </a:p>
-        </p:txBody>
-      </p:sp>
-      <p:sp>
-        <p:nvSpPr>
-          <p:cNvPr id="8" name="Text 5"/>
           <p:cNvSpPr/>
           <p:nvPr/>
         </p:nvSpPr>
